--- a/docs/diagrams/cuga-flo-overview.pptx
+++ b/docs/diagrams/cuga-flo-overview.pptx
@@ -3119,7 +3119,7 @@
               </a:spcAft>
             </a:pPr>
             <a:r>
-              <a:rPr sz="1050" b="1" i="0">
+              <a:rPr sz="1050" b="1">
                 <a:solidFill>
                   <a:srgbClr val="3B7DD8"/>
                 </a:solidFill>
@@ -3158,7 +3158,7 @@
               </a:spcAft>
             </a:pPr>
             <a:r>
-              <a:rPr sz="2800" b="1" i="0">
+              <a:rPr sz="2800" b="1">
                 <a:solidFill>
                   <a:srgbClr val="1A2332"/>
                 </a:solidFill>
@@ -3241,7 +3241,7 @@
               </a:spcAft>
             </a:pPr>
             <a:r>
-              <a:rPr sz="1250" b="0" i="0">
+              <a:rPr sz="1250" b="0">
                 <a:solidFill>
                   <a:srgbClr val="667085"/>
                 </a:solidFill>
@@ -3280,7 +3280,7 @@
               </a:spcAft>
             </a:pPr>
             <a:r>
-              <a:rPr sz="1000" b="1" i="0">
+              <a:rPr sz="1000" b="1">
                 <a:solidFill>
                   <a:srgbClr val="667085"/>
                 </a:solidFill>
@@ -3570,7 +3570,7 @@
               </a:spcAft>
             </a:pPr>
             <a:r>
-              <a:rPr sz="1000" b="1" i="0">
+              <a:rPr sz="1000" b="1">
                 <a:solidFill>
                   <a:srgbClr val="667085"/>
                 </a:solidFill>
@@ -3657,7 +3657,7 @@
               </a:spcAft>
             </a:pPr>
             <a:r>
-              <a:rPr sz="1100" b="1" i="0">
+              <a:rPr sz="1100" b="1">
                 <a:solidFill>
                   <a:srgbClr val="3B7DD8"/>
                 </a:solidFill>
@@ -3696,7 +3696,7 @@
               </a:spcAft>
             </a:pPr>
             <a:r>
-              <a:rPr sz="900" b="0" i="0">
+              <a:rPr sz="900" b="0">
                 <a:solidFill>
                   <a:srgbClr val="667085"/>
                 </a:solidFill>
@@ -3712,7 +3712,7 @@
               </a:spcAft>
             </a:pPr>
             <a:r>
-              <a:rPr sz="900" b="0" i="0">
+              <a:rPr sz="900" b="0">
                 <a:solidFill>
                   <a:srgbClr val="667085"/>
                 </a:solidFill>
@@ -3799,7 +3799,7 @@
               </a:spcAft>
             </a:pPr>
             <a:r>
-              <a:rPr sz="1100" b="1" i="0">
+              <a:rPr sz="1100" b="1">
                 <a:solidFill>
                   <a:srgbClr val="3B7DD8"/>
                 </a:solidFill>
@@ -3838,7 +3838,7 @@
               </a:spcAft>
             </a:pPr>
             <a:r>
-              <a:rPr sz="900" b="0" i="0">
+              <a:rPr sz="900" b="0">
                 <a:solidFill>
                   <a:srgbClr val="667085"/>
                 </a:solidFill>
@@ -3854,7 +3854,7 @@
               </a:spcAft>
             </a:pPr>
             <a:r>
-              <a:rPr sz="900" b="0" i="0">
+              <a:rPr sz="900" b="0">
                 <a:solidFill>
                   <a:srgbClr val="667085"/>
                 </a:solidFill>
@@ -3941,7 +3941,7 @@
               </a:spcAft>
             </a:pPr>
             <a:r>
-              <a:rPr sz="1100" b="1" i="0">
+              <a:rPr sz="1100" b="1">
                 <a:solidFill>
                   <a:srgbClr val="3B7DD8"/>
                 </a:solidFill>
@@ -3980,7 +3980,7 @@
               </a:spcAft>
             </a:pPr>
             <a:r>
-              <a:rPr sz="900" b="0" i="0">
+              <a:rPr sz="900" b="0">
                 <a:solidFill>
                   <a:srgbClr val="667085"/>
                 </a:solidFill>
@@ -3996,7 +3996,7 @@
               </a:spcAft>
             </a:pPr>
             <a:r>
-              <a:rPr sz="900" b="0" i="0">
+              <a:rPr sz="900" b="0">
                 <a:solidFill>
                   <a:srgbClr val="667085"/>
                 </a:solidFill>
@@ -4035,7 +4035,7 @@
               </a:spcAft>
             </a:pPr>
             <a:r>
-              <a:rPr sz="1000" b="1" i="0">
+              <a:rPr sz="1000" b="1">
                 <a:solidFill>
                   <a:srgbClr val="667085"/>
                 </a:solidFill>
@@ -4074,7 +4074,7 @@
               </a:spcAft>
             </a:pPr>
             <a:r>
-              <a:rPr sz="1150" b="0" i="0">
+              <a:rPr sz="1150" b="0">
                 <a:solidFill>
                   <a:srgbClr val="1A2332"/>
                 </a:solidFill>
@@ -4131,7 +4131,7 @@
               </a:spcAft>
             </a:pPr>
             <a:r>
-              <a:rPr sz="1050" b="1" i="0">
+              <a:rPr sz="1050" b="1">
                 <a:solidFill>
                   <a:srgbClr val="3B7DD8"/>
                 </a:solidFill>
@@ -4170,7 +4170,7 @@
               </a:spcAft>
             </a:pPr>
             <a:r>
-              <a:rPr sz="2800" b="1" i="0">
+              <a:rPr sz="2800" b="1">
                 <a:solidFill>
                   <a:srgbClr val="1A2332"/>
                 </a:solidFill>
@@ -4253,7 +4253,7 @@
               </a:spcAft>
             </a:pPr>
             <a:r>
-              <a:rPr sz="1250" b="0" i="0">
+              <a:rPr sz="1250" b="0">
                 <a:solidFill>
                   <a:srgbClr val="667085"/>
                 </a:solidFill>
@@ -4480,7 +4480,7 @@
               </a:spcAft>
             </a:pPr>
             <a:r>
-              <a:rPr sz="1300" b="1" i="0">
+              <a:rPr sz="1300" b="1">
                 <a:solidFill>
                   <a:srgbClr val="1A2332"/>
                 </a:solidFill>
@@ -4519,7 +4519,7 @@
               </a:spcAft>
             </a:pPr>
             <a:r>
-              <a:rPr sz="950" b="0" i="0">
+              <a:rPr sz="950" b="0">
                 <a:solidFill>
                   <a:srgbClr val="667085"/>
                 </a:solidFill>
@@ -4535,7 +4535,7 @@
               </a:spcAft>
             </a:pPr>
             <a:r>
-              <a:rPr sz="950" b="0" i="0">
+              <a:rPr sz="950" b="0">
                 <a:solidFill>
                   <a:srgbClr val="667085"/>
                 </a:solidFill>
@@ -4662,7 +4662,7 @@
               </a:spcAft>
             </a:pPr>
             <a:r>
-              <a:rPr sz="1000" b="1" i="0">
+              <a:rPr sz="1000" b="1">
                 <a:solidFill>
                   <a:srgbClr val="667085"/>
                 </a:solidFill>
@@ -5136,7 +5136,7 @@
               </a:spcAft>
             </a:pPr>
             <a:r>
-              <a:rPr sz="1000" b="1" i="0">
+              <a:rPr sz="1000" b="1">
                 <a:solidFill>
                   <a:srgbClr val="667085"/>
                 </a:solidFill>
@@ -5223,7 +5223,7 @@
               </a:spcAft>
             </a:pPr>
             <a:r>
-              <a:rPr sz="950" b="1" i="0">
+              <a:rPr sz="950" b="1">
                 <a:solidFill>
                   <a:srgbClr val="3B7DD8"/>
                 </a:solidFill>
@@ -5262,7 +5262,7 @@
               </a:spcAft>
             </a:pPr>
             <a:r>
-              <a:rPr sz="950" b="0" i="0">
+              <a:rPr sz="950" b="0">
                 <a:solidFill>
                   <a:srgbClr val="667085"/>
                 </a:solidFill>
@@ -5301,7 +5301,7 @@
               </a:spcAft>
             </a:pPr>
             <a:r>
-              <a:rPr sz="950" b="1" i="0">
+              <a:rPr sz="950" b="1">
                 <a:solidFill>
                   <a:srgbClr val="3B7DD8"/>
                 </a:solidFill>
@@ -5340,7 +5340,7 @@
               </a:spcAft>
             </a:pPr>
             <a:r>
-              <a:rPr sz="950" b="0" i="0">
+              <a:rPr sz="950" b="0">
                 <a:solidFill>
                   <a:srgbClr val="667085"/>
                 </a:solidFill>
@@ -5379,7 +5379,7 @@
               </a:spcAft>
             </a:pPr>
             <a:r>
-              <a:rPr sz="950" b="1" i="0">
+              <a:rPr sz="950" b="1">
                 <a:solidFill>
                   <a:srgbClr val="3B7DD8"/>
                 </a:solidFill>
@@ -5418,7 +5418,7 @@
               </a:spcAft>
             </a:pPr>
             <a:r>
-              <a:rPr sz="950" b="0" i="0">
+              <a:rPr sz="950" b="0">
                 <a:solidFill>
                   <a:srgbClr val="667085"/>
                 </a:solidFill>
@@ -5457,7 +5457,7 @@
               </a:spcAft>
             </a:pPr>
             <a:r>
-              <a:rPr sz="950" b="1" i="0">
+              <a:rPr sz="950" b="1">
                 <a:solidFill>
                   <a:srgbClr val="3B7DD8"/>
                 </a:solidFill>
@@ -5496,7 +5496,7 @@
               </a:spcAft>
             </a:pPr>
             <a:r>
-              <a:rPr sz="950" b="0" i="0">
+              <a:rPr sz="950" b="0">
                 <a:solidFill>
                   <a:srgbClr val="667085"/>
                 </a:solidFill>
@@ -5535,7 +5535,7 @@
               </a:spcAft>
             </a:pPr>
             <a:r>
-              <a:rPr sz="950" b="1" i="0">
+              <a:rPr sz="950" b="1">
                 <a:solidFill>
                   <a:srgbClr val="3B7DD8"/>
                 </a:solidFill>
@@ -5574,7 +5574,7 @@
               </a:spcAft>
             </a:pPr>
             <a:r>
-              <a:rPr sz="950" b="0" i="0">
+              <a:rPr sz="950" b="0">
                 <a:solidFill>
                   <a:srgbClr val="667085"/>
                 </a:solidFill>
@@ -5613,7 +5613,7 @@
               </a:spcAft>
             </a:pPr>
             <a:r>
-              <a:rPr sz="950" b="1" i="0">
+              <a:rPr sz="950" b="1">
                 <a:solidFill>
                   <a:srgbClr val="3B7DD8"/>
                 </a:solidFill>
@@ -5652,7 +5652,7 @@
               </a:spcAft>
             </a:pPr>
             <a:r>
-              <a:rPr sz="950" b="0" i="0">
+              <a:rPr sz="950" b="0">
                 <a:solidFill>
                   <a:srgbClr val="667085"/>
                 </a:solidFill>
@@ -5691,7 +5691,7 @@
               </a:spcAft>
             </a:pPr>
             <a:r>
-              <a:rPr sz="1100" b="0" i="0">
+              <a:rPr sz="1100" b="0">
                 <a:solidFill>
                   <a:srgbClr val="1A2332"/>
                 </a:solidFill>
@@ -5748,7 +5748,7 @@
               </a:spcAft>
             </a:pPr>
             <a:r>
-              <a:rPr sz="1050" b="1" i="0">
+              <a:rPr sz="1050" b="1">
                 <a:solidFill>
                   <a:srgbClr val="3B7DD8"/>
                 </a:solidFill>
@@ -5787,13 +5787,13 @@
               </a:spcAft>
             </a:pPr>
             <a:r>
-              <a:rPr sz="2800" b="1" i="0">
+              <a:rPr sz="2800" b="1">
                 <a:solidFill>
                   <a:srgbClr val="1A2332"/>
                 </a:solidFill>
                 <a:latin typeface="Calibri"/>
               </a:rPr>
-              <a:t>Three engines behind one contract</a:t>
+              <a:t>Three engines, one contract</a:t>
             </a:r>
           </a:p>
         </p:txBody>
@@ -5851,7 +5851,7 @@
         <p:spPr>
           <a:xfrm>
             <a:off x="566928" y="1481328"/>
-            <a:ext cx="11064240" cy="365760"/>
+            <a:ext cx="11064240" cy="411480"/>
           </a:xfrm>
           <a:prstGeom prst="rect">
             <a:avLst/>
@@ -5870,696 +5870,167 @@
               </a:spcAft>
             </a:pPr>
             <a:r>
-              <a:rPr sz="1250" b="0" i="0">
+              <a:rPr sz="1250" b="0">
                 <a:solidFill>
                   <a:srgbClr val="667085"/>
                 </a:solidFill>
                 <a:latin typeface="Calibri"/>
               </a:rPr>
-              <a:t>Selecting an engine is one line of YAML. The reasoning layer, the policies and the process definition are unchanged across all three.</a:t>
-            </a:r>
-          </a:p>
-        </p:txBody>
-      </p:sp>
-      <p:graphicFrame>
-        <p:nvGraphicFramePr>
-          <p:cNvPr id="6" name="Table 5"/>
-          <p:cNvGraphicFramePr>
-            <a:graphicFrameLocks noGrp="1"/>
-          </p:cNvGraphicFramePr>
-          <p:nvPr/>
-        </p:nvGraphicFramePr>
-        <p:xfrm>
-          <a:off x="566928" y="1993392"/>
-          <a:ext cx="11064240" cy="2514596"/>
-        </p:xfrm>
-        <a:graphic>
-          <a:graphicData uri="http://schemas.openxmlformats.org/drawingml/2006/table">
-            <a:tbl>
-              <a:tblPr firstRow="1" bandRow="1">
-                <a:tableStyleId>{5C22544A-7EE6-4342-B048-85BDC9FD1C3A}</a:tableStyleId>
-              </a:tblPr>
-              <a:tblGrid>
-                <a:gridCol w="1600200"/>
-                <a:gridCol w="2880360"/>
-                <a:gridCol w="3108960"/>
-                <a:gridCol w="3474720"/>
-              </a:tblGrid>
-              <a:tr h="359228">
-                <a:tc>
-                  <a:txBody>
-                    <a:bodyPr/>
-                    <a:lstStyle/>
-                    <a:p>
-                      <a:r>
-                        <a:rPr sz="950" b="1">
-                          <a:solidFill>
-                            <a:srgbClr val="1A2332"/>
-                          </a:solidFill>
-                          <a:latin typeface="Calibri"/>
-                        </a:rPr>
-                        <a:t> </a:t>
-                      </a:r>
-                    </a:p>
-                  </a:txBody>
-                  <a:tcPr marL="82296" marR="82296" marT="18288" marB="18288" anchor="ctr">
-                    <a:solidFill>
-                      <a:srgbClr val="E6F2FF"/>
-                    </a:solidFill>
-                  </a:tcPr>
-                </a:tc>
-                <a:tc>
-                  <a:txBody>
-                    <a:bodyPr/>
-                    <a:lstStyle/>
-                    <a:p>
-                      <a:r>
-                        <a:rPr sz="950" b="1">
-                          <a:solidFill>
-                            <a:srgbClr val="1A2332"/>
-                          </a:solidFill>
-                          <a:latin typeface="Calibri"/>
-                        </a:rPr>
-                        <a:t>LangGraph</a:t>
-                      </a:r>
-                    </a:p>
-                  </a:txBody>
-                  <a:tcPr marL="82296" marR="82296" marT="18288" marB="18288" anchor="ctr">
-                    <a:solidFill>
-                      <a:srgbClr val="E6F2FF"/>
-                    </a:solidFill>
-                  </a:tcPr>
-                </a:tc>
-                <a:tc>
-                  <a:txBody>
-                    <a:bodyPr/>
-                    <a:lstStyle/>
-                    <a:p>
-                      <a:r>
-                        <a:rPr sz="950" b="1">
-                          <a:solidFill>
-                            <a:srgbClr val="1A2332"/>
-                          </a:solidFill>
-                          <a:latin typeface="Calibri"/>
-                        </a:rPr>
-                        <a:t>Flowable</a:t>
-                      </a:r>
-                    </a:p>
-                  </a:txBody>
-                  <a:tcPr marL="82296" marR="82296" marT="18288" marB="18288" anchor="ctr">
-                    <a:solidFill>
-                      <a:srgbClr val="E6F2FF"/>
-                    </a:solidFill>
-                  </a:tcPr>
-                </a:tc>
-                <a:tc>
-                  <a:txBody>
-                    <a:bodyPr/>
-                    <a:lstStyle/>
-                    <a:p>
-                      <a:r>
-                        <a:rPr sz="950" b="1">
-                          <a:solidFill>
-                            <a:srgbClr val="1A2332"/>
-                          </a:solidFill>
-                          <a:latin typeface="Calibri"/>
-                        </a:rPr>
-                        <a:t>Kogito</a:t>
-                      </a:r>
-                    </a:p>
-                  </a:txBody>
-                  <a:tcPr marL="82296" marR="82296" marT="18288" marB="18288" anchor="ctr">
-                    <a:solidFill>
-                      <a:srgbClr val="E6F2FF"/>
-                    </a:solidFill>
-                  </a:tcPr>
-                </a:tc>
-              </a:tr>
-              <a:tr h="359228">
-                <a:tc>
-                  <a:txBody>
-                    <a:bodyPr/>
-                    <a:lstStyle/>
-                    <a:p>
-                      <a:r>
-                        <a:rPr sz="950" b="1">
-                          <a:solidFill>
-                            <a:srgbClr val="1A2332"/>
-                          </a:solidFill>
-                          <a:latin typeface="Calibri"/>
-                        </a:rPr>
-                        <a:t>Role</a:t>
-                      </a:r>
-                    </a:p>
-                  </a:txBody>
-                  <a:tcPr marL="82296" marR="82296" marT="18288" marB="18288" anchor="ctr">
-                    <a:solidFill>
-                      <a:srgbClr val="FFFFFF"/>
-                    </a:solidFill>
-                  </a:tcPr>
-                </a:tc>
-                <a:tc>
-                  <a:txBody>
-                    <a:bodyPr/>
-                    <a:lstStyle/>
-                    <a:p>
-                      <a:r>
-                        <a:rPr sz="950" b="0">
-                          <a:solidFill>
-                            <a:srgbClr val="667085"/>
-                          </a:solidFill>
-                          <a:latin typeface="Calibri"/>
-                        </a:rPr>
-                        <a:t>in-process demo</a:t>
-                      </a:r>
-                    </a:p>
-                  </a:txBody>
-                  <a:tcPr marL="82296" marR="82296" marT="18288" marB="18288" anchor="ctr">
-                    <a:solidFill>
-                      <a:srgbClr val="FFFFFF"/>
-                    </a:solidFill>
-                  </a:tcPr>
-                </a:tc>
-                <a:tc>
-                  <a:txBody>
-                    <a:bodyPr/>
-                    <a:lstStyle/>
-                    <a:p>
-                      <a:r>
-                        <a:rPr sz="950" b="0">
-                          <a:solidFill>
-                            <a:srgbClr val="667085"/>
-                          </a:solidFill>
-                          <a:latin typeface="Calibri"/>
-                        </a:rPr>
-                        <a:t>external engine</a:t>
-                      </a:r>
-                    </a:p>
-                  </a:txBody>
-                  <a:tcPr marL="82296" marR="82296" marT="18288" marB="18288" anchor="ctr">
-                    <a:solidFill>
-                      <a:srgbClr val="FFFFFF"/>
-                    </a:solidFill>
-                  </a:tcPr>
-                </a:tc>
-                <a:tc>
-                  <a:txBody>
-                    <a:bodyPr/>
-                    <a:lstStyle/>
-                    <a:p>
-                      <a:r>
-                        <a:rPr sz="950" b="0">
-                          <a:solidFill>
-                            <a:srgbClr val="667085"/>
-                          </a:solidFill>
-                          <a:latin typeface="Calibri"/>
-                        </a:rPr>
-                        <a:t>external engine</a:t>
-                      </a:r>
-                    </a:p>
-                  </a:txBody>
-                  <a:tcPr marL="82296" marR="82296" marT="18288" marB="18288" anchor="ctr">
-                    <a:solidFill>
-                      <a:srgbClr val="FFFFFF"/>
-                    </a:solidFill>
-                  </a:tcPr>
-                </a:tc>
-              </a:tr>
-              <a:tr h="359228">
-                <a:tc>
-                  <a:txBody>
-                    <a:bodyPr/>
-                    <a:lstStyle/>
-                    <a:p>
-                      <a:r>
-                        <a:rPr sz="950" b="1">
-                          <a:solidFill>
-                            <a:srgbClr val="1A2332"/>
-                          </a:solidFill>
-                          <a:latin typeface="Calibri"/>
-                        </a:rPr>
-                        <a:t>Adapter</a:t>
-                      </a:r>
-                    </a:p>
-                  </a:txBody>
-                  <a:tcPr marL="82296" marR="82296" marT="18288" marB="18288" anchor="ctr">
-                    <a:solidFill>
-                      <a:srgbClr val="FFFFFF"/>
-                    </a:solidFill>
-                  </a:tcPr>
-                </a:tc>
-                <a:tc>
-                  <a:txBody>
-                    <a:bodyPr/>
-                    <a:lstStyle/>
-                    <a:p>
-                      <a:r>
-                        <a:rPr sz="950" b="0">
-                          <a:solidFill>
-                            <a:srgbClr val="667085"/>
-                          </a:solidFill>
-                          <a:latin typeface="Calibri"/>
-                        </a:rPr>
-                        <a:t>LangGraphWorkflowEngine</a:t>
-                      </a:r>
-                    </a:p>
-                  </a:txBody>
-                  <a:tcPr marL="82296" marR="82296" marT="18288" marB="18288" anchor="ctr">
-                    <a:solidFill>
-                      <a:srgbClr val="FFFFFF"/>
-                    </a:solidFill>
-                  </a:tcPr>
-                </a:tc>
-                <a:tc>
-                  <a:txBody>
-                    <a:bodyPr/>
-                    <a:lstStyle/>
-                    <a:p>
-                      <a:r>
-                        <a:rPr sz="950" b="0">
-                          <a:solidFill>
-                            <a:srgbClr val="667085"/>
-                          </a:solidFill>
-                          <a:latin typeface="Calibri"/>
-                        </a:rPr>
-                        <a:t>FlowableProxy</a:t>
-                      </a:r>
-                    </a:p>
-                  </a:txBody>
-                  <a:tcPr marL="82296" marR="82296" marT="18288" marB="18288" anchor="ctr">
-                    <a:solidFill>
-                      <a:srgbClr val="FFFFFF"/>
-                    </a:solidFill>
-                  </a:tcPr>
-                </a:tc>
-                <a:tc>
-                  <a:txBody>
-                    <a:bodyPr/>
-                    <a:lstStyle/>
-                    <a:p>
-                      <a:r>
-                        <a:rPr sz="950" b="0">
-                          <a:solidFill>
-                            <a:srgbClr val="667085"/>
-                          </a:solidFill>
-                          <a:latin typeface="Calibri"/>
-                        </a:rPr>
-                        <a:t>KogitoProxy</a:t>
-                      </a:r>
-                    </a:p>
-                  </a:txBody>
-                  <a:tcPr marL="82296" marR="82296" marT="18288" marB="18288" anchor="ctr">
-                    <a:solidFill>
-                      <a:srgbClr val="FFFFFF"/>
-                    </a:solidFill>
-                  </a:tcPr>
-                </a:tc>
-              </a:tr>
-              <a:tr h="359228">
-                <a:tc>
-                  <a:txBody>
-                    <a:bodyPr/>
-                    <a:lstStyle/>
-                    <a:p>
-                      <a:r>
-                        <a:rPr sz="950" b="1">
-                          <a:solidFill>
-                            <a:srgbClr val="1A2332"/>
-                          </a:solidFill>
-                          <a:latin typeface="Calibri"/>
-                        </a:rPr>
-                        <a:t>Runtime</a:t>
-                      </a:r>
-                    </a:p>
-                  </a:txBody>
-                  <a:tcPr marL="82296" marR="82296" marT="18288" marB="18288" anchor="ctr">
-                    <a:solidFill>
-                      <a:srgbClr val="FFFFFF"/>
-                    </a:solidFill>
-                  </a:tcPr>
-                </a:tc>
-                <a:tc>
-                  <a:txBody>
-                    <a:bodyPr/>
-                    <a:lstStyle/>
-                    <a:p>
-                      <a:r>
-                        <a:rPr sz="950" b="0">
-                          <a:solidFill>
-                            <a:srgbClr val="667085"/>
-                          </a:solidFill>
-                          <a:latin typeface="Calibri"/>
-                        </a:rPr>
-                        <a:t>same Python process</a:t>
-                      </a:r>
-                    </a:p>
-                  </a:txBody>
-                  <a:tcPr marL="82296" marR="82296" marT="18288" marB="18288" anchor="ctr">
-                    <a:solidFill>
-                      <a:srgbClr val="FFFFFF"/>
-                    </a:solidFill>
-                  </a:tcPr>
-                </a:tc>
-                <a:tc>
-                  <a:txBody>
-                    <a:bodyPr/>
-                    <a:lstStyle/>
-                    <a:p>
-                      <a:r>
-                        <a:rPr sz="950" b="0">
-                          <a:solidFill>
-                            <a:srgbClr val="667085"/>
-                          </a:solidFill>
-                          <a:latin typeface="Calibri"/>
-                        </a:rPr>
-                        <a:t>Docker container :8080</a:t>
-                      </a:r>
-                    </a:p>
-                  </a:txBody>
-                  <a:tcPr marL="82296" marR="82296" marT="18288" marB="18288" anchor="ctr">
-                    <a:solidFill>
-                      <a:srgbClr val="FFFFFF"/>
-                    </a:solidFill>
-                  </a:tcPr>
-                </a:tc>
-                <a:tc>
-                  <a:txBody>
-                    <a:bodyPr/>
-                    <a:lstStyle/>
-                    <a:p>
-                      <a:r>
-                        <a:rPr sz="950" b="0">
-                          <a:solidFill>
-                            <a:srgbClr val="667085"/>
-                          </a:solidFill>
-                          <a:latin typeface="Calibri"/>
-                        </a:rPr>
-                        <a:t>Quarkus service :8081</a:t>
-                      </a:r>
-                    </a:p>
-                  </a:txBody>
-                  <a:tcPr marL="82296" marR="82296" marT="18288" marB="18288" anchor="ctr">
-                    <a:solidFill>
-                      <a:srgbClr val="FFFFFF"/>
-                    </a:solidFill>
-                  </a:tcPr>
-                </a:tc>
-              </a:tr>
-              <a:tr h="359228">
-                <a:tc>
-                  <a:txBody>
-                    <a:bodyPr/>
-                    <a:lstStyle/>
-                    <a:p>
-                      <a:r>
-                        <a:rPr sz="950" b="1">
-                          <a:solidFill>
-                            <a:srgbClr val="1A2332"/>
-                          </a:solidFill>
-                          <a:latin typeface="Calibri"/>
-                        </a:rPr>
-                        <a:t>MCP transport</a:t>
-                      </a:r>
-                    </a:p>
-                  </a:txBody>
-                  <a:tcPr marL="82296" marR="82296" marT="18288" marB="18288" anchor="ctr">
-                    <a:solidFill>
-                      <a:srgbClr val="FFFFFF"/>
-                    </a:solidFill>
-                  </a:tcPr>
-                </a:tc>
-                <a:tc>
-                  <a:txBody>
-                    <a:bodyPr/>
-                    <a:lstStyle/>
-                    <a:p>
-                      <a:r>
-                        <a:rPr sz="950" b="0">
-                          <a:solidFill>
-                            <a:srgbClr val="667085"/>
-                          </a:solidFill>
-                          <a:latin typeface="Calibri"/>
-                        </a:rPr>
-                        <a:t>in-process FastMCPTransport</a:t>
-                      </a:r>
-                    </a:p>
-                  </a:txBody>
-                  <a:tcPr marL="82296" marR="82296" marT="18288" marB="18288" anchor="ctr">
-                    <a:solidFill>
-                      <a:srgbClr val="FFFFFF"/>
-                    </a:solidFill>
-                  </a:tcPr>
-                </a:tc>
-                <a:tc>
-                  <a:txBody>
-                    <a:bodyPr/>
-                    <a:lstStyle/>
-                    <a:p>
-                      <a:r>
-                        <a:rPr sz="950" b="0">
-                          <a:solidFill>
-                            <a:srgbClr val="667085"/>
-                          </a:solidFill>
-                          <a:latin typeface="Calibri"/>
-                        </a:rPr>
-                        <a:t>HTTP :8090 callback</a:t>
-                      </a:r>
-                    </a:p>
-                  </a:txBody>
-                  <a:tcPr marL="82296" marR="82296" marT="18288" marB="18288" anchor="ctr">
-                    <a:solidFill>
-                      <a:srgbClr val="FFFFFF"/>
-                    </a:solidFill>
-                  </a:tcPr>
-                </a:tc>
-                <a:tc>
-                  <a:txBody>
-                    <a:bodyPr/>
-                    <a:lstStyle/>
-                    <a:p>
-                      <a:r>
-                        <a:rPr sz="950" b="0">
-                          <a:solidFill>
-                            <a:srgbClr val="667085"/>
-                          </a:solidFill>
-                          <a:latin typeface="Calibri"/>
-                        </a:rPr>
-                        <a:t>HTTP :8090 callback</a:t>
-                      </a:r>
-                    </a:p>
-                  </a:txBody>
-                  <a:tcPr marL="82296" marR="82296" marT="18288" marB="18288" anchor="ctr">
-                    <a:solidFill>
-                      <a:srgbClr val="FFFFFF"/>
-                    </a:solidFill>
-                  </a:tcPr>
-                </a:tc>
-              </a:tr>
-              <a:tr h="359228">
-                <a:tc>
-                  <a:txBody>
-                    <a:bodyPr/>
-                    <a:lstStyle/>
-                    <a:p>
-                      <a:r>
-                        <a:rPr sz="950" b="1">
-                          <a:solidFill>
-                            <a:srgbClr val="1A2332"/>
-                          </a:solidFill>
-                          <a:latin typeface="Calibri"/>
-                        </a:rPr>
-                        <a:t>BPMN deployed</a:t>
-                      </a:r>
-                    </a:p>
-                  </a:txBody>
-                  <a:tcPr marL="82296" marR="82296" marT="18288" marB="18288" anchor="ctr">
-                    <a:solidFill>
-                      <a:srgbClr val="FFFFFF"/>
-                    </a:solidFill>
-                  </a:tcPr>
-                </a:tc>
-                <a:tc>
-                  <a:txBody>
-                    <a:bodyPr/>
-                    <a:lstStyle/>
-                    <a:p>
-                      <a:r>
-                        <a:rPr sz="950" b="0">
-                          <a:solidFill>
-                            <a:srgbClr val="667085"/>
-                          </a:solidFill>
-                          <a:latin typeface="Calibri"/>
-                        </a:rPr>
-                        <a:t>at graph compile</a:t>
-                      </a:r>
-                    </a:p>
-                  </a:txBody>
-                  <a:tcPr marL="82296" marR="82296" marT="18288" marB="18288" anchor="ctr">
-                    <a:solidFill>
-                      <a:srgbClr val="FFFFFF"/>
-                    </a:solidFill>
-                  </a:tcPr>
-                </a:tc>
-                <a:tc>
-                  <a:txBody>
-                    <a:bodyPr/>
-                    <a:lstStyle/>
-                    <a:p>
-                      <a:r>
-                        <a:rPr sz="950" b="0">
-                          <a:solidFill>
-                            <a:srgbClr val="667085"/>
-                          </a:solidFill>
-                          <a:latin typeface="Calibri"/>
-                        </a:rPr>
-                        <a:t>at runtime, via REST</a:t>
-                      </a:r>
-                    </a:p>
-                  </a:txBody>
-                  <a:tcPr marL="82296" marR="82296" marT="18288" marB="18288" anchor="ctr">
-                    <a:solidFill>
-                      <a:srgbClr val="FFFFFF"/>
-                    </a:solidFill>
-                  </a:tcPr>
-                </a:tc>
-                <a:tc>
-                  <a:txBody>
-                    <a:bodyPr/>
-                    <a:lstStyle/>
-                    <a:p>
-                      <a:r>
-                        <a:rPr sz="950" b="0">
-                          <a:solidFill>
-                            <a:srgbClr val="667085"/>
-                          </a:solidFill>
-                          <a:latin typeface="Calibri"/>
-                        </a:rPr>
-                        <a:t>at build time — no runtime deploy</a:t>
-                      </a:r>
-                    </a:p>
-                  </a:txBody>
-                  <a:tcPr marL="82296" marR="82296" marT="18288" marB="18288" anchor="ctr">
-                    <a:solidFill>
-                      <a:srgbClr val="FFFFFF"/>
-                    </a:solidFill>
-                  </a:tcPr>
-                </a:tc>
-              </a:tr>
-              <a:tr h="359228">
-                <a:tc>
-                  <a:txBody>
-                    <a:bodyPr/>
-                    <a:lstStyle/>
-                    <a:p>
-                      <a:r>
-                        <a:rPr sz="950" b="1">
-                          <a:solidFill>
-                            <a:srgbClr val="1A2332"/>
-                          </a:solidFill>
-                          <a:latin typeface="Calibri"/>
-                        </a:rPr>
-                        <a:t>Hook redirect</a:t>
-                      </a:r>
-                    </a:p>
-                  </a:txBody>
-                  <a:tcPr marL="82296" marR="82296" marT="18288" marB="18288" anchor="ctr">
-                    <a:solidFill>
-                      <a:srgbClr val="FFFFFF"/>
-                    </a:solidFill>
-                  </a:tcPr>
-                </a:tc>
-                <a:tc>
-                  <a:txBody>
-                    <a:bodyPr/>
-                    <a:lstStyle/>
-                    <a:p>
-                      <a:r>
-                        <a:rPr sz="950" b="0">
-                          <a:solidFill>
-                            <a:srgbClr val="667085"/>
-                          </a:solidFill>
-                          <a:latin typeface="Calibri"/>
-                        </a:rPr>
-                        <a:t>graph recompile</a:t>
-                      </a:r>
-                    </a:p>
-                  </a:txBody>
-                  <a:tcPr marL="82296" marR="82296" marT="18288" marB="18288" anchor="ctr">
-                    <a:solidFill>
-                      <a:srgbClr val="FFFFFF"/>
-                    </a:solidFill>
-                  </a:tcPr>
-                </a:tc>
-                <a:tc>
-                  <a:txBody>
-                    <a:bodyPr/>
-                    <a:lstStyle/>
-                    <a:p>
-                      <a:r>
-                        <a:rPr sz="950" b="0">
-                          <a:solidFill>
-                            <a:srgbClr val="667085"/>
-                          </a:solidFill>
-                          <a:latin typeface="Calibri"/>
-                        </a:rPr>
-                        <a:t>BpmnError + boundary event</a:t>
-                      </a:r>
-                    </a:p>
-                    <a:p>
-                      <a:r>
-                        <a:rPr sz="950" b="0">
-                          <a:solidFill>
-                            <a:srgbClr val="667085"/>
-                          </a:solidFill>
-                          <a:latin typeface="Calibri"/>
-                        </a:rPr>
-                        <a:t>+ Task_DynamicSkip</a:t>
-                      </a:r>
-                    </a:p>
-                  </a:txBody>
-                  <a:tcPr marL="82296" marR="82296" marT="18288" marB="18288" anchor="ctr">
-                    <a:solidFill>
-                      <a:srgbClr val="FFFFFF"/>
-                    </a:solidFill>
-                  </a:tcPr>
-                </a:tc>
-                <a:tc>
-                  <a:txBody>
-                    <a:bodyPr/>
-                    <a:lstStyle/>
-                    <a:p>
-                      <a:r>
-                        <a:rPr sz="950" b="0">
-                          <a:solidFill>
-                            <a:srgbClr val="667085"/>
-                          </a:solidFill>
-                          <a:latin typeface="Calibri"/>
-                        </a:rPr>
-                        <a:t>FlowRedirect.to() — one script task</a:t>
-                      </a:r>
-                    </a:p>
-                  </a:txBody>
-                  <a:tcPr marL="82296" marR="82296" marT="18288" marB="18288" anchor="ctr">
-                    <a:solidFill>
-                      <a:srgbClr val="FFFFFF"/>
-                    </a:solidFill>
-                  </a:tcPr>
-                </a:tc>
-              </a:tr>
-            </a:tbl>
-          </a:graphicData>
-        </a:graphic>
-      </p:graphicFrame>
-      <p:sp>
-        <p:nvSpPr>
-          <p:cNvPr id="7" name="TextBox 6"/>
+              <a:t>The same process runs on any of them. Which one is a deployment choice, not a design change — one line of YAML.</a:t>
+            </a:r>
+          </a:p>
+        </p:txBody>
+      </p:sp>
+      <p:sp>
+        <p:nvSpPr>
+          <p:cNvPr id="6" name="Rounded Rectangle 5"/>
+          <p:cNvSpPr/>
+          <p:nvPr/>
+        </p:nvSpPr>
+        <p:spPr>
+          <a:xfrm>
+            <a:off x="566928" y="2084831"/>
+            <a:ext cx="3566160" cy="2148840"/>
+          </a:xfrm>
+          <a:prstGeom prst="roundRect">
+            <a:avLst>
+              <a:gd name="adj" fmla="val 5000"/>
+            </a:avLst>
+          </a:prstGeom>
+          <a:solidFill>
+            <a:srgbClr val="FFFFFF"/>
+          </a:solidFill>
+          <a:ln w="15875">
+            <a:solidFill>
+              <a:srgbClr val="3B7DD8"/>
+            </a:solidFill>
+          </a:ln>
+          <a:effectLst/>
+        </p:spPr>
+        <p:style>
+          <a:lnRef idx="1">
+            <a:schemeClr val="accent1"/>
+          </a:lnRef>
+          <a:fillRef idx="3">
+            <a:schemeClr val="accent1"/>
+          </a:fillRef>
+          <a:effectRef idx="2">
+            <a:schemeClr val="accent1"/>
+          </a:effectRef>
+          <a:fontRef idx="minor">
+            <a:schemeClr val="lt1"/>
+          </a:fontRef>
+        </p:style>
+        <p:txBody>
+          <a:bodyPr rtlCol="0" anchor="ctr"/>
+          <a:lstStyle/>
+          <a:p>
+            <a:pPr algn="ctr"/>
+          </a:p>
+        </p:txBody>
+      </p:sp>
+      <p:sp>
+        <p:nvSpPr>
+          <p:cNvPr id="7" name="Rounded Rectangle 6"/>
+          <p:cNvSpPr/>
+          <p:nvPr/>
+        </p:nvSpPr>
+        <p:spPr>
+          <a:xfrm>
+            <a:off x="804672" y="2286000"/>
+            <a:ext cx="3090672" cy="384048"/>
+          </a:xfrm>
+          <a:prstGeom prst="roundRect">
+            <a:avLst/>
+          </a:prstGeom>
+          <a:solidFill>
+            <a:srgbClr val="E6F2FF"/>
+          </a:solidFill>
+          <a:ln>
+            <a:noFill/>
+          </a:ln>
+          <a:effectLst/>
+        </p:spPr>
+        <p:style>
+          <a:lnRef idx="1">
+            <a:schemeClr val="accent1"/>
+          </a:lnRef>
+          <a:fillRef idx="3">
+            <a:schemeClr val="accent1"/>
+          </a:fillRef>
+          <a:effectRef idx="2">
+            <a:schemeClr val="accent1"/>
+          </a:effectRef>
+          <a:fontRef idx="minor">
+            <a:schemeClr val="lt1"/>
+          </a:fontRef>
+        </p:style>
+        <p:txBody>
+          <a:bodyPr rtlCol="0" anchor="ctr"/>
+          <a:lstStyle/>
+          <a:p>
+            <a:pPr algn="ctr"/>
+            <a:r>
+              <a:rPr sz="1400" b="1">
+                <a:solidFill>
+                  <a:srgbClr val="3B7DD8"/>
+                </a:solidFill>
+                <a:latin typeface="Calibri"/>
+              </a:rPr>
+              <a:t>LangGraph</a:t>
+            </a:r>
+          </a:p>
+        </p:txBody>
+      </p:sp>
+      <p:sp>
+        <p:nvSpPr>
+          <p:cNvPr id="8" name="TextBox 7"/>
           <p:cNvSpPr txBox="1"/>
           <p:nvPr/>
         </p:nvSpPr>
         <p:spPr>
           <a:xfrm>
-            <a:off x="566928" y="4681728"/>
-            <a:ext cx="5394960" cy="274320"/>
+            <a:off x="804672" y="2761488"/>
+            <a:ext cx="3090672" cy="219456"/>
+          </a:xfrm>
+          <a:prstGeom prst="rect">
+            <a:avLst/>
+          </a:prstGeom>
+          <a:noFill/>
+        </p:spPr>
+        <p:txBody>
+          <a:bodyPr wrap="square" lIns="0" rIns="0" tIns="0" bIns="0">
+            <a:spAutoFit/>
+          </a:bodyPr>
+          <a:lstStyle/>
+          <a:p>
+            <a:pPr algn="ctr">
+              <a:spcAft>
+                <a:spcPts val="0"/>
+              </a:spcAft>
+            </a:pPr>
+            <a:r>
+              <a:rPr sz="1000" b="0">
+                <a:solidFill>
+                  <a:srgbClr val="667085"/>
+                </a:solidFill>
+                <a:latin typeface="Calibri"/>
+              </a:rPr>
+              <a:t>the demo backend</a:t>
+            </a:r>
+          </a:p>
+        </p:txBody>
+      </p:sp>
+      <p:sp>
+        <p:nvSpPr>
+          <p:cNvPr id="9" name="TextBox 8"/>
+          <p:cNvSpPr txBox="1"/>
+          <p:nvPr/>
+        </p:nvSpPr>
+        <p:spPr>
+          <a:xfrm>
+            <a:off x="841247" y="3145536"/>
+            <a:ext cx="146304" cy="201168"/>
           </a:xfrm>
           <a:prstGeom prst="rect">
             <a:avLst/>
@@ -6578,27 +6049,1009 @@
               </a:spcAft>
             </a:pPr>
             <a:r>
-              <a:rPr sz="1000" b="1" i="0">
+              <a:rPr sz="1000" b="0">
+                <a:solidFill>
+                  <a:srgbClr val="3B7DD8"/>
+                </a:solidFill>
+                <a:latin typeface="Calibri"/>
+              </a:rPr>
+              <a:t>▪</a:t>
+            </a:r>
+          </a:p>
+        </p:txBody>
+      </p:sp>
+      <p:sp>
+        <p:nvSpPr>
+          <p:cNvPr id="10" name="TextBox 9"/>
+          <p:cNvSpPr txBox="1"/>
+          <p:nvPr/>
+        </p:nvSpPr>
+        <p:spPr>
+          <a:xfrm>
+            <a:off x="1069848" y="3136392"/>
+            <a:ext cx="2788920" cy="402336"/>
+          </a:xfrm>
+          <a:prstGeom prst="rect">
+            <a:avLst/>
+          </a:prstGeom>
+          <a:noFill/>
+        </p:spPr>
+        <p:txBody>
+          <a:bodyPr wrap="square" lIns="0" rIns="0" tIns="0" bIns="0">
+            <a:spAutoFit/>
+          </a:bodyPr>
+          <a:lstStyle/>
+          <a:p>
+            <a:pPr algn="l">
+              <a:spcAft>
+                <a:spcPts val="0"/>
+              </a:spcAft>
+            </a:pPr>
+            <a:r>
+              <a:rPr sz="1000" b="0">
+                <a:solidFill>
+                  <a:srgbClr val="1A2332"/>
+                </a:solidFill>
+                <a:latin typeface="Calibri"/>
+              </a:rPr>
+              <a:t>Runs inside the same Python process</a:t>
+            </a:r>
+          </a:p>
+        </p:txBody>
+      </p:sp>
+      <p:sp>
+        <p:nvSpPr>
+          <p:cNvPr id="11" name="TextBox 10"/>
+          <p:cNvSpPr txBox="1"/>
+          <p:nvPr/>
+        </p:nvSpPr>
+        <p:spPr>
+          <a:xfrm>
+            <a:off x="841247" y="3474720"/>
+            <a:ext cx="146304" cy="201168"/>
+          </a:xfrm>
+          <a:prstGeom prst="rect">
+            <a:avLst/>
+          </a:prstGeom>
+          <a:noFill/>
+        </p:spPr>
+        <p:txBody>
+          <a:bodyPr wrap="square" lIns="0" rIns="0" tIns="0" bIns="0">
+            <a:spAutoFit/>
+          </a:bodyPr>
+          <a:lstStyle/>
+          <a:p>
+            <a:pPr algn="l">
+              <a:spcAft>
+                <a:spcPts val="0"/>
+              </a:spcAft>
+            </a:pPr>
+            <a:r>
+              <a:rPr sz="1000" b="0">
+                <a:solidFill>
+                  <a:srgbClr val="3B7DD8"/>
+                </a:solidFill>
+                <a:latin typeface="Calibri"/>
+              </a:rPr>
+              <a:t>▪</a:t>
+            </a:r>
+          </a:p>
+        </p:txBody>
+      </p:sp>
+      <p:sp>
+        <p:nvSpPr>
+          <p:cNvPr id="12" name="TextBox 11"/>
+          <p:cNvSpPr txBox="1"/>
+          <p:nvPr/>
+        </p:nvSpPr>
+        <p:spPr>
+          <a:xfrm>
+            <a:off x="1069848" y="3465576"/>
+            <a:ext cx="2788920" cy="402336"/>
+          </a:xfrm>
+          <a:prstGeom prst="rect">
+            <a:avLst/>
+          </a:prstGeom>
+          <a:noFill/>
+        </p:spPr>
+        <p:txBody>
+          <a:bodyPr wrap="square" lIns="0" rIns="0" tIns="0" bIns="0">
+            <a:spAutoFit/>
+          </a:bodyPr>
+          <a:lstStyle/>
+          <a:p>
+            <a:pPr algn="l">
+              <a:spcAft>
+                <a:spcPts val="0"/>
+              </a:spcAft>
+            </a:pPr>
+            <a:r>
+              <a:rPr sz="1000" b="0">
+                <a:solidFill>
+                  <a:srgbClr val="1A2332"/>
+                </a:solidFill>
+                <a:latin typeface="Calibri"/>
+              </a:rPr>
+              <a:t>Nothing to install or start</a:t>
+            </a:r>
+          </a:p>
+        </p:txBody>
+      </p:sp>
+      <p:sp>
+        <p:nvSpPr>
+          <p:cNvPr id="13" name="TextBox 12"/>
+          <p:cNvSpPr txBox="1"/>
+          <p:nvPr/>
+        </p:nvSpPr>
+        <p:spPr>
+          <a:xfrm>
+            <a:off x="841247" y="3803904"/>
+            <a:ext cx="146304" cy="201168"/>
+          </a:xfrm>
+          <a:prstGeom prst="rect">
+            <a:avLst/>
+          </a:prstGeom>
+          <a:noFill/>
+        </p:spPr>
+        <p:txBody>
+          <a:bodyPr wrap="square" lIns="0" rIns="0" tIns="0" bIns="0">
+            <a:spAutoFit/>
+          </a:bodyPr>
+          <a:lstStyle/>
+          <a:p>
+            <a:pPr algn="l">
+              <a:spcAft>
+                <a:spcPts val="0"/>
+              </a:spcAft>
+            </a:pPr>
+            <a:r>
+              <a:rPr sz="1000" b="0">
+                <a:solidFill>
+                  <a:srgbClr val="3B7DD8"/>
+                </a:solidFill>
+                <a:latin typeface="Calibri"/>
+              </a:rPr>
+              <a:t>▪</a:t>
+            </a:r>
+          </a:p>
+        </p:txBody>
+      </p:sp>
+      <p:sp>
+        <p:nvSpPr>
+          <p:cNvPr id="14" name="TextBox 13"/>
+          <p:cNvSpPr txBox="1"/>
+          <p:nvPr/>
+        </p:nvSpPr>
+        <p:spPr>
+          <a:xfrm>
+            <a:off x="1069848" y="3794760"/>
+            <a:ext cx="2788920" cy="402336"/>
+          </a:xfrm>
+          <a:prstGeom prst="rect">
+            <a:avLst/>
+          </a:prstGeom>
+          <a:noFill/>
+        </p:spPr>
+        <p:txBody>
+          <a:bodyPr wrap="square" lIns="0" rIns="0" tIns="0" bIns="0">
+            <a:spAutoFit/>
+          </a:bodyPr>
+          <a:lstStyle/>
+          <a:p>
+            <a:pPr algn="l">
+              <a:spcAft>
+                <a:spcPts val="0"/>
+              </a:spcAft>
+            </a:pPr>
+            <a:r>
+              <a:rPr sz="1000" b="0">
+                <a:solidFill>
+                  <a:srgbClr val="1A2332"/>
+                </a:solidFill>
+                <a:latin typeface="Calibri"/>
+              </a:rPr>
+              <a:t>Best for trying a process out</a:t>
+            </a:r>
+          </a:p>
+        </p:txBody>
+      </p:sp>
+      <p:sp>
+        <p:nvSpPr>
+          <p:cNvPr id="15" name="Rounded Rectangle 14"/>
+          <p:cNvSpPr/>
+          <p:nvPr/>
+        </p:nvSpPr>
+        <p:spPr>
+          <a:xfrm>
+            <a:off x="4334256" y="2084831"/>
+            <a:ext cx="3566160" cy="2148840"/>
+          </a:xfrm>
+          <a:prstGeom prst="roundRect">
+            <a:avLst>
+              <a:gd name="adj" fmla="val 5000"/>
+            </a:avLst>
+          </a:prstGeom>
+          <a:solidFill>
+            <a:srgbClr val="FFFFFF"/>
+          </a:solidFill>
+          <a:ln w="15875">
+            <a:solidFill>
+              <a:srgbClr val="D8913B"/>
+            </a:solidFill>
+          </a:ln>
+          <a:effectLst/>
+        </p:spPr>
+        <p:style>
+          <a:lnRef idx="1">
+            <a:schemeClr val="accent1"/>
+          </a:lnRef>
+          <a:fillRef idx="3">
+            <a:schemeClr val="accent1"/>
+          </a:fillRef>
+          <a:effectRef idx="2">
+            <a:schemeClr val="accent1"/>
+          </a:effectRef>
+          <a:fontRef idx="minor">
+            <a:schemeClr val="lt1"/>
+          </a:fontRef>
+        </p:style>
+        <p:txBody>
+          <a:bodyPr rtlCol="0" anchor="ctr"/>
+          <a:lstStyle/>
+          <a:p>
+            <a:pPr algn="ctr"/>
+          </a:p>
+        </p:txBody>
+      </p:sp>
+      <p:sp>
+        <p:nvSpPr>
+          <p:cNvPr id="16" name="Rounded Rectangle 15"/>
+          <p:cNvSpPr/>
+          <p:nvPr/>
+        </p:nvSpPr>
+        <p:spPr>
+          <a:xfrm>
+            <a:off x="4572000" y="2286000"/>
+            <a:ext cx="3090672" cy="384048"/>
+          </a:xfrm>
+          <a:prstGeom prst="roundRect">
+            <a:avLst/>
+          </a:prstGeom>
+          <a:solidFill>
+            <a:srgbClr val="FFF4E0"/>
+          </a:solidFill>
+          <a:ln>
+            <a:noFill/>
+          </a:ln>
+          <a:effectLst/>
+        </p:spPr>
+        <p:style>
+          <a:lnRef idx="1">
+            <a:schemeClr val="accent1"/>
+          </a:lnRef>
+          <a:fillRef idx="3">
+            <a:schemeClr val="accent1"/>
+          </a:fillRef>
+          <a:effectRef idx="2">
+            <a:schemeClr val="accent1"/>
+          </a:effectRef>
+          <a:fontRef idx="minor">
+            <a:schemeClr val="lt1"/>
+          </a:fontRef>
+        </p:style>
+        <p:txBody>
+          <a:bodyPr rtlCol="0" anchor="ctr"/>
+          <a:lstStyle/>
+          <a:p>
+            <a:pPr algn="ctr"/>
+            <a:r>
+              <a:rPr sz="1400" b="1">
+                <a:solidFill>
+                  <a:srgbClr val="D8913B"/>
+                </a:solidFill>
+                <a:latin typeface="Calibri"/>
+              </a:rPr>
+              <a:t>Flowable</a:t>
+            </a:r>
+          </a:p>
+        </p:txBody>
+      </p:sp>
+      <p:sp>
+        <p:nvSpPr>
+          <p:cNvPr id="17" name="TextBox 16"/>
+          <p:cNvSpPr txBox="1"/>
+          <p:nvPr/>
+        </p:nvSpPr>
+        <p:spPr>
+          <a:xfrm>
+            <a:off x="4572000" y="2761488"/>
+            <a:ext cx="3090672" cy="219456"/>
+          </a:xfrm>
+          <a:prstGeom prst="rect">
+            <a:avLst/>
+          </a:prstGeom>
+          <a:noFill/>
+        </p:spPr>
+        <p:txBody>
+          <a:bodyPr wrap="square" lIns="0" rIns="0" tIns="0" bIns="0">
+            <a:spAutoFit/>
+          </a:bodyPr>
+          <a:lstStyle/>
+          <a:p>
+            <a:pPr algn="ctr">
+              <a:spcAft>
+                <a:spcPts val="0"/>
+              </a:spcAft>
+            </a:pPr>
+            <a:r>
+              <a:rPr sz="1000" b="0">
                 <a:solidFill>
                   <a:srgbClr val="667085"/>
                 </a:solidFill>
                 <a:latin typeface="Calibri"/>
               </a:rPr>
-              <a:t>SELECTING ONE</a:t>
-            </a:r>
-          </a:p>
-        </p:txBody>
-      </p:sp>
-      <p:sp>
-        <p:nvSpPr>
-          <p:cNvPr id="8" name="Rounded Rectangle 7"/>
+              <a:t>a running BPM engine</a:t>
+            </a:r>
+          </a:p>
+        </p:txBody>
+      </p:sp>
+      <p:sp>
+        <p:nvSpPr>
+          <p:cNvPr id="18" name="TextBox 17"/>
+          <p:cNvSpPr txBox="1"/>
+          <p:nvPr/>
+        </p:nvSpPr>
+        <p:spPr>
+          <a:xfrm>
+            <a:off x="4608576" y="3145536"/>
+            <a:ext cx="146304" cy="201168"/>
+          </a:xfrm>
+          <a:prstGeom prst="rect">
+            <a:avLst/>
+          </a:prstGeom>
+          <a:noFill/>
+        </p:spPr>
+        <p:txBody>
+          <a:bodyPr wrap="square" lIns="0" rIns="0" tIns="0" bIns="0">
+            <a:spAutoFit/>
+          </a:bodyPr>
+          <a:lstStyle/>
+          <a:p>
+            <a:pPr algn="l">
+              <a:spcAft>
+                <a:spcPts val="0"/>
+              </a:spcAft>
+            </a:pPr>
+            <a:r>
+              <a:rPr sz="1000" b="0">
+                <a:solidFill>
+                  <a:srgbClr val="D8913B"/>
+                </a:solidFill>
+                <a:latin typeface="Calibri"/>
+              </a:rPr>
+              <a:t>▪</a:t>
+            </a:r>
+          </a:p>
+        </p:txBody>
+      </p:sp>
+      <p:sp>
+        <p:nvSpPr>
+          <p:cNvPr id="19" name="TextBox 18"/>
+          <p:cNvSpPr txBox="1"/>
+          <p:nvPr/>
+        </p:nvSpPr>
+        <p:spPr>
+          <a:xfrm>
+            <a:off x="4837176" y="3136392"/>
+            <a:ext cx="2788920" cy="402336"/>
+          </a:xfrm>
+          <a:prstGeom prst="rect">
+            <a:avLst/>
+          </a:prstGeom>
+          <a:noFill/>
+        </p:spPr>
+        <p:txBody>
+          <a:bodyPr wrap="square" lIns="0" rIns="0" tIns="0" bIns="0">
+            <a:spAutoFit/>
+          </a:bodyPr>
+          <a:lstStyle/>
+          <a:p>
+            <a:pPr algn="l">
+              <a:spcAft>
+                <a:spcPts val="0"/>
+              </a:spcAft>
+            </a:pPr>
+            <a:r>
+              <a:rPr sz="1000" b="0">
+                <a:solidFill>
+                  <a:srgbClr val="1A2332"/>
+                </a:solidFill>
+                <a:latin typeface="Calibri"/>
+              </a:rPr>
+              <a:t>A container you start separately</a:t>
+            </a:r>
+          </a:p>
+        </p:txBody>
+      </p:sp>
+      <p:sp>
+        <p:nvSpPr>
+          <p:cNvPr id="20" name="TextBox 19"/>
+          <p:cNvSpPr txBox="1"/>
+          <p:nvPr/>
+        </p:nvSpPr>
+        <p:spPr>
+          <a:xfrm>
+            <a:off x="4608576" y="3474720"/>
+            <a:ext cx="146304" cy="201168"/>
+          </a:xfrm>
+          <a:prstGeom prst="rect">
+            <a:avLst/>
+          </a:prstGeom>
+          <a:noFill/>
+        </p:spPr>
+        <p:txBody>
+          <a:bodyPr wrap="square" lIns="0" rIns="0" tIns="0" bIns="0">
+            <a:spAutoFit/>
+          </a:bodyPr>
+          <a:lstStyle/>
+          <a:p>
+            <a:pPr algn="l">
+              <a:spcAft>
+                <a:spcPts val="0"/>
+              </a:spcAft>
+            </a:pPr>
+            <a:r>
+              <a:rPr sz="1000" b="0">
+                <a:solidFill>
+                  <a:srgbClr val="D8913B"/>
+                </a:solidFill>
+                <a:latin typeface="Calibri"/>
+              </a:rPr>
+              <a:t>▪</a:t>
+            </a:r>
+          </a:p>
+        </p:txBody>
+      </p:sp>
+      <p:sp>
+        <p:nvSpPr>
+          <p:cNvPr id="21" name="TextBox 20"/>
+          <p:cNvSpPr txBox="1"/>
+          <p:nvPr/>
+        </p:nvSpPr>
+        <p:spPr>
+          <a:xfrm>
+            <a:off x="4837176" y="3465576"/>
+            <a:ext cx="2788920" cy="402336"/>
+          </a:xfrm>
+          <a:prstGeom prst="rect">
+            <a:avLst/>
+          </a:prstGeom>
+          <a:noFill/>
+        </p:spPr>
+        <p:txBody>
+          <a:bodyPr wrap="square" lIns="0" rIns="0" tIns="0" bIns="0">
+            <a:spAutoFit/>
+          </a:bodyPr>
+          <a:lstStyle/>
+          <a:p>
+            <a:pPr algn="l">
+              <a:spcAft>
+                <a:spcPts val="0"/>
+              </a:spcAft>
+            </a:pPr>
+            <a:r>
+              <a:rPr sz="1000" b="0">
+                <a:solidFill>
+                  <a:srgbClr val="1A2332"/>
+                </a:solidFill>
+                <a:latin typeface="Calibri"/>
+              </a:rPr>
+              <a:t>Models are deployed to it at runtime</a:t>
+            </a:r>
+          </a:p>
+        </p:txBody>
+      </p:sp>
+      <p:sp>
+        <p:nvSpPr>
+          <p:cNvPr id="22" name="TextBox 21"/>
+          <p:cNvSpPr txBox="1"/>
+          <p:nvPr/>
+        </p:nvSpPr>
+        <p:spPr>
+          <a:xfrm>
+            <a:off x="4608576" y="3803904"/>
+            <a:ext cx="146304" cy="201168"/>
+          </a:xfrm>
+          <a:prstGeom prst="rect">
+            <a:avLst/>
+          </a:prstGeom>
+          <a:noFill/>
+        </p:spPr>
+        <p:txBody>
+          <a:bodyPr wrap="square" lIns="0" rIns="0" tIns="0" bIns="0">
+            <a:spAutoFit/>
+          </a:bodyPr>
+          <a:lstStyle/>
+          <a:p>
+            <a:pPr algn="l">
+              <a:spcAft>
+                <a:spcPts val="0"/>
+              </a:spcAft>
+            </a:pPr>
+            <a:r>
+              <a:rPr sz="1000" b="0">
+                <a:solidFill>
+                  <a:srgbClr val="D8913B"/>
+                </a:solidFill>
+                <a:latin typeface="Calibri"/>
+              </a:rPr>
+              <a:t>▪</a:t>
+            </a:r>
+          </a:p>
+        </p:txBody>
+      </p:sp>
+      <p:sp>
+        <p:nvSpPr>
+          <p:cNvPr id="23" name="TextBox 22"/>
+          <p:cNvSpPr txBox="1"/>
+          <p:nvPr/>
+        </p:nvSpPr>
+        <p:spPr>
+          <a:xfrm>
+            <a:off x="4837176" y="3794760"/>
+            <a:ext cx="2788920" cy="402336"/>
+          </a:xfrm>
+          <a:prstGeom prst="rect">
+            <a:avLst/>
+          </a:prstGeom>
+          <a:noFill/>
+        </p:spPr>
+        <p:txBody>
+          <a:bodyPr wrap="square" lIns="0" rIns="0" tIns="0" bIns="0">
+            <a:spAutoFit/>
+          </a:bodyPr>
+          <a:lstStyle/>
+          <a:p>
+            <a:pPr algn="l">
+              <a:spcAft>
+                <a:spcPts val="0"/>
+              </a:spcAft>
+            </a:pPr>
+            <a:r>
+              <a:rPr sz="1000" b="0">
+                <a:solidFill>
+                  <a:srgbClr val="1A2332"/>
+                </a:solidFill>
+                <a:latin typeface="Calibri"/>
+              </a:rPr>
+              <a:t>A mature, established BPM platform</a:t>
+            </a:r>
+          </a:p>
+        </p:txBody>
+      </p:sp>
+      <p:sp>
+        <p:nvSpPr>
+          <p:cNvPr id="24" name="Rounded Rectangle 23"/>
           <p:cNvSpPr/>
           <p:nvPr/>
         </p:nvSpPr>
         <p:spPr>
           <a:xfrm>
-            <a:off x="566928" y="4974336"/>
-            <a:ext cx="5394960" cy="914400"/>
+            <a:off x="8101583" y="2084831"/>
+            <a:ext cx="3566160" cy="2148840"/>
+          </a:xfrm>
+          <a:prstGeom prst="roundRect">
+            <a:avLst>
+              <a:gd name="adj" fmla="val 5000"/>
+            </a:avLst>
+          </a:prstGeom>
+          <a:solidFill>
+            <a:srgbClr val="FFFFFF"/>
+          </a:solidFill>
+          <a:ln w="15875">
+            <a:solidFill>
+              <a:srgbClr val="3BA55D"/>
+            </a:solidFill>
+          </a:ln>
+          <a:effectLst/>
+        </p:spPr>
+        <p:style>
+          <a:lnRef idx="1">
+            <a:schemeClr val="accent1"/>
+          </a:lnRef>
+          <a:fillRef idx="3">
+            <a:schemeClr val="accent1"/>
+          </a:fillRef>
+          <a:effectRef idx="2">
+            <a:schemeClr val="accent1"/>
+          </a:effectRef>
+          <a:fontRef idx="minor">
+            <a:schemeClr val="lt1"/>
+          </a:fontRef>
+        </p:style>
+        <p:txBody>
+          <a:bodyPr rtlCol="0" anchor="ctr"/>
+          <a:lstStyle/>
+          <a:p>
+            <a:pPr algn="ctr"/>
+          </a:p>
+        </p:txBody>
+      </p:sp>
+      <p:sp>
+        <p:nvSpPr>
+          <p:cNvPr id="25" name="Rounded Rectangle 24"/>
+          <p:cNvSpPr/>
+          <p:nvPr/>
+        </p:nvSpPr>
+        <p:spPr>
+          <a:xfrm>
+            <a:off x="8339327" y="2286000"/>
+            <a:ext cx="3090672" cy="384048"/>
+          </a:xfrm>
+          <a:prstGeom prst="roundRect">
+            <a:avLst/>
+          </a:prstGeom>
+          <a:solidFill>
+            <a:srgbClr val="E9F7EC"/>
+          </a:solidFill>
+          <a:ln>
+            <a:noFill/>
+          </a:ln>
+          <a:effectLst/>
+        </p:spPr>
+        <p:style>
+          <a:lnRef idx="1">
+            <a:schemeClr val="accent1"/>
+          </a:lnRef>
+          <a:fillRef idx="3">
+            <a:schemeClr val="accent1"/>
+          </a:fillRef>
+          <a:effectRef idx="2">
+            <a:schemeClr val="accent1"/>
+          </a:effectRef>
+          <a:fontRef idx="minor">
+            <a:schemeClr val="lt1"/>
+          </a:fontRef>
+        </p:style>
+        <p:txBody>
+          <a:bodyPr rtlCol="0" anchor="ctr"/>
+          <a:lstStyle/>
+          <a:p>
+            <a:pPr algn="ctr"/>
+            <a:r>
+              <a:rPr sz="1400" b="1">
+                <a:solidFill>
+                  <a:srgbClr val="3BA55D"/>
+                </a:solidFill>
+                <a:latin typeface="Calibri"/>
+              </a:rPr>
+              <a:t>Kogito</a:t>
+            </a:r>
+          </a:p>
+        </p:txBody>
+      </p:sp>
+      <p:sp>
+        <p:nvSpPr>
+          <p:cNvPr id="26" name="TextBox 25"/>
+          <p:cNvSpPr txBox="1"/>
+          <p:nvPr/>
+        </p:nvSpPr>
+        <p:spPr>
+          <a:xfrm>
+            <a:off x="8339327" y="2761488"/>
+            <a:ext cx="3090672" cy="219456"/>
+          </a:xfrm>
+          <a:prstGeom prst="rect">
+            <a:avLst/>
+          </a:prstGeom>
+          <a:noFill/>
+        </p:spPr>
+        <p:txBody>
+          <a:bodyPr wrap="square" lIns="0" rIns="0" tIns="0" bIns="0">
+            <a:spAutoFit/>
+          </a:bodyPr>
+          <a:lstStyle/>
+          <a:p>
+            <a:pPr algn="ctr">
+              <a:spcAft>
+                <a:spcPts val="0"/>
+              </a:spcAft>
+            </a:pPr>
+            <a:r>
+              <a:rPr sz="1000" b="0">
+                <a:solidFill>
+                  <a:srgbClr val="667085"/>
+                </a:solidFill>
+                <a:latin typeface="Calibri"/>
+              </a:rPr>
+              <a:t>a compiled service</a:t>
+            </a:r>
+          </a:p>
+        </p:txBody>
+      </p:sp>
+      <p:sp>
+        <p:nvSpPr>
+          <p:cNvPr id="27" name="TextBox 26"/>
+          <p:cNvSpPr txBox="1"/>
+          <p:nvPr/>
+        </p:nvSpPr>
+        <p:spPr>
+          <a:xfrm>
+            <a:off x="8375904" y="3145536"/>
+            <a:ext cx="146304" cy="201168"/>
+          </a:xfrm>
+          <a:prstGeom prst="rect">
+            <a:avLst/>
+          </a:prstGeom>
+          <a:noFill/>
+        </p:spPr>
+        <p:txBody>
+          <a:bodyPr wrap="square" lIns="0" rIns="0" tIns="0" bIns="0">
+            <a:spAutoFit/>
+          </a:bodyPr>
+          <a:lstStyle/>
+          <a:p>
+            <a:pPr algn="l">
+              <a:spcAft>
+                <a:spcPts val="0"/>
+              </a:spcAft>
+            </a:pPr>
+            <a:r>
+              <a:rPr sz="1000" b="0">
+                <a:solidFill>
+                  <a:srgbClr val="3BA55D"/>
+                </a:solidFill>
+                <a:latin typeface="Calibri"/>
+              </a:rPr>
+              <a:t>▪</a:t>
+            </a:r>
+          </a:p>
+        </p:txBody>
+      </p:sp>
+      <p:sp>
+        <p:nvSpPr>
+          <p:cNvPr id="28" name="TextBox 27"/>
+          <p:cNvSpPr txBox="1"/>
+          <p:nvPr/>
+        </p:nvSpPr>
+        <p:spPr>
+          <a:xfrm>
+            <a:off x="8604504" y="3136392"/>
+            <a:ext cx="2788920" cy="402336"/>
+          </a:xfrm>
+          <a:prstGeom prst="rect">
+            <a:avLst/>
+          </a:prstGeom>
+          <a:noFill/>
+        </p:spPr>
+        <p:txBody>
+          <a:bodyPr wrap="square" lIns="0" rIns="0" tIns="0" bIns="0">
+            <a:spAutoFit/>
+          </a:bodyPr>
+          <a:lstStyle/>
+          <a:p>
+            <a:pPr algn="l">
+              <a:spcAft>
+                <a:spcPts val="0"/>
+              </a:spcAft>
+            </a:pPr>
+            <a:r>
+              <a:rPr sz="1000" b="0">
+                <a:solidFill>
+                  <a:srgbClr val="1A2332"/>
+                </a:solidFill>
+                <a:latin typeface="Calibri"/>
+              </a:rPr>
+              <a:t>A Quarkus service built per app</a:t>
+            </a:r>
+          </a:p>
+        </p:txBody>
+      </p:sp>
+      <p:sp>
+        <p:nvSpPr>
+          <p:cNvPr id="29" name="TextBox 28"/>
+          <p:cNvSpPr txBox="1"/>
+          <p:nvPr/>
+        </p:nvSpPr>
+        <p:spPr>
+          <a:xfrm>
+            <a:off x="8375904" y="3474720"/>
+            <a:ext cx="146304" cy="201168"/>
+          </a:xfrm>
+          <a:prstGeom prst="rect">
+            <a:avLst/>
+          </a:prstGeom>
+          <a:noFill/>
+        </p:spPr>
+        <p:txBody>
+          <a:bodyPr wrap="square" lIns="0" rIns="0" tIns="0" bIns="0">
+            <a:spAutoFit/>
+          </a:bodyPr>
+          <a:lstStyle/>
+          <a:p>
+            <a:pPr algn="l">
+              <a:spcAft>
+                <a:spcPts val="0"/>
+              </a:spcAft>
+            </a:pPr>
+            <a:r>
+              <a:rPr sz="1000" b="0">
+                <a:solidFill>
+                  <a:srgbClr val="3BA55D"/>
+                </a:solidFill>
+                <a:latin typeface="Calibri"/>
+              </a:rPr>
+              <a:t>▪</a:t>
+            </a:r>
+          </a:p>
+        </p:txBody>
+      </p:sp>
+      <p:sp>
+        <p:nvSpPr>
+          <p:cNvPr id="30" name="TextBox 29"/>
+          <p:cNvSpPr txBox="1"/>
+          <p:nvPr/>
+        </p:nvSpPr>
+        <p:spPr>
+          <a:xfrm>
+            <a:off x="8604504" y="3465576"/>
+            <a:ext cx="2788920" cy="402336"/>
+          </a:xfrm>
+          <a:prstGeom prst="rect">
+            <a:avLst/>
+          </a:prstGeom>
+          <a:noFill/>
+        </p:spPr>
+        <p:txBody>
+          <a:bodyPr wrap="square" lIns="0" rIns="0" tIns="0" bIns="0">
+            <a:spAutoFit/>
+          </a:bodyPr>
+          <a:lstStyle/>
+          <a:p>
+            <a:pPr algn="l">
+              <a:spcAft>
+                <a:spcPts val="0"/>
+              </a:spcAft>
+            </a:pPr>
+            <a:r>
+              <a:rPr sz="1000" b="0">
+                <a:solidFill>
+                  <a:srgbClr val="1A2332"/>
+                </a:solidFill>
+                <a:latin typeface="Calibri"/>
+              </a:rPr>
+              <a:t>The model is compiled in, not deployed</a:t>
+            </a:r>
+          </a:p>
+        </p:txBody>
+      </p:sp>
+      <p:sp>
+        <p:nvSpPr>
+          <p:cNvPr id="31" name="TextBox 30"/>
+          <p:cNvSpPr txBox="1"/>
+          <p:nvPr/>
+        </p:nvSpPr>
+        <p:spPr>
+          <a:xfrm>
+            <a:off x="8375904" y="3803904"/>
+            <a:ext cx="146304" cy="201168"/>
+          </a:xfrm>
+          <a:prstGeom prst="rect">
+            <a:avLst/>
+          </a:prstGeom>
+          <a:noFill/>
+        </p:spPr>
+        <p:txBody>
+          <a:bodyPr wrap="square" lIns="0" rIns="0" tIns="0" bIns="0">
+            <a:spAutoFit/>
+          </a:bodyPr>
+          <a:lstStyle/>
+          <a:p>
+            <a:pPr algn="l">
+              <a:spcAft>
+                <a:spcPts val="0"/>
+              </a:spcAft>
+            </a:pPr>
+            <a:r>
+              <a:rPr sz="1000" b="0">
+                <a:solidFill>
+                  <a:srgbClr val="3BA55D"/>
+                </a:solidFill>
+                <a:latin typeface="Calibri"/>
+              </a:rPr>
+              <a:t>▪</a:t>
+            </a:r>
+          </a:p>
+        </p:txBody>
+      </p:sp>
+      <p:sp>
+        <p:nvSpPr>
+          <p:cNvPr id="32" name="TextBox 31"/>
+          <p:cNvSpPr txBox="1"/>
+          <p:nvPr/>
+        </p:nvSpPr>
+        <p:spPr>
+          <a:xfrm>
+            <a:off x="8604504" y="3794760"/>
+            <a:ext cx="2788920" cy="402336"/>
+          </a:xfrm>
+          <a:prstGeom prst="rect">
+            <a:avLst/>
+          </a:prstGeom>
+          <a:noFill/>
+        </p:spPr>
+        <p:txBody>
+          <a:bodyPr wrap="square" lIns="0" rIns="0" tIns="0" bIns="0">
+            <a:spAutoFit/>
+          </a:bodyPr>
+          <a:lstStyle/>
+          <a:p>
+            <a:pPr algn="l">
+              <a:spcAft>
+                <a:spcPts val="0"/>
+              </a:spcAft>
+            </a:pPr>
+            <a:r>
+              <a:rPr sz="1000" b="0">
+                <a:solidFill>
+                  <a:srgbClr val="1A2332"/>
+                </a:solidFill>
+                <a:latin typeface="Calibri"/>
+              </a:rPr>
+              <a:t>Cloud-native, starts in under a second</a:t>
+            </a:r>
+          </a:p>
+        </p:txBody>
+      </p:sp>
+      <p:sp>
+        <p:nvSpPr>
+          <p:cNvPr id="33" name="TextBox 32"/>
+          <p:cNvSpPr txBox="1"/>
+          <p:nvPr/>
+        </p:nvSpPr>
+        <p:spPr>
+          <a:xfrm>
+            <a:off x="566928" y="4517136"/>
+            <a:ext cx="5394960" cy="274320"/>
+          </a:xfrm>
+          <a:prstGeom prst="rect">
+            <a:avLst/>
+          </a:prstGeom>
+          <a:noFill/>
+        </p:spPr>
+        <p:txBody>
+          <a:bodyPr wrap="square" lIns="0" rIns="0" tIns="0" bIns="0">
+            <a:spAutoFit/>
+          </a:bodyPr>
+          <a:lstStyle/>
+          <a:p>
+            <a:pPr algn="l">
+              <a:spcAft>
+                <a:spcPts val="0"/>
+              </a:spcAft>
+            </a:pPr>
+            <a:r>
+              <a:rPr sz="1000" b="1">
+                <a:solidFill>
+                  <a:srgbClr val="667085"/>
+                </a:solidFill>
+                <a:latin typeface="Calibri"/>
+              </a:rPr>
+              <a:t>CHOOSING ONE</a:t>
+            </a:r>
+          </a:p>
+        </p:txBody>
+      </p:sp>
+      <p:sp>
+        <p:nvSpPr>
+          <p:cNvPr id="34" name="Rounded Rectangle 33"/>
+          <p:cNvSpPr/>
+          <p:nvPr/>
+        </p:nvSpPr>
+        <p:spPr>
+          <a:xfrm>
+            <a:off x="566928" y="4809744"/>
+            <a:ext cx="5394960" cy="786384"/>
           </a:xfrm>
           <a:prstGeom prst="roundRect">
             <a:avLst>
@@ -6635,7 +7088,7 @@
           <a:p>
             <a:pPr algn="l"/>
             <a:r>
-              <a:rPr sz="1000">
+              <a:rPr sz="1100">
                 <a:solidFill>
                   <a:srgbClr val="1A2332"/>
                 </a:solidFill>
@@ -6647,7 +7100,7 @@
           <a:p>
             <a:pPr algn="l"/>
             <a:r>
-              <a:rPr sz="1000">
+              <a:rPr sz="1100">
                 <a:solidFill>
                   <a:srgbClr val="1A2332"/>
                 </a:solidFill>
@@ -6656,29 +7109,17 @@
               <a:t>  type: langgraph | flowable | kogito</a:t>
             </a:r>
           </a:p>
-          <a:p>
-            <a:pPr algn="l"/>
-            <a:r>
-              <a:rPr sz="1000">
-                <a:solidFill>
-                  <a:srgbClr val="1A2332"/>
-                </a:solidFill>
-                <a:latin typeface="Consolas"/>
-              </a:rPr>
-              <a:t>  url:  http://localhost:8081</a:t>
-            </a:r>
-          </a:p>
-        </p:txBody>
-      </p:sp>
-      <p:sp>
-        <p:nvSpPr>
-          <p:cNvPr id="9" name="TextBox 8"/>
+        </p:txBody>
+      </p:sp>
+      <p:sp>
+        <p:nvSpPr>
+          <p:cNvPr id="35" name="TextBox 34"/>
           <p:cNvSpPr txBox="1"/>
           <p:nvPr/>
         </p:nvSpPr>
         <p:spPr>
           <a:xfrm>
-            <a:off x="6236208" y="4681728"/>
+            <a:off x="6236208" y="4517136"/>
             <a:ext cx="5394960" cy="274320"/>
           </a:xfrm>
           <a:prstGeom prst="rect">
@@ -6698,27 +7139,27 @@
               </a:spcAft>
             </a:pPr>
             <a:r>
-              <a:rPr sz="1000" b="1" i="0">
+              <a:rPr sz="1000" b="1">
                 <a:solidFill>
                   <a:srgbClr val="667085"/>
                 </a:solidFill>
                 <a:latin typeface="Calibri"/>
               </a:rPr>
-              <a:t>IDENTICAL ACROSS ALL THREE</a:t>
-            </a:r>
-          </a:p>
-        </p:txBody>
-      </p:sp>
-      <p:sp>
-        <p:nvSpPr>
-          <p:cNvPr id="10" name="Rounded Rectangle 9"/>
+              <a:t>UNCHANGED ACROSS ALL THREE</a:t>
+            </a:r>
+          </a:p>
+        </p:txBody>
+      </p:sp>
+      <p:sp>
+        <p:nvSpPr>
+          <p:cNvPr id="36" name="Rounded Rectangle 35"/>
           <p:cNvSpPr/>
           <p:nvPr/>
         </p:nvSpPr>
         <p:spPr>
           <a:xfrm>
-            <a:off x="6236208" y="4974336"/>
-            <a:ext cx="5394960" cy="914400"/>
+            <a:off x="6236208" y="4809744"/>
+            <a:ext cx="5394960" cy="786384"/>
           </a:xfrm>
           <a:prstGeom prst="roundRect">
             <a:avLst>
@@ -6759,14 +7200,14 @@
       </p:sp>
       <p:sp>
         <p:nvSpPr>
-          <p:cNvPr id="11" name="TextBox 10"/>
+          <p:cNvPr id="37" name="TextBox 36"/>
           <p:cNvSpPr txBox="1"/>
           <p:nvPr/>
         </p:nvSpPr>
         <p:spPr>
           <a:xfrm>
-            <a:off x="6455664" y="5138928"/>
-            <a:ext cx="4983480" cy="658368"/>
+            <a:off x="6473952" y="4974336"/>
+            <a:ext cx="4937760" cy="548640"/>
           </a:xfrm>
           <a:prstGeom prst="rect">
             <a:avLst/>
@@ -6785,26 +7226,26 @@
               </a:spcAft>
             </a:pPr>
             <a:r>
-              <a:rPr sz="950" b="0" i="0">
+              <a:rPr sz="1050" b="0">
                 <a:solidFill>
                   <a:srgbClr val="1A2332"/>
                 </a:solidFill>
                 <a:latin typeface="Calibri"/>
               </a:rPr>
-              <a:t>The policies/ markdown · the tasks, gateways and hooks config · the clean BPMN CUGA FLO parses · and every agent class. Only the engine-specific model differs — and LangGraph needs none at all.</a:t>
-            </a:r>
-          </a:p>
-        </p:txBody>
-      </p:sp>
-      <p:sp>
-        <p:nvSpPr>
-          <p:cNvPr id="12" name="TextBox 11"/>
+              <a:t>The policies · the task, gateway and hook configuration · the process model · and every agent.</a:t>
+            </a:r>
+          </a:p>
+        </p:txBody>
+      </p:sp>
+      <p:sp>
+        <p:nvSpPr>
+          <p:cNvPr id="38" name="TextBox 37"/>
           <p:cNvSpPr txBox="1"/>
           <p:nvPr/>
         </p:nvSpPr>
         <p:spPr>
           <a:xfrm>
-            <a:off x="566928" y="6089904"/>
+            <a:off x="566928" y="5870448"/>
             <a:ext cx="11064240" cy="365760"/>
           </a:xfrm>
           <a:prstGeom prst="rect">
@@ -6824,13 +7265,13 @@
               </a:spcAft>
             </a:pPr>
             <a:r>
-              <a:rPr sz="1050" b="0" i="0">
+              <a:rPr sz="1100" b="0">
                 <a:solidFill>
                   <a:srgbClr val="1A2332"/>
                 </a:solidFill>
                 <a:latin typeface="Calibri"/>
               </a:rPr>
-              <a:t>The LangGraph engine ships as the demo backend; Flowable and Kogito are the production-shaped integrations, each with its own README and BPMN transformation know-hows.</a:t>
+              <a:t>That portability is the point: the same governed process can move from a laptop demo to a production engine without rewriting how it reasons.</a:t>
             </a:r>
           </a:p>
         </p:txBody>
@@ -6881,7 +7322,7 @@
               </a:spcAft>
             </a:pPr>
             <a:r>
-              <a:rPr sz="1050" b="1" i="0">
+              <a:rPr sz="1050" b="1">
                 <a:solidFill>
                   <a:srgbClr val="3B7DD8"/>
                 </a:solidFill>
@@ -6920,7 +7361,7 @@
               </a:spcAft>
             </a:pPr>
             <a:r>
-              <a:rPr sz="2800" b="1" i="0">
+              <a:rPr sz="2800" b="1">
                 <a:solidFill>
                   <a:srgbClr val="1A2332"/>
                 </a:solidFill>
@@ -7003,7 +7444,7 @@
               </a:spcAft>
             </a:pPr>
             <a:r>
-              <a:rPr sz="1250" b="0" i="0">
+              <a:rPr sz="1250" b="0">
                 <a:solidFill>
                   <a:srgbClr val="667085"/>
                 </a:solidFill>
@@ -7016,20 +7457,20 @@
       </p:sp>
       <p:sp>
         <p:nvSpPr>
-          <p:cNvPr id="6" name="Right Arrow 5"/>
+          <p:cNvPr id="6" name="Up Arrow 5"/>
           <p:cNvSpPr/>
           <p:nvPr/>
         </p:nvSpPr>
         <p:spPr>
           <a:xfrm>
-            <a:off x="1463040" y="2084831"/>
-            <a:ext cx="9235440" cy="182880"/>
-          </a:xfrm>
-          <a:prstGeom prst="rightArrow">
+            <a:off x="566928" y="2139696"/>
+            <a:ext cx="310896" cy="3127248"/>
+          </a:xfrm>
+          <a:prstGeom prst="upArrow">
             <a:avLst/>
           </a:prstGeom>
           <a:solidFill>
-            <a:srgbClr val="667085"/>
+            <a:srgbClr val="D8DEE6"/>
           </a:solidFill>
           <a:ln>
             <a:noFill/>
@@ -7060,14 +7501,127 @@
       </p:sp>
       <p:sp>
         <p:nvSpPr>
-          <p:cNvPr id="7" name="TextBox 6"/>
+          <p:cNvPr id="7" name="Rounded Rectangle 6"/>
+          <p:cNvSpPr/>
+          <p:nvPr/>
+        </p:nvSpPr>
+        <p:spPr>
+          <a:xfrm>
+            <a:off x="1170432" y="2139696"/>
+            <a:ext cx="10460736" cy="932688"/>
+          </a:xfrm>
+          <a:prstGeom prst="roundRect">
+            <a:avLst>
+              <a:gd name="adj" fmla="val 5000"/>
+            </a:avLst>
+          </a:prstGeom>
+          <a:solidFill>
+            <a:srgbClr val="FFFFFF"/>
+          </a:solidFill>
+          <a:ln w="15875">
+            <a:solidFill>
+              <a:srgbClr val="3BA55D"/>
+            </a:solidFill>
+          </a:ln>
+          <a:effectLst/>
+        </p:spPr>
+        <p:style>
+          <a:lnRef idx="1">
+            <a:schemeClr val="accent1"/>
+          </a:lnRef>
+          <a:fillRef idx="3">
+            <a:schemeClr val="accent1"/>
+          </a:fillRef>
+          <a:effectRef idx="2">
+            <a:schemeClr val="accent1"/>
+          </a:effectRef>
+          <a:fontRef idx="minor">
+            <a:schemeClr val="lt1"/>
+          </a:fontRef>
+        </p:style>
+        <p:txBody>
+          <a:bodyPr rtlCol="0" anchor="ctr"/>
+          <a:lstStyle/>
+          <a:p>
+            <a:pPr algn="ctr"/>
+          </a:p>
+        </p:txBody>
+      </p:sp>
+      <p:sp>
+        <p:nvSpPr>
+          <p:cNvPr id="8" name="Rounded Rectangle 7"/>
+          <p:cNvSpPr/>
+          <p:nvPr/>
+        </p:nvSpPr>
+        <p:spPr>
+          <a:xfrm>
+            <a:off x="1371600" y="2313432"/>
+            <a:ext cx="2286000" cy="585216"/>
+          </a:xfrm>
+          <a:prstGeom prst="roundRect">
+            <a:avLst/>
+          </a:prstGeom>
+          <a:solidFill>
+            <a:srgbClr val="E9F7EC"/>
+          </a:solidFill>
+          <a:ln>
+            <a:noFill/>
+          </a:ln>
+          <a:effectLst/>
+        </p:spPr>
+        <p:style>
+          <a:lnRef idx="1">
+            <a:schemeClr val="accent1"/>
+          </a:lnRef>
+          <a:fillRef idx="3">
+            <a:schemeClr val="accent1"/>
+          </a:fillRef>
+          <a:effectRef idx="2">
+            <a:schemeClr val="accent1"/>
+          </a:effectRef>
+          <a:fontRef idx="minor">
+            <a:schemeClr val="lt1"/>
+          </a:fontRef>
+        </p:style>
+        <p:txBody>
+          <a:bodyPr rtlCol="0" anchor="ctr"/>
+          <a:lstStyle/>
+          <a:p>
+            <a:pPr algn="ctr"/>
+            <a:r>
+              <a:rPr sz="1250" b="1">
+                <a:solidFill>
+                  <a:srgbClr val="3BA55D"/>
+                </a:solidFill>
+                <a:latin typeface="Calibri"/>
+              </a:rPr>
+              <a:t>3 · FlowAgent</a:t>
+            </a:r>
+          </a:p>
+          <a:p>
+            <a:pPr algn="ctr"/>
+            <a:r>
+              <a:rPr sz="900">
+                <a:solidFill>
+                  <a:srgbClr val="667085"/>
+                </a:solidFill>
+                <a:latin typeface="Calibri"/>
+              </a:rPr>
+              <a:t>oversight</a:t>
+            </a:r>
+          </a:p>
+        </p:txBody>
+      </p:sp>
+      <p:sp>
+        <p:nvSpPr>
+          <p:cNvPr id="9" name="TextBox 8"/>
           <p:cNvSpPr txBox="1"/>
           <p:nvPr/>
         </p:nvSpPr>
         <p:spPr>
           <a:xfrm>
-            <a:off x="566928" y="1847088"/>
-            <a:ext cx="11064240" cy="219456"/>
+            <a:off x="3858768" y="2286000"/>
+            <a:ext cx="914400" cy="182880"/>
           </a:xfrm>
           <a:prstGeom prst="rect">
             <a:avLst/>
@@ -7080,33 +7634,575 @@
           </a:bodyPr>
           <a:lstStyle/>
           <a:p>
-            <a:pPr algn="ctr">
+            <a:pPr algn="l">
               <a:spcAft>
                 <a:spcPts val="0"/>
               </a:spcAft>
             </a:pPr>
             <a:r>
-              <a:rPr sz="900" b="0" i="0">
+              <a:rPr sz="800" b="1">
                 <a:solidFill>
                   <a:srgbClr val="667085"/>
                 </a:solidFill>
                 <a:latin typeface="Calibri"/>
               </a:rPr>
-              <a:t>scope widens  ·  autonomy grows</a:t>
-            </a:r>
-          </a:p>
-        </p:txBody>
-      </p:sp>
-      <p:sp>
-        <p:nvSpPr>
-          <p:cNvPr id="8" name="Rounded Rectangle 7"/>
+              <a:t>SCOPE</a:t>
+            </a:r>
+          </a:p>
+        </p:txBody>
+      </p:sp>
+      <p:sp>
+        <p:nvSpPr>
+          <p:cNvPr id="10" name="TextBox 9"/>
+          <p:cNvSpPr txBox="1"/>
+          <p:nvPr/>
+        </p:nvSpPr>
+        <p:spPr>
+          <a:xfrm>
+            <a:off x="3858768" y="2487168"/>
+            <a:ext cx="2103120" cy="365760"/>
+          </a:xfrm>
+          <a:prstGeom prst="rect">
+            <a:avLst/>
+          </a:prstGeom>
+          <a:noFill/>
+        </p:spPr>
+        <p:txBody>
+          <a:bodyPr wrap="square" lIns="0" rIns="0" tIns="0" bIns="0">
+            <a:spAutoFit/>
+          </a:bodyPr>
+          <a:lstStyle/>
+          <a:p>
+            <a:pPr algn="l">
+              <a:spcAft>
+                <a:spcPts val="0"/>
+              </a:spcAft>
+            </a:pPr>
+            <a:r>
+              <a:rPr sz="1000" b="0">
+                <a:solidFill>
+                  <a:srgbClr val="1A2332"/>
+                </a:solidFill>
+                <a:latin typeface="Calibri"/>
+              </a:rPr>
+              <a:t>the whole process</a:t>
+            </a:r>
+          </a:p>
+        </p:txBody>
+      </p:sp>
+      <p:sp>
+        <p:nvSpPr>
+          <p:cNvPr id="11" name="TextBox 10"/>
+          <p:cNvSpPr txBox="1"/>
+          <p:nvPr/>
+        </p:nvSpPr>
+        <p:spPr>
+          <a:xfrm>
+            <a:off x="6053328" y="2286000"/>
+            <a:ext cx="1097280" cy="182880"/>
+          </a:xfrm>
+          <a:prstGeom prst="rect">
+            <a:avLst/>
+          </a:prstGeom>
+          <a:noFill/>
+        </p:spPr>
+        <p:txBody>
+          <a:bodyPr wrap="square" lIns="0" rIns="0" tIns="0" bIns="0">
+            <a:spAutoFit/>
+          </a:bodyPr>
+          <a:lstStyle/>
+          <a:p>
+            <a:pPr algn="l">
+              <a:spcAft>
+                <a:spcPts val="0"/>
+              </a:spcAft>
+            </a:pPr>
+            <a:r>
+              <a:rPr sz="800" b="1">
+                <a:solidFill>
+                  <a:srgbClr val="667085"/>
+                </a:solidFill>
+                <a:latin typeface="Calibri"/>
+              </a:rPr>
+              <a:t>DECIDES</a:t>
+            </a:r>
+          </a:p>
+        </p:txBody>
+      </p:sp>
+      <p:sp>
+        <p:nvSpPr>
+          <p:cNvPr id="12" name="TextBox 11"/>
+          <p:cNvSpPr txBox="1"/>
+          <p:nvPr/>
+        </p:nvSpPr>
+        <p:spPr>
+          <a:xfrm>
+            <a:off x="6053328" y="2487168"/>
+            <a:ext cx="2194560" cy="365760"/>
+          </a:xfrm>
+          <a:prstGeom prst="rect">
+            <a:avLst/>
+          </a:prstGeom>
+          <a:noFill/>
+        </p:spPr>
+        <p:txBody>
+          <a:bodyPr wrap="square" lIns="0" rIns="0" tIns="0" bIns="0">
+            <a:spAutoFit/>
+          </a:bodyPr>
+          <a:lstStyle/>
+          <a:p>
+            <a:pPr algn="l">
+              <a:spcAft>
+                <a:spcPts val="0"/>
+              </a:spcAft>
+            </a:pPr>
+            <a:r>
+              <a:rPr sz="1000" b="0">
+                <a:solidFill>
+                  <a:srgbClr val="1A2332"/>
+                </a:solidFill>
+                <a:latin typeface="Calibri"/>
+              </a:rPr>
+              <a:t>whether to deviate at all</a:t>
+            </a:r>
+          </a:p>
+        </p:txBody>
+      </p:sp>
+      <p:sp>
+        <p:nvSpPr>
+          <p:cNvPr id="13" name="TextBox 12"/>
+          <p:cNvSpPr txBox="1"/>
+          <p:nvPr/>
+        </p:nvSpPr>
+        <p:spPr>
+          <a:xfrm>
+            <a:off x="8339327" y="2286000"/>
+            <a:ext cx="1371600" cy="182880"/>
+          </a:xfrm>
+          <a:prstGeom prst="rect">
+            <a:avLst/>
+          </a:prstGeom>
+          <a:noFill/>
+        </p:spPr>
+        <p:txBody>
+          <a:bodyPr wrap="square" lIns="0" rIns="0" tIns="0" bIns="0">
+            <a:spAutoFit/>
+          </a:bodyPr>
+          <a:lstStyle/>
+          <a:p>
+            <a:pPr algn="l">
+              <a:spcAft>
+                <a:spcPts val="0"/>
+              </a:spcAft>
+            </a:pPr>
+            <a:r>
+              <a:rPr sz="800" b="1">
+                <a:solidFill>
+                  <a:srgbClr val="667085"/>
+                </a:solidFill>
+                <a:latin typeface="Calibri"/>
+              </a:rPr>
+              <a:t>BOUNDED BY</a:t>
+            </a:r>
+          </a:p>
+        </p:txBody>
+      </p:sp>
+      <p:sp>
+        <p:nvSpPr>
+          <p:cNvPr id="14" name="TextBox 13"/>
+          <p:cNvSpPr txBox="1"/>
+          <p:nvPr/>
+        </p:nvSpPr>
+        <p:spPr>
+          <a:xfrm>
+            <a:off x="8339327" y="2487168"/>
+            <a:ext cx="3108960" cy="457200"/>
+          </a:xfrm>
+          <a:prstGeom prst="rect">
+            <a:avLst/>
+          </a:prstGeom>
+          <a:noFill/>
+        </p:spPr>
+        <p:txBody>
+          <a:bodyPr wrap="square" lIns="0" rIns="0" tIns="0" bIns="0">
+            <a:spAutoFit/>
+          </a:bodyPr>
+          <a:lstStyle/>
+          <a:p>
+            <a:pPr algn="l">
+              <a:spcAft>
+                <a:spcPts val="0"/>
+              </a:spcAft>
+            </a:pPr>
+            <a:r>
+              <a:rPr sz="900" b="0">
+                <a:solidFill>
+                  <a:srgbClr val="667085"/>
+                </a:solidFill>
+                <a:latin typeface="Calibri"/>
+              </a:rPr>
+              <a:t>hook policy + action_permissions — may skip, jump, terminate or reshape, at declared hooks only</a:t>
+            </a:r>
+          </a:p>
+        </p:txBody>
+      </p:sp>
+      <p:sp>
+        <p:nvSpPr>
+          <p:cNvPr id="15" name="Rounded Rectangle 14"/>
           <p:cNvSpPr/>
           <p:nvPr/>
         </p:nvSpPr>
         <p:spPr>
           <a:xfrm>
-            <a:off x="566928" y="2432304"/>
-            <a:ext cx="3566160" cy="2468880"/>
+            <a:off x="1170432" y="3236976"/>
+            <a:ext cx="10460736" cy="932688"/>
+          </a:xfrm>
+          <a:prstGeom prst="roundRect">
+            <a:avLst>
+              <a:gd name="adj" fmla="val 5000"/>
+            </a:avLst>
+          </a:prstGeom>
+          <a:solidFill>
+            <a:srgbClr val="FFFFFF"/>
+          </a:solidFill>
+          <a:ln w="15875">
+            <a:solidFill>
+              <a:srgbClr val="D8913B"/>
+            </a:solidFill>
+          </a:ln>
+          <a:effectLst/>
+        </p:spPr>
+        <p:style>
+          <a:lnRef idx="1">
+            <a:schemeClr val="accent1"/>
+          </a:lnRef>
+          <a:fillRef idx="3">
+            <a:schemeClr val="accent1"/>
+          </a:fillRef>
+          <a:effectRef idx="2">
+            <a:schemeClr val="accent1"/>
+          </a:effectRef>
+          <a:fontRef idx="minor">
+            <a:schemeClr val="lt1"/>
+          </a:fontRef>
+        </p:style>
+        <p:txBody>
+          <a:bodyPr rtlCol="0" anchor="ctr"/>
+          <a:lstStyle/>
+          <a:p>
+            <a:pPr algn="ctr"/>
+          </a:p>
+        </p:txBody>
+      </p:sp>
+      <p:sp>
+        <p:nvSpPr>
+          <p:cNvPr id="16" name="Rounded Rectangle 15"/>
+          <p:cNvSpPr/>
+          <p:nvPr/>
+        </p:nvSpPr>
+        <p:spPr>
+          <a:xfrm>
+            <a:off x="1371600" y="3410712"/>
+            <a:ext cx="2286000" cy="585216"/>
+          </a:xfrm>
+          <a:prstGeom prst="roundRect">
+            <a:avLst/>
+          </a:prstGeom>
+          <a:solidFill>
+            <a:srgbClr val="FFF4E0"/>
+          </a:solidFill>
+          <a:ln>
+            <a:noFill/>
+          </a:ln>
+          <a:effectLst/>
+        </p:spPr>
+        <p:style>
+          <a:lnRef idx="1">
+            <a:schemeClr val="accent1"/>
+          </a:lnRef>
+          <a:fillRef idx="3">
+            <a:schemeClr val="accent1"/>
+          </a:fillRef>
+          <a:effectRef idx="2">
+            <a:schemeClr val="accent1"/>
+          </a:effectRef>
+          <a:fontRef idx="minor">
+            <a:schemeClr val="lt1"/>
+          </a:fontRef>
+        </p:style>
+        <p:txBody>
+          <a:bodyPr rtlCol="0" anchor="ctr"/>
+          <a:lstStyle/>
+          <a:p>
+            <a:pPr algn="ctr"/>
+            <a:r>
+              <a:rPr sz="1250" b="1">
+                <a:solidFill>
+                  <a:srgbClr val="D8913B"/>
+                </a:solidFill>
+                <a:latin typeface="Calibri"/>
+              </a:rPr>
+              <a:t>2 · DecisionAgent</a:t>
+            </a:r>
+          </a:p>
+          <a:p>
+            <a:pPr algn="ctr"/>
+            <a:r>
+              <a:rPr sz="900">
+                <a:solidFill>
+                  <a:srgbClr val="667085"/>
+                </a:solidFill>
+                <a:latin typeface="Calibri"/>
+              </a:rPr>
+              <a:t>routing</a:t>
+            </a:r>
+          </a:p>
+        </p:txBody>
+      </p:sp>
+      <p:sp>
+        <p:nvSpPr>
+          <p:cNvPr id="17" name="TextBox 16"/>
+          <p:cNvSpPr txBox="1"/>
+          <p:nvPr/>
+        </p:nvSpPr>
+        <p:spPr>
+          <a:xfrm>
+            <a:off x="3858768" y="3383280"/>
+            <a:ext cx="914400" cy="182880"/>
+          </a:xfrm>
+          <a:prstGeom prst="rect">
+            <a:avLst/>
+          </a:prstGeom>
+          <a:noFill/>
+        </p:spPr>
+        <p:txBody>
+          <a:bodyPr wrap="square" lIns="0" rIns="0" tIns="0" bIns="0">
+            <a:spAutoFit/>
+          </a:bodyPr>
+          <a:lstStyle/>
+          <a:p>
+            <a:pPr algn="l">
+              <a:spcAft>
+                <a:spcPts val="0"/>
+              </a:spcAft>
+            </a:pPr>
+            <a:r>
+              <a:rPr sz="800" b="1">
+                <a:solidFill>
+                  <a:srgbClr val="667085"/>
+                </a:solidFill>
+                <a:latin typeface="Calibri"/>
+              </a:rPr>
+              <a:t>SCOPE</a:t>
+            </a:r>
+          </a:p>
+        </p:txBody>
+      </p:sp>
+      <p:sp>
+        <p:nvSpPr>
+          <p:cNvPr id="18" name="TextBox 17"/>
+          <p:cNvSpPr txBox="1"/>
+          <p:nvPr/>
+        </p:nvSpPr>
+        <p:spPr>
+          <a:xfrm>
+            <a:off x="3858768" y="3584448"/>
+            <a:ext cx="2103120" cy="365760"/>
+          </a:xfrm>
+          <a:prstGeom prst="rect">
+            <a:avLst/>
+          </a:prstGeom>
+          <a:noFill/>
+        </p:spPr>
+        <p:txBody>
+          <a:bodyPr wrap="square" lIns="0" rIns="0" tIns="0" bIns="0">
+            <a:spAutoFit/>
+          </a:bodyPr>
+          <a:lstStyle/>
+          <a:p>
+            <a:pPr algn="l">
+              <a:spcAft>
+                <a:spcPts val="0"/>
+              </a:spcAft>
+            </a:pPr>
+            <a:r>
+              <a:rPr sz="1000" b="0">
+                <a:solidFill>
+                  <a:srgbClr val="1A2332"/>
+                </a:solidFill>
+                <a:latin typeface="Calibri"/>
+              </a:rPr>
+              <a:t>one gateway</a:t>
+            </a:r>
+          </a:p>
+        </p:txBody>
+      </p:sp>
+      <p:sp>
+        <p:nvSpPr>
+          <p:cNvPr id="19" name="TextBox 18"/>
+          <p:cNvSpPr txBox="1"/>
+          <p:nvPr/>
+        </p:nvSpPr>
+        <p:spPr>
+          <a:xfrm>
+            <a:off x="6053328" y="3383280"/>
+            <a:ext cx="1097280" cy="182880"/>
+          </a:xfrm>
+          <a:prstGeom prst="rect">
+            <a:avLst/>
+          </a:prstGeom>
+          <a:noFill/>
+        </p:spPr>
+        <p:txBody>
+          <a:bodyPr wrap="square" lIns="0" rIns="0" tIns="0" bIns="0">
+            <a:spAutoFit/>
+          </a:bodyPr>
+          <a:lstStyle/>
+          <a:p>
+            <a:pPr algn="l">
+              <a:spcAft>
+                <a:spcPts val="0"/>
+              </a:spcAft>
+            </a:pPr>
+            <a:r>
+              <a:rPr sz="800" b="1">
+                <a:solidFill>
+                  <a:srgbClr val="667085"/>
+                </a:solidFill>
+                <a:latin typeface="Calibri"/>
+              </a:rPr>
+              <a:t>DECIDES</a:t>
+            </a:r>
+          </a:p>
+        </p:txBody>
+      </p:sp>
+      <p:sp>
+        <p:nvSpPr>
+          <p:cNvPr id="20" name="TextBox 19"/>
+          <p:cNvSpPr txBox="1"/>
+          <p:nvPr/>
+        </p:nvSpPr>
+        <p:spPr>
+          <a:xfrm>
+            <a:off x="6053328" y="3584448"/>
+            <a:ext cx="2194560" cy="365760"/>
+          </a:xfrm>
+          <a:prstGeom prst="rect">
+            <a:avLst/>
+          </a:prstGeom>
+          <a:noFill/>
+        </p:spPr>
+        <p:txBody>
+          <a:bodyPr wrap="square" lIns="0" rIns="0" tIns="0" bIns="0">
+            <a:spAutoFit/>
+          </a:bodyPr>
+          <a:lstStyle/>
+          <a:p>
+            <a:pPr algn="l">
+              <a:spcAft>
+                <a:spcPts val="0"/>
+              </a:spcAft>
+            </a:pPr>
+            <a:r>
+              <a:rPr sz="1000" b="0">
+                <a:solidFill>
+                  <a:srgbClr val="1A2332"/>
+                </a:solidFill>
+                <a:latin typeface="Calibri"/>
+              </a:rPr>
+              <a:t>which branch is taken</a:t>
+            </a:r>
+          </a:p>
+        </p:txBody>
+      </p:sp>
+      <p:sp>
+        <p:nvSpPr>
+          <p:cNvPr id="21" name="TextBox 20"/>
+          <p:cNvSpPr txBox="1"/>
+          <p:nvPr/>
+        </p:nvSpPr>
+        <p:spPr>
+          <a:xfrm>
+            <a:off x="8339327" y="3383280"/>
+            <a:ext cx="1371600" cy="182880"/>
+          </a:xfrm>
+          <a:prstGeom prst="rect">
+            <a:avLst/>
+          </a:prstGeom>
+          <a:noFill/>
+        </p:spPr>
+        <p:txBody>
+          <a:bodyPr wrap="square" lIns="0" rIns="0" tIns="0" bIns="0">
+            <a:spAutoFit/>
+          </a:bodyPr>
+          <a:lstStyle/>
+          <a:p>
+            <a:pPr algn="l">
+              <a:spcAft>
+                <a:spcPts val="0"/>
+              </a:spcAft>
+            </a:pPr>
+            <a:r>
+              <a:rPr sz="800" b="1">
+                <a:solidFill>
+                  <a:srgbClr val="667085"/>
+                </a:solidFill>
+                <a:latin typeface="Calibri"/>
+              </a:rPr>
+              <a:t>BOUNDED BY</a:t>
+            </a:r>
+          </a:p>
+        </p:txBody>
+      </p:sp>
+      <p:sp>
+        <p:nvSpPr>
+          <p:cNvPr id="22" name="TextBox 21"/>
+          <p:cNvSpPr txBox="1"/>
+          <p:nvPr/>
+        </p:nvSpPr>
+        <p:spPr>
+          <a:xfrm>
+            <a:off x="8339327" y="3584448"/>
+            <a:ext cx="3108960" cy="457200"/>
+          </a:xfrm>
+          <a:prstGeom prst="rect">
+            <a:avLst/>
+          </a:prstGeom>
+          <a:noFill/>
+        </p:spPr>
+        <p:txBody>
+          <a:bodyPr wrap="square" lIns="0" rIns="0" tIns="0" bIns="0">
+            <a:spAutoFit/>
+          </a:bodyPr>
+          <a:lstStyle/>
+          <a:p>
+            <a:pPr algn="l">
+              <a:spcAft>
+                <a:spcPts val="0"/>
+              </a:spcAft>
+            </a:pPr>
+            <a:r>
+              <a:rPr sz="900" b="0">
+                <a:solidFill>
+                  <a:srgbClr val="667085"/>
+                </a:solidFill>
+                <a:latin typeface="Calibri"/>
+              </a:rPr>
+              <a:t>gateway policy — the condition is evaluated first, the LLM only when it is inconclusive</a:t>
+            </a:r>
+          </a:p>
+        </p:txBody>
+      </p:sp>
+      <p:sp>
+        <p:nvSpPr>
+          <p:cNvPr id="23" name="Rounded Rectangle 22"/>
+          <p:cNvSpPr/>
+          <p:nvPr/>
+        </p:nvSpPr>
+        <p:spPr>
+          <a:xfrm>
+            <a:off x="1170432" y="4334256"/>
+            <a:ext cx="10460736" cy="932688"/>
           </a:xfrm>
           <a:prstGeom prst="roundRect">
             <a:avLst>
@@ -7147,14 +8243,14 @@
       </p:sp>
       <p:sp>
         <p:nvSpPr>
-          <p:cNvPr id="9" name="Rounded Rectangle 8"/>
+          <p:cNvPr id="24" name="Rounded Rectangle 23"/>
           <p:cNvSpPr/>
           <p:nvPr/>
         </p:nvSpPr>
         <p:spPr>
           <a:xfrm>
-            <a:off x="804672" y="2633472"/>
-            <a:ext cx="3090672" cy="310896"/>
+            <a:off x="1371600" y="4507992"/>
+            <a:ext cx="2286000" cy="585216"/>
           </a:xfrm>
           <a:prstGeom prst="roundRect">
             <a:avLst/>
@@ -7187,66 +8283,39 @@
           <a:p>
             <a:pPr algn="ctr"/>
             <a:r>
-              <a:rPr sz="1000" b="1">
+              <a:rPr sz="1250" b="1">
                 <a:solidFill>
                   <a:srgbClr val="3B7DD8"/>
                 </a:solidFill>
                 <a:latin typeface="Calibri"/>
               </a:rPr>
-              <a:t>1 · WORKLOAD</a:t>
-            </a:r>
-          </a:p>
-        </p:txBody>
-      </p:sp>
-      <p:sp>
-        <p:nvSpPr>
-          <p:cNvPr id="10" name="TextBox 9"/>
+              <a:t>1 · TaskAgent</a:t>
+            </a:r>
+          </a:p>
+          <a:p>
+            <a:pPr algn="ctr"/>
+            <a:r>
+              <a:rPr sz="900">
+                <a:solidFill>
+                  <a:srgbClr val="667085"/>
+                </a:solidFill>
+                <a:latin typeface="Calibri"/>
+              </a:rPr>
+              <a:t>workload</a:t>
+            </a:r>
+          </a:p>
+        </p:txBody>
+      </p:sp>
+      <p:sp>
+        <p:nvSpPr>
+          <p:cNvPr id="25" name="TextBox 24"/>
           <p:cNvSpPr txBox="1"/>
           <p:nvPr/>
         </p:nvSpPr>
         <p:spPr>
           <a:xfrm>
-            <a:off x="804672" y="2980944"/>
-            <a:ext cx="3108960" cy="274320"/>
-          </a:xfrm>
-          <a:prstGeom prst="rect">
-            <a:avLst/>
-          </a:prstGeom>
-          <a:noFill/>
-        </p:spPr>
-        <p:txBody>
-          <a:bodyPr wrap="square" lIns="0" rIns="0" tIns="0" bIns="0">
-            <a:spAutoFit/>
-          </a:bodyPr>
-          <a:lstStyle/>
-          <a:p>
-            <a:pPr algn="ctr">
-              <a:spcAft>
-                <a:spcPts val="0"/>
-              </a:spcAft>
-            </a:pPr>
-            <a:r>
-              <a:rPr sz="1300" b="1" i="0">
-                <a:solidFill>
-                  <a:srgbClr val="1A2332"/>
-                </a:solidFill>
-                <a:latin typeface="Calibri"/>
-              </a:rPr>
-              <a:t>TaskAgent</a:t>
-            </a:r>
-          </a:p>
-        </p:txBody>
-      </p:sp>
-      <p:sp>
-        <p:nvSpPr>
-          <p:cNvPr id="11" name="TextBox 10"/>
-          <p:cNvSpPr txBox="1"/>
-          <p:nvPr/>
-        </p:nvSpPr>
-        <p:spPr>
-          <a:xfrm>
-            <a:off x="822960" y="3401568"/>
-            <a:ext cx="868680" cy="201168"/>
+            <a:off x="3858768" y="4480560"/>
+            <a:ext cx="914400" cy="182880"/>
           </a:xfrm>
           <a:prstGeom prst="rect">
             <a:avLst/>
@@ -7265,27 +8334,27 @@
               </a:spcAft>
             </a:pPr>
             <a:r>
-              <a:rPr sz="900" b="1" i="0">
-                <a:solidFill>
-                  <a:srgbClr val="3B7DD8"/>
-                </a:solidFill>
-                <a:latin typeface="Calibri"/>
-              </a:rPr>
-              <a:t>Scope</a:t>
-            </a:r>
-          </a:p>
-        </p:txBody>
-      </p:sp>
-      <p:sp>
-        <p:nvSpPr>
-          <p:cNvPr id="12" name="TextBox 11"/>
+              <a:rPr sz="800" b="1">
+                <a:solidFill>
+                  <a:srgbClr val="667085"/>
+                </a:solidFill>
+                <a:latin typeface="Calibri"/>
+              </a:rPr>
+              <a:t>SCOPE</a:t>
+            </a:r>
+          </a:p>
+        </p:txBody>
+      </p:sp>
+      <p:sp>
+        <p:nvSpPr>
+          <p:cNvPr id="26" name="TextBox 25"/>
           <p:cNvSpPr txBox="1"/>
           <p:nvPr/>
         </p:nvSpPr>
         <p:spPr>
           <a:xfrm>
-            <a:off x="1737360" y="3401568"/>
-            <a:ext cx="2194560" cy="457200"/>
+            <a:off x="3858768" y="4681728"/>
+            <a:ext cx="2103120" cy="365760"/>
           </a:xfrm>
           <a:prstGeom prst="rect">
             <a:avLst/>
@@ -7304,7 +8373,7 @@
               </a:spcAft>
             </a:pPr>
             <a:r>
-              <a:rPr sz="900" b="0" i="0">
+              <a:rPr sz="1000" b="0">
                 <a:solidFill>
                   <a:srgbClr val="1A2332"/>
                 </a:solidFill>
@@ -7317,14 +8386,14 @@
       </p:sp>
       <p:sp>
         <p:nvSpPr>
-          <p:cNvPr id="13" name="TextBox 12"/>
+          <p:cNvPr id="27" name="TextBox 26"/>
           <p:cNvSpPr txBox="1"/>
           <p:nvPr/>
         </p:nvSpPr>
         <p:spPr>
           <a:xfrm>
-            <a:off x="822960" y="3639312"/>
-            <a:ext cx="868680" cy="201168"/>
+            <a:off x="6053328" y="4480560"/>
+            <a:ext cx="1097280" cy="182880"/>
           </a:xfrm>
           <a:prstGeom prst="rect">
             <a:avLst/>
@@ -7343,27 +8412,27 @@
               </a:spcAft>
             </a:pPr>
             <a:r>
-              <a:rPr sz="900" b="1" i="0">
-                <a:solidFill>
-                  <a:srgbClr val="3B7DD8"/>
-                </a:solidFill>
-                <a:latin typeface="Calibri"/>
-              </a:rPr>
-              <a:t>Decides</a:t>
-            </a:r>
-          </a:p>
-        </p:txBody>
-      </p:sp>
-      <p:sp>
-        <p:nvSpPr>
-          <p:cNvPr id="14" name="TextBox 13"/>
+              <a:rPr sz="800" b="1">
+                <a:solidFill>
+                  <a:srgbClr val="667085"/>
+                </a:solidFill>
+                <a:latin typeface="Calibri"/>
+              </a:rPr>
+              <a:t>DECIDES</a:t>
+            </a:r>
+          </a:p>
+        </p:txBody>
+      </p:sp>
+      <p:sp>
+        <p:nvSpPr>
+          <p:cNvPr id="28" name="TextBox 27"/>
           <p:cNvSpPr txBox="1"/>
           <p:nvPr/>
         </p:nvSpPr>
         <p:spPr>
           <a:xfrm>
-            <a:off x="1737360" y="3639312"/>
-            <a:ext cx="2194560" cy="457200"/>
+            <a:off x="6053328" y="4681728"/>
+            <a:ext cx="2194560" cy="365760"/>
           </a:xfrm>
           <a:prstGeom prst="rect">
             <a:avLst/>
@@ -7382,7 +8451,7 @@
               </a:spcAft>
             </a:pPr>
             <a:r>
-              <a:rPr sz="900" b="0" i="0">
+              <a:rPr sz="1000" b="0">
                 <a:solidFill>
                   <a:srgbClr val="1A2332"/>
                 </a:solidFill>
@@ -7395,14 +8464,14 @@
       </p:sp>
       <p:sp>
         <p:nvSpPr>
-          <p:cNvPr id="15" name="TextBox 14"/>
+          <p:cNvPr id="29" name="TextBox 28"/>
           <p:cNvSpPr txBox="1"/>
           <p:nvPr/>
         </p:nvSpPr>
         <p:spPr>
           <a:xfrm>
-            <a:off x="822960" y="3877056"/>
-            <a:ext cx="868680" cy="201168"/>
+            <a:off x="8339327" y="4480560"/>
+            <a:ext cx="1371600" cy="182880"/>
           </a:xfrm>
           <a:prstGeom prst="rect">
             <a:avLst/>
@@ -7421,27 +8490,27 @@
               </a:spcAft>
             </a:pPr>
             <a:r>
-              <a:rPr sz="900" b="1" i="0">
-                <a:solidFill>
-                  <a:srgbClr val="3B7DD8"/>
-                </a:solidFill>
-                <a:latin typeface="Calibri"/>
-              </a:rPr>
-              <a:t>Bounded by</a:t>
-            </a:r>
-          </a:p>
-        </p:txBody>
-      </p:sp>
-      <p:sp>
-        <p:nvSpPr>
-          <p:cNvPr id="16" name="TextBox 15"/>
+              <a:rPr sz="800" b="1">
+                <a:solidFill>
+                  <a:srgbClr val="667085"/>
+                </a:solidFill>
+                <a:latin typeface="Calibri"/>
+              </a:rPr>
+              <a:t>BOUNDED BY</a:t>
+            </a:r>
+          </a:p>
+        </p:txBody>
+      </p:sp>
+      <p:sp>
+        <p:nvSpPr>
+          <p:cNvPr id="30" name="TextBox 29"/>
           <p:cNvSpPr txBox="1"/>
           <p:nvPr/>
         </p:nvSpPr>
         <p:spPr>
           <a:xfrm>
-            <a:off x="1737360" y="3877056"/>
-            <a:ext cx="2194560" cy="457200"/>
+            <a:off x="8339327" y="4681728"/>
+            <a:ext cx="3108960" cy="457200"/>
           </a:xfrm>
           <a:prstGeom prst="rect">
             <a:avLst/>
@@ -7460,27 +8529,27 @@
               </a:spcAft>
             </a:pPr>
             <a:r>
-              <a:rPr sz="900" b="0" i="0">
-                <a:solidFill>
-                  <a:srgbClr val="1A2332"/>
-                </a:solidFill>
-                <a:latin typeface="Calibri"/>
-              </a:rPr>
-              <a:t>the task policy</a:t>
-            </a:r>
-          </a:p>
-        </p:txBody>
-      </p:sp>
-      <p:sp>
-        <p:nvSpPr>
-          <p:cNvPr id="17" name="TextBox 16"/>
+              <a:rPr sz="900" b="0">
+                <a:solidFill>
+                  <a:srgbClr val="667085"/>
+                </a:solidFill>
+                <a:latin typeface="Calibri"/>
+              </a:rPr>
+              <a:t>the task policy — it cannot change the path at all</a:t>
+            </a:r>
+          </a:p>
+        </p:txBody>
+      </p:sp>
+      <p:sp>
+        <p:nvSpPr>
+          <p:cNvPr id="31" name="TextBox 30"/>
           <p:cNvSpPr txBox="1"/>
           <p:nvPr/>
         </p:nvSpPr>
         <p:spPr>
           <a:xfrm>
-            <a:off x="822960" y="4114800"/>
-            <a:ext cx="868680" cy="201168"/>
+            <a:off x="566928" y="5541264"/>
+            <a:ext cx="11064240" cy="548640"/>
           </a:xfrm>
           <a:prstGeom prst="rect">
             <a:avLst/>
@@ -7499,1091 +8568,13 @@
               </a:spcAft>
             </a:pPr>
             <a:r>
-              <a:rPr sz="900" b="1" i="0">
-                <a:solidFill>
-                  <a:srgbClr val="3B7DD8"/>
-                </a:solidFill>
-                <a:latin typeface="Calibri"/>
-              </a:rPr>
-              <a:t>Path</a:t>
-            </a:r>
-          </a:p>
-        </p:txBody>
-      </p:sp>
-      <p:sp>
-        <p:nvSpPr>
-          <p:cNvPr id="18" name="TextBox 17"/>
-          <p:cNvSpPr txBox="1"/>
-          <p:nvPr/>
-        </p:nvSpPr>
-        <p:spPr>
-          <a:xfrm>
-            <a:off x="1737360" y="4114800"/>
-            <a:ext cx="2194560" cy="457200"/>
-          </a:xfrm>
-          <a:prstGeom prst="rect">
-            <a:avLst/>
-          </a:prstGeom>
-          <a:noFill/>
-        </p:spPr>
-        <p:txBody>
-          <a:bodyPr wrap="square" lIns="0" rIns="0" tIns="0" bIns="0">
-            <a:spAutoFit/>
-          </a:bodyPr>
-          <a:lstStyle/>
-          <a:p>
-            <a:pPr algn="l">
-              <a:spcAft>
-                <a:spcPts val="0"/>
-              </a:spcAft>
-            </a:pPr>
-            <a:r>
-              <a:rPr sz="900" b="0" i="0">
+              <a:rPr sz="1150" b="0">
                 <a:solidFill>
                   <a:srgbClr val="1A2332"/>
                 </a:solidFill>
                 <a:latin typeface="Calibri"/>
               </a:rPr>
-              <a:t>cannot change it</a:t>
-            </a:r>
-          </a:p>
-        </p:txBody>
-      </p:sp>
-      <p:sp>
-        <p:nvSpPr>
-          <p:cNvPr id="19" name="Rounded Rectangle 18"/>
-          <p:cNvSpPr/>
-          <p:nvPr/>
-        </p:nvSpPr>
-        <p:spPr>
-          <a:xfrm>
-            <a:off x="4334256" y="2432304"/>
-            <a:ext cx="3566160" cy="2468880"/>
-          </a:xfrm>
-          <a:prstGeom prst="roundRect">
-            <a:avLst>
-              <a:gd name="adj" fmla="val 5000"/>
-            </a:avLst>
-          </a:prstGeom>
-          <a:solidFill>
-            <a:srgbClr val="FFFFFF"/>
-          </a:solidFill>
-          <a:ln w="15875">
-            <a:solidFill>
-              <a:srgbClr val="D8913B"/>
-            </a:solidFill>
-          </a:ln>
-          <a:effectLst/>
-        </p:spPr>
-        <p:style>
-          <a:lnRef idx="1">
-            <a:schemeClr val="accent1"/>
-          </a:lnRef>
-          <a:fillRef idx="3">
-            <a:schemeClr val="accent1"/>
-          </a:fillRef>
-          <a:effectRef idx="2">
-            <a:schemeClr val="accent1"/>
-          </a:effectRef>
-          <a:fontRef idx="minor">
-            <a:schemeClr val="lt1"/>
-          </a:fontRef>
-        </p:style>
-        <p:txBody>
-          <a:bodyPr rtlCol="0" anchor="ctr"/>
-          <a:lstStyle/>
-          <a:p>
-            <a:pPr algn="ctr"/>
-          </a:p>
-        </p:txBody>
-      </p:sp>
-      <p:sp>
-        <p:nvSpPr>
-          <p:cNvPr id="20" name="Rounded Rectangle 19"/>
-          <p:cNvSpPr/>
-          <p:nvPr/>
-        </p:nvSpPr>
-        <p:spPr>
-          <a:xfrm>
-            <a:off x="4572000" y="2633472"/>
-            <a:ext cx="3090672" cy="310896"/>
-          </a:xfrm>
-          <a:prstGeom prst="roundRect">
-            <a:avLst/>
-          </a:prstGeom>
-          <a:solidFill>
-            <a:srgbClr val="FFF4E0"/>
-          </a:solidFill>
-          <a:ln>
-            <a:noFill/>
-          </a:ln>
-          <a:effectLst/>
-        </p:spPr>
-        <p:style>
-          <a:lnRef idx="1">
-            <a:schemeClr val="accent1"/>
-          </a:lnRef>
-          <a:fillRef idx="3">
-            <a:schemeClr val="accent1"/>
-          </a:fillRef>
-          <a:effectRef idx="2">
-            <a:schemeClr val="accent1"/>
-          </a:effectRef>
-          <a:fontRef idx="minor">
-            <a:schemeClr val="lt1"/>
-          </a:fontRef>
-        </p:style>
-        <p:txBody>
-          <a:bodyPr rtlCol="0" anchor="ctr"/>
-          <a:lstStyle/>
-          <a:p>
-            <a:pPr algn="ctr"/>
-            <a:r>
-              <a:rPr sz="1000" b="1">
-                <a:solidFill>
-                  <a:srgbClr val="D8913B"/>
-                </a:solidFill>
-                <a:latin typeface="Calibri"/>
-              </a:rPr>
-              <a:t>2 · ROUTING</a:t>
-            </a:r>
-          </a:p>
-        </p:txBody>
-      </p:sp>
-      <p:sp>
-        <p:nvSpPr>
-          <p:cNvPr id="21" name="TextBox 20"/>
-          <p:cNvSpPr txBox="1"/>
-          <p:nvPr/>
-        </p:nvSpPr>
-        <p:spPr>
-          <a:xfrm>
-            <a:off x="4572000" y="2980944"/>
-            <a:ext cx="3108960" cy="274320"/>
-          </a:xfrm>
-          <a:prstGeom prst="rect">
-            <a:avLst/>
-          </a:prstGeom>
-          <a:noFill/>
-        </p:spPr>
-        <p:txBody>
-          <a:bodyPr wrap="square" lIns="0" rIns="0" tIns="0" bIns="0">
-            <a:spAutoFit/>
-          </a:bodyPr>
-          <a:lstStyle/>
-          <a:p>
-            <a:pPr algn="ctr">
-              <a:spcAft>
-                <a:spcPts val="0"/>
-              </a:spcAft>
-            </a:pPr>
-            <a:r>
-              <a:rPr sz="1300" b="1" i="0">
-                <a:solidFill>
-                  <a:srgbClr val="1A2332"/>
-                </a:solidFill>
-                <a:latin typeface="Calibri"/>
-              </a:rPr>
-              <a:t>DecisionAgent</a:t>
-            </a:r>
-          </a:p>
-        </p:txBody>
-      </p:sp>
-      <p:sp>
-        <p:nvSpPr>
-          <p:cNvPr id="22" name="TextBox 21"/>
-          <p:cNvSpPr txBox="1"/>
-          <p:nvPr/>
-        </p:nvSpPr>
-        <p:spPr>
-          <a:xfrm>
-            <a:off x="4590288" y="3401568"/>
-            <a:ext cx="868680" cy="201168"/>
-          </a:xfrm>
-          <a:prstGeom prst="rect">
-            <a:avLst/>
-          </a:prstGeom>
-          <a:noFill/>
-        </p:spPr>
-        <p:txBody>
-          <a:bodyPr wrap="square" lIns="0" rIns="0" tIns="0" bIns="0">
-            <a:spAutoFit/>
-          </a:bodyPr>
-          <a:lstStyle/>
-          <a:p>
-            <a:pPr algn="l">
-              <a:spcAft>
-                <a:spcPts val="0"/>
-              </a:spcAft>
-            </a:pPr>
-            <a:r>
-              <a:rPr sz="900" b="1" i="0">
-                <a:solidFill>
-                  <a:srgbClr val="D8913B"/>
-                </a:solidFill>
-                <a:latin typeface="Calibri"/>
-              </a:rPr>
-              <a:t>Scope</a:t>
-            </a:r>
-          </a:p>
-        </p:txBody>
-      </p:sp>
-      <p:sp>
-        <p:nvSpPr>
-          <p:cNvPr id="23" name="TextBox 22"/>
-          <p:cNvSpPr txBox="1"/>
-          <p:nvPr/>
-        </p:nvSpPr>
-        <p:spPr>
-          <a:xfrm>
-            <a:off x="5504688" y="3401568"/>
-            <a:ext cx="2194560" cy="457200"/>
-          </a:xfrm>
-          <a:prstGeom prst="rect">
-            <a:avLst/>
-          </a:prstGeom>
-          <a:noFill/>
-        </p:spPr>
-        <p:txBody>
-          <a:bodyPr wrap="square" lIns="0" rIns="0" tIns="0" bIns="0">
-            <a:spAutoFit/>
-          </a:bodyPr>
-          <a:lstStyle/>
-          <a:p>
-            <a:pPr algn="l">
-              <a:spcAft>
-                <a:spcPts val="0"/>
-              </a:spcAft>
-            </a:pPr>
-            <a:r>
-              <a:rPr sz="900" b="0" i="0">
-                <a:solidFill>
-                  <a:srgbClr val="1A2332"/>
-                </a:solidFill>
-                <a:latin typeface="Calibri"/>
-              </a:rPr>
-              <a:t>one gateway</a:t>
-            </a:r>
-          </a:p>
-        </p:txBody>
-      </p:sp>
-      <p:sp>
-        <p:nvSpPr>
-          <p:cNvPr id="24" name="TextBox 23"/>
-          <p:cNvSpPr txBox="1"/>
-          <p:nvPr/>
-        </p:nvSpPr>
-        <p:spPr>
-          <a:xfrm>
-            <a:off x="4590288" y="3639312"/>
-            <a:ext cx="868680" cy="201168"/>
-          </a:xfrm>
-          <a:prstGeom prst="rect">
-            <a:avLst/>
-          </a:prstGeom>
-          <a:noFill/>
-        </p:spPr>
-        <p:txBody>
-          <a:bodyPr wrap="square" lIns="0" rIns="0" tIns="0" bIns="0">
-            <a:spAutoFit/>
-          </a:bodyPr>
-          <a:lstStyle/>
-          <a:p>
-            <a:pPr algn="l">
-              <a:spcAft>
-                <a:spcPts val="0"/>
-              </a:spcAft>
-            </a:pPr>
-            <a:r>
-              <a:rPr sz="900" b="1" i="0">
-                <a:solidFill>
-                  <a:srgbClr val="D8913B"/>
-                </a:solidFill>
-                <a:latin typeface="Calibri"/>
-              </a:rPr>
-              <a:t>Decides</a:t>
-            </a:r>
-          </a:p>
-        </p:txBody>
-      </p:sp>
-      <p:sp>
-        <p:nvSpPr>
-          <p:cNvPr id="25" name="TextBox 24"/>
-          <p:cNvSpPr txBox="1"/>
-          <p:nvPr/>
-        </p:nvSpPr>
-        <p:spPr>
-          <a:xfrm>
-            <a:off x="5504688" y="3639312"/>
-            <a:ext cx="2194560" cy="457200"/>
-          </a:xfrm>
-          <a:prstGeom prst="rect">
-            <a:avLst/>
-          </a:prstGeom>
-          <a:noFill/>
-        </p:spPr>
-        <p:txBody>
-          <a:bodyPr wrap="square" lIns="0" rIns="0" tIns="0" bIns="0">
-            <a:spAutoFit/>
-          </a:bodyPr>
-          <a:lstStyle/>
-          <a:p>
-            <a:pPr algn="l">
-              <a:spcAft>
-                <a:spcPts val="0"/>
-              </a:spcAft>
-            </a:pPr>
-            <a:r>
-              <a:rPr sz="900" b="0" i="0">
-                <a:solidFill>
-                  <a:srgbClr val="1A2332"/>
-                </a:solidFill>
-                <a:latin typeface="Calibri"/>
-              </a:rPr>
-              <a:t>which branch is taken</a:t>
-            </a:r>
-          </a:p>
-        </p:txBody>
-      </p:sp>
-      <p:sp>
-        <p:nvSpPr>
-          <p:cNvPr id="26" name="TextBox 25"/>
-          <p:cNvSpPr txBox="1"/>
-          <p:nvPr/>
-        </p:nvSpPr>
-        <p:spPr>
-          <a:xfrm>
-            <a:off x="4590288" y="3877056"/>
-            <a:ext cx="868680" cy="201168"/>
-          </a:xfrm>
-          <a:prstGeom prst="rect">
-            <a:avLst/>
-          </a:prstGeom>
-          <a:noFill/>
-        </p:spPr>
-        <p:txBody>
-          <a:bodyPr wrap="square" lIns="0" rIns="0" tIns="0" bIns="0">
-            <a:spAutoFit/>
-          </a:bodyPr>
-          <a:lstStyle/>
-          <a:p>
-            <a:pPr algn="l">
-              <a:spcAft>
-                <a:spcPts val="0"/>
-              </a:spcAft>
-            </a:pPr>
-            <a:r>
-              <a:rPr sz="900" b="1" i="0">
-                <a:solidFill>
-                  <a:srgbClr val="D8913B"/>
-                </a:solidFill>
-                <a:latin typeface="Calibri"/>
-              </a:rPr>
-              <a:t>Bounded by</a:t>
-            </a:r>
-          </a:p>
-        </p:txBody>
-      </p:sp>
-      <p:sp>
-        <p:nvSpPr>
-          <p:cNvPr id="27" name="TextBox 26"/>
-          <p:cNvSpPr txBox="1"/>
-          <p:nvPr/>
-        </p:nvSpPr>
-        <p:spPr>
-          <a:xfrm>
-            <a:off x="5504688" y="3877056"/>
-            <a:ext cx="2194560" cy="457200"/>
-          </a:xfrm>
-          <a:prstGeom prst="rect">
-            <a:avLst/>
-          </a:prstGeom>
-          <a:noFill/>
-        </p:spPr>
-        <p:txBody>
-          <a:bodyPr wrap="square" lIns="0" rIns="0" tIns="0" bIns="0">
-            <a:spAutoFit/>
-          </a:bodyPr>
-          <a:lstStyle/>
-          <a:p>
-            <a:pPr algn="l">
-              <a:spcAft>
-                <a:spcPts val="0"/>
-              </a:spcAft>
-            </a:pPr>
-            <a:r>
-              <a:rPr sz="900" b="0" i="0">
-                <a:solidFill>
-                  <a:srgbClr val="1A2332"/>
-                </a:solidFill>
-                <a:latin typeface="Calibri"/>
-              </a:rPr>
-              <a:t>gateway policy — the condition</a:t>
-            </a:r>
-          </a:p>
-          <a:p>
-            <a:pPr algn="l">
-              <a:spcAft>
-                <a:spcPts val="0"/>
-              </a:spcAft>
-            </a:pPr>
-            <a:r>
-              <a:rPr sz="900" b="0" i="0">
-                <a:solidFill>
-                  <a:srgbClr val="1A2332"/>
-                </a:solidFill>
-                <a:latin typeface="Calibri"/>
-              </a:rPr>
-              <a:t>is evaluated first, LLM only</a:t>
-            </a:r>
-          </a:p>
-          <a:p>
-            <a:pPr algn="l">
-              <a:spcAft>
-                <a:spcPts val="0"/>
-              </a:spcAft>
-            </a:pPr>
-            <a:r>
-              <a:rPr sz="900" b="0" i="0">
-                <a:solidFill>
-                  <a:srgbClr val="1A2332"/>
-                </a:solidFill>
-                <a:latin typeface="Calibri"/>
-              </a:rPr>
-              <a:t>when inconclusive</a:t>
-            </a:r>
-          </a:p>
-        </p:txBody>
-      </p:sp>
-      <p:sp>
-        <p:nvSpPr>
-          <p:cNvPr id="28" name="TextBox 27"/>
-          <p:cNvSpPr txBox="1"/>
-          <p:nvPr/>
-        </p:nvSpPr>
-        <p:spPr>
-          <a:xfrm>
-            <a:off x="4590288" y="4407408"/>
-            <a:ext cx="868680" cy="201168"/>
-          </a:xfrm>
-          <a:prstGeom prst="rect">
-            <a:avLst/>
-          </a:prstGeom>
-          <a:noFill/>
-        </p:spPr>
-        <p:txBody>
-          <a:bodyPr wrap="square" lIns="0" rIns="0" tIns="0" bIns="0">
-            <a:spAutoFit/>
-          </a:bodyPr>
-          <a:lstStyle/>
-          <a:p>
-            <a:pPr algn="l">
-              <a:spcAft>
-                <a:spcPts val="0"/>
-              </a:spcAft>
-            </a:pPr>
-            <a:r>
-              <a:rPr sz="900" b="1" i="0">
-                <a:solidFill>
-                  <a:srgbClr val="D8913B"/>
-                </a:solidFill>
-                <a:latin typeface="Calibri"/>
-              </a:rPr>
-              <a:t>Path</a:t>
-            </a:r>
-          </a:p>
-        </p:txBody>
-      </p:sp>
-      <p:sp>
-        <p:nvSpPr>
-          <p:cNvPr id="29" name="TextBox 28"/>
-          <p:cNvSpPr txBox="1"/>
-          <p:nvPr/>
-        </p:nvSpPr>
-        <p:spPr>
-          <a:xfrm>
-            <a:off x="5504688" y="4407408"/>
-            <a:ext cx="2194560" cy="457200"/>
-          </a:xfrm>
-          <a:prstGeom prst="rect">
-            <a:avLst/>
-          </a:prstGeom>
-          <a:noFill/>
-        </p:spPr>
-        <p:txBody>
-          <a:bodyPr wrap="square" lIns="0" rIns="0" tIns="0" bIns="0">
-            <a:spAutoFit/>
-          </a:bodyPr>
-          <a:lstStyle/>
-          <a:p>
-            <a:pPr algn="l">
-              <a:spcAft>
-                <a:spcPts val="0"/>
-              </a:spcAft>
-            </a:pPr>
-            <a:r>
-              <a:rPr sz="900" b="0" i="0">
-                <a:solidFill>
-                  <a:srgbClr val="1A2332"/>
-                </a:solidFill>
-                <a:latin typeface="Calibri"/>
-              </a:rPr>
-              <a:t>chooses among modelled</a:t>
-            </a:r>
-          </a:p>
-          <a:p>
-            <a:pPr algn="l">
-              <a:spcAft>
-                <a:spcPts val="0"/>
-              </a:spcAft>
-            </a:pPr>
-            <a:r>
-              <a:rPr sz="900" b="0" i="0">
-                <a:solidFill>
-                  <a:srgbClr val="1A2332"/>
-                </a:solidFill>
-                <a:latin typeface="Calibri"/>
-              </a:rPr>
-              <a:t>branches only</a:t>
-            </a:r>
-          </a:p>
-        </p:txBody>
-      </p:sp>
-      <p:sp>
-        <p:nvSpPr>
-          <p:cNvPr id="30" name="Rounded Rectangle 29"/>
-          <p:cNvSpPr/>
-          <p:nvPr/>
-        </p:nvSpPr>
-        <p:spPr>
-          <a:xfrm>
-            <a:off x="8101583" y="2432304"/>
-            <a:ext cx="3566160" cy="2468880"/>
-          </a:xfrm>
-          <a:prstGeom prst="roundRect">
-            <a:avLst>
-              <a:gd name="adj" fmla="val 5000"/>
-            </a:avLst>
-          </a:prstGeom>
-          <a:solidFill>
-            <a:srgbClr val="FFFFFF"/>
-          </a:solidFill>
-          <a:ln w="15875">
-            <a:solidFill>
-              <a:srgbClr val="3BA55D"/>
-            </a:solidFill>
-          </a:ln>
-          <a:effectLst/>
-        </p:spPr>
-        <p:style>
-          <a:lnRef idx="1">
-            <a:schemeClr val="accent1"/>
-          </a:lnRef>
-          <a:fillRef idx="3">
-            <a:schemeClr val="accent1"/>
-          </a:fillRef>
-          <a:effectRef idx="2">
-            <a:schemeClr val="accent1"/>
-          </a:effectRef>
-          <a:fontRef idx="minor">
-            <a:schemeClr val="lt1"/>
-          </a:fontRef>
-        </p:style>
-        <p:txBody>
-          <a:bodyPr rtlCol="0" anchor="ctr"/>
-          <a:lstStyle/>
-          <a:p>
-            <a:pPr algn="ctr"/>
-          </a:p>
-        </p:txBody>
-      </p:sp>
-      <p:sp>
-        <p:nvSpPr>
-          <p:cNvPr id="31" name="Rounded Rectangle 30"/>
-          <p:cNvSpPr/>
-          <p:nvPr/>
-        </p:nvSpPr>
-        <p:spPr>
-          <a:xfrm>
-            <a:off x="8339327" y="2633472"/>
-            <a:ext cx="3090672" cy="310896"/>
-          </a:xfrm>
-          <a:prstGeom prst="roundRect">
-            <a:avLst/>
-          </a:prstGeom>
-          <a:solidFill>
-            <a:srgbClr val="E9F7EC"/>
-          </a:solidFill>
-          <a:ln>
-            <a:noFill/>
-          </a:ln>
-          <a:effectLst/>
-        </p:spPr>
-        <p:style>
-          <a:lnRef idx="1">
-            <a:schemeClr val="accent1"/>
-          </a:lnRef>
-          <a:fillRef idx="3">
-            <a:schemeClr val="accent1"/>
-          </a:fillRef>
-          <a:effectRef idx="2">
-            <a:schemeClr val="accent1"/>
-          </a:effectRef>
-          <a:fontRef idx="minor">
-            <a:schemeClr val="lt1"/>
-          </a:fontRef>
-        </p:style>
-        <p:txBody>
-          <a:bodyPr rtlCol="0" anchor="ctr"/>
-          <a:lstStyle/>
-          <a:p>
-            <a:pPr algn="ctr"/>
-            <a:r>
-              <a:rPr sz="1000" b="1">
-                <a:solidFill>
-                  <a:srgbClr val="3BA55D"/>
-                </a:solidFill>
-                <a:latin typeface="Calibri"/>
-              </a:rPr>
-              <a:t>3 · OVERSIGHT</a:t>
-            </a:r>
-          </a:p>
-        </p:txBody>
-      </p:sp>
-      <p:sp>
-        <p:nvSpPr>
-          <p:cNvPr id="32" name="TextBox 31"/>
-          <p:cNvSpPr txBox="1"/>
-          <p:nvPr/>
-        </p:nvSpPr>
-        <p:spPr>
-          <a:xfrm>
-            <a:off x="8339327" y="2980944"/>
-            <a:ext cx="3108960" cy="274320"/>
-          </a:xfrm>
-          <a:prstGeom prst="rect">
-            <a:avLst/>
-          </a:prstGeom>
-          <a:noFill/>
-        </p:spPr>
-        <p:txBody>
-          <a:bodyPr wrap="square" lIns="0" rIns="0" tIns="0" bIns="0">
-            <a:spAutoFit/>
-          </a:bodyPr>
-          <a:lstStyle/>
-          <a:p>
-            <a:pPr algn="ctr">
-              <a:spcAft>
-                <a:spcPts val="0"/>
-              </a:spcAft>
-            </a:pPr>
-            <a:r>
-              <a:rPr sz="1300" b="1" i="0">
-                <a:solidFill>
-                  <a:srgbClr val="1A2332"/>
-                </a:solidFill>
-                <a:latin typeface="Calibri"/>
-              </a:rPr>
-              <a:t>FlowAgent</a:t>
-            </a:r>
-          </a:p>
-        </p:txBody>
-      </p:sp>
-      <p:sp>
-        <p:nvSpPr>
-          <p:cNvPr id="33" name="TextBox 32"/>
-          <p:cNvSpPr txBox="1"/>
-          <p:nvPr/>
-        </p:nvSpPr>
-        <p:spPr>
-          <a:xfrm>
-            <a:off x="8357615" y="3401568"/>
-            <a:ext cx="868680" cy="201168"/>
-          </a:xfrm>
-          <a:prstGeom prst="rect">
-            <a:avLst/>
-          </a:prstGeom>
-          <a:noFill/>
-        </p:spPr>
-        <p:txBody>
-          <a:bodyPr wrap="square" lIns="0" rIns="0" tIns="0" bIns="0">
-            <a:spAutoFit/>
-          </a:bodyPr>
-          <a:lstStyle/>
-          <a:p>
-            <a:pPr algn="l">
-              <a:spcAft>
-                <a:spcPts val="0"/>
-              </a:spcAft>
-            </a:pPr>
-            <a:r>
-              <a:rPr sz="900" b="1" i="0">
-                <a:solidFill>
-                  <a:srgbClr val="3BA55D"/>
-                </a:solidFill>
-                <a:latin typeface="Calibri"/>
-              </a:rPr>
-              <a:t>Scope</a:t>
-            </a:r>
-          </a:p>
-        </p:txBody>
-      </p:sp>
-      <p:sp>
-        <p:nvSpPr>
-          <p:cNvPr id="34" name="TextBox 33"/>
-          <p:cNvSpPr txBox="1"/>
-          <p:nvPr/>
-        </p:nvSpPr>
-        <p:spPr>
-          <a:xfrm>
-            <a:off x="9272015" y="3401568"/>
-            <a:ext cx="2194560" cy="457200"/>
-          </a:xfrm>
-          <a:prstGeom prst="rect">
-            <a:avLst/>
-          </a:prstGeom>
-          <a:noFill/>
-        </p:spPr>
-        <p:txBody>
-          <a:bodyPr wrap="square" lIns="0" rIns="0" tIns="0" bIns="0">
-            <a:spAutoFit/>
-          </a:bodyPr>
-          <a:lstStyle/>
-          <a:p>
-            <a:pPr algn="l">
-              <a:spcAft>
-                <a:spcPts val="0"/>
-              </a:spcAft>
-            </a:pPr>
-            <a:r>
-              <a:rPr sz="900" b="0" i="0">
-                <a:solidFill>
-                  <a:srgbClr val="1A2332"/>
-                </a:solidFill>
-                <a:latin typeface="Calibri"/>
-              </a:rPr>
-              <a:t>the whole process</a:t>
-            </a:r>
-          </a:p>
-        </p:txBody>
-      </p:sp>
-      <p:sp>
-        <p:nvSpPr>
-          <p:cNvPr id="35" name="TextBox 34"/>
-          <p:cNvSpPr txBox="1"/>
-          <p:nvPr/>
-        </p:nvSpPr>
-        <p:spPr>
-          <a:xfrm>
-            <a:off x="8357615" y="3639312"/>
-            <a:ext cx="868680" cy="201168"/>
-          </a:xfrm>
-          <a:prstGeom prst="rect">
-            <a:avLst/>
-          </a:prstGeom>
-          <a:noFill/>
-        </p:spPr>
-        <p:txBody>
-          <a:bodyPr wrap="square" lIns="0" rIns="0" tIns="0" bIns="0">
-            <a:spAutoFit/>
-          </a:bodyPr>
-          <a:lstStyle/>
-          <a:p>
-            <a:pPr algn="l">
-              <a:spcAft>
-                <a:spcPts val="0"/>
-              </a:spcAft>
-            </a:pPr>
-            <a:r>
-              <a:rPr sz="900" b="1" i="0">
-                <a:solidFill>
-                  <a:srgbClr val="3BA55D"/>
-                </a:solidFill>
-                <a:latin typeface="Calibri"/>
-              </a:rPr>
-              <a:t>Decides</a:t>
-            </a:r>
-          </a:p>
-        </p:txBody>
-      </p:sp>
-      <p:sp>
-        <p:nvSpPr>
-          <p:cNvPr id="36" name="TextBox 35"/>
-          <p:cNvSpPr txBox="1"/>
-          <p:nvPr/>
-        </p:nvSpPr>
-        <p:spPr>
-          <a:xfrm>
-            <a:off x="9272015" y="3639312"/>
-            <a:ext cx="2194560" cy="457200"/>
-          </a:xfrm>
-          <a:prstGeom prst="rect">
-            <a:avLst/>
-          </a:prstGeom>
-          <a:noFill/>
-        </p:spPr>
-        <p:txBody>
-          <a:bodyPr wrap="square" lIns="0" rIns="0" tIns="0" bIns="0">
-            <a:spAutoFit/>
-          </a:bodyPr>
-          <a:lstStyle/>
-          <a:p>
-            <a:pPr algn="l">
-              <a:spcAft>
-                <a:spcPts val="0"/>
-              </a:spcAft>
-            </a:pPr>
-            <a:r>
-              <a:rPr sz="900" b="0" i="0">
-                <a:solidFill>
-                  <a:srgbClr val="1A2332"/>
-                </a:solidFill>
-                <a:latin typeface="Calibri"/>
-              </a:rPr>
-              <a:t>whether to deviate at all</a:t>
-            </a:r>
-          </a:p>
-        </p:txBody>
-      </p:sp>
-      <p:sp>
-        <p:nvSpPr>
-          <p:cNvPr id="37" name="TextBox 36"/>
-          <p:cNvSpPr txBox="1"/>
-          <p:nvPr/>
-        </p:nvSpPr>
-        <p:spPr>
-          <a:xfrm>
-            <a:off x="8357615" y="3877056"/>
-            <a:ext cx="868680" cy="201168"/>
-          </a:xfrm>
-          <a:prstGeom prst="rect">
-            <a:avLst/>
-          </a:prstGeom>
-          <a:noFill/>
-        </p:spPr>
-        <p:txBody>
-          <a:bodyPr wrap="square" lIns="0" rIns="0" tIns="0" bIns="0">
-            <a:spAutoFit/>
-          </a:bodyPr>
-          <a:lstStyle/>
-          <a:p>
-            <a:pPr algn="l">
-              <a:spcAft>
-                <a:spcPts val="0"/>
-              </a:spcAft>
-            </a:pPr>
-            <a:r>
-              <a:rPr sz="900" b="1" i="0">
-                <a:solidFill>
-                  <a:srgbClr val="3BA55D"/>
-                </a:solidFill>
-                <a:latin typeface="Calibri"/>
-              </a:rPr>
-              <a:t>Bounded by</a:t>
-            </a:r>
-          </a:p>
-        </p:txBody>
-      </p:sp>
-      <p:sp>
-        <p:nvSpPr>
-          <p:cNvPr id="38" name="TextBox 37"/>
-          <p:cNvSpPr txBox="1"/>
-          <p:nvPr/>
-        </p:nvSpPr>
-        <p:spPr>
-          <a:xfrm>
-            <a:off x="9272015" y="3877056"/>
-            <a:ext cx="2194560" cy="457200"/>
-          </a:xfrm>
-          <a:prstGeom prst="rect">
-            <a:avLst/>
-          </a:prstGeom>
-          <a:noFill/>
-        </p:spPr>
-        <p:txBody>
-          <a:bodyPr wrap="square" lIns="0" rIns="0" tIns="0" bIns="0">
-            <a:spAutoFit/>
-          </a:bodyPr>
-          <a:lstStyle/>
-          <a:p>
-            <a:pPr algn="l">
-              <a:spcAft>
-                <a:spcPts val="0"/>
-              </a:spcAft>
-            </a:pPr>
-            <a:r>
-              <a:rPr sz="900" b="0" i="0">
-                <a:solidFill>
-                  <a:srgbClr val="1A2332"/>
-                </a:solidFill>
-                <a:latin typeface="Calibri"/>
-              </a:rPr>
-              <a:t>hook policy, plus per-process</a:t>
-            </a:r>
-          </a:p>
-          <a:p>
-            <a:pPr algn="l">
-              <a:spcAft>
-                <a:spcPts val="0"/>
-              </a:spcAft>
-            </a:pPr>
-            <a:r>
-              <a:rPr sz="900" b="0" i="0">
-                <a:solidFill>
-                  <a:srgbClr val="1A2332"/>
-                </a:solidFill>
-                <a:latin typeface="Calibri"/>
-              </a:rPr>
-              <a:t>action_permissions</a:t>
-            </a:r>
-          </a:p>
-        </p:txBody>
-      </p:sp>
-      <p:sp>
-        <p:nvSpPr>
-          <p:cNvPr id="39" name="TextBox 38"/>
-          <p:cNvSpPr txBox="1"/>
-          <p:nvPr/>
-        </p:nvSpPr>
-        <p:spPr>
-          <a:xfrm>
-            <a:off x="8357615" y="4261104"/>
-            <a:ext cx="868680" cy="201168"/>
-          </a:xfrm>
-          <a:prstGeom prst="rect">
-            <a:avLst/>
-          </a:prstGeom>
-          <a:noFill/>
-        </p:spPr>
-        <p:txBody>
-          <a:bodyPr wrap="square" lIns="0" rIns="0" tIns="0" bIns="0">
-            <a:spAutoFit/>
-          </a:bodyPr>
-          <a:lstStyle/>
-          <a:p>
-            <a:pPr algn="l">
-              <a:spcAft>
-                <a:spcPts val="0"/>
-              </a:spcAft>
-            </a:pPr>
-            <a:r>
-              <a:rPr sz="900" b="1" i="0">
-                <a:solidFill>
-                  <a:srgbClr val="3BA55D"/>
-                </a:solidFill>
-                <a:latin typeface="Calibri"/>
-              </a:rPr>
-              <a:t>Path</a:t>
-            </a:r>
-          </a:p>
-        </p:txBody>
-      </p:sp>
-      <p:sp>
-        <p:nvSpPr>
-          <p:cNvPr id="40" name="TextBox 39"/>
-          <p:cNvSpPr txBox="1"/>
-          <p:nvPr/>
-        </p:nvSpPr>
-        <p:spPr>
-          <a:xfrm>
-            <a:off x="9272015" y="4261104"/>
-            <a:ext cx="2194560" cy="457200"/>
-          </a:xfrm>
-          <a:prstGeom prst="rect">
-            <a:avLst/>
-          </a:prstGeom>
-          <a:noFill/>
-        </p:spPr>
-        <p:txBody>
-          <a:bodyPr wrap="square" lIns="0" rIns="0" tIns="0" bIns="0">
-            <a:spAutoFit/>
-          </a:bodyPr>
-          <a:lstStyle/>
-          <a:p>
-            <a:pPr algn="l">
-              <a:spcAft>
-                <a:spcPts val="0"/>
-              </a:spcAft>
-            </a:pPr>
-            <a:r>
-              <a:rPr sz="900" b="0" i="0">
-                <a:solidFill>
-                  <a:srgbClr val="1A2332"/>
-                </a:solidFill>
-                <a:latin typeface="Calibri"/>
-              </a:rPr>
-              <a:t>may skip, jump, terminate</a:t>
-            </a:r>
-          </a:p>
-          <a:p>
-            <a:pPr algn="l">
-              <a:spcAft>
-                <a:spcPts val="0"/>
-              </a:spcAft>
-            </a:pPr>
-            <a:r>
-              <a:rPr sz="900" b="0" i="0">
-                <a:solidFill>
-                  <a:srgbClr val="1A2332"/>
-                </a:solidFill>
-                <a:latin typeface="Calibri"/>
-              </a:rPr>
-              <a:t>or reshape — at declared</a:t>
-            </a:r>
-          </a:p>
-          <a:p>
-            <a:pPr algn="l">
-              <a:spcAft>
-                <a:spcPts val="0"/>
-              </a:spcAft>
-            </a:pPr>
-            <a:r>
-              <a:rPr sz="900" b="0" i="0">
-                <a:solidFill>
-                  <a:srgbClr val="1A2332"/>
-                </a:solidFill>
-                <a:latin typeface="Calibri"/>
-              </a:rPr>
-              <a:t>hooks only</a:t>
-            </a:r>
-          </a:p>
-        </p:txBody>
-      </p:sp>
-      <p:sp>
-        <p:nvSpPr>
-          <p:cNvPr id="41" name="TextBox 40"/>
-          <p:cNvSpPr txBox="1"/>
-          <p:nvPr/>
-        </p:nvSpPr>
-        <p:spPr>
-          <a:xfrm>
-            <a:off x="566928" y="5138928"/>
-            <a:ext cx="11064240" cy="548640"/>
-          </a:xfrm>
-          <a:prstGeom prst="rect">
-            <a:avLst/>
-          </a:prstGeom>
-          <a:noFill/>
-        </p:spPr>
-        <p:txBody>
-          <a:bodyPr wrap="square" lIns="0" rIns="0" tIns="0" bIns="0">
-            <a:spAutoFit/>
-          </a:bodyPr>
-          <a:lstStyle/>
-          <a:p>
-            <a:pPr algn="l">
-              <a:spcAft>
-                <a:spcPts val="0"/>
-              </a:spcAft>
-            </a:pPr>
-            <a:r>
-              <a:rPr sz="1150" b="0" i="0">
-                <a:solidFill>
-                  <a:srgbClr val="1A2332"/>
-                </a:solidFill>
-                <a:latin typeface="Calibri"/>
-              </a:rPr>
-              <a:t>Only the third layer can leave the nominal path — and only where a hook is declared and the action is permitted. That is the line between an adaptive process and an unpredictable one: autonomy is granted per point, not globally.</a:t>
+              <a:t>Only the top layer can leave the nominal path — and only where a hook is declared and the action is permitted. That is the line between an adaptive process and an unpredictable one: autonomy is granted per point, not globally.</a:t>
             </a:r>
           </a:p>
         </p:txBody>

--- a/docs/diagrams/cuga-flo-overview.pptx
+++ b/docs/diagrams/cuga-flo-overview.pptx
@@ -3260,8 +3260,8 @@
         </p:nvSpPr>
         <p:spPr>
           <a:xfrm>
-            <a:off x="566928" y="2157984"/>
-            <a:ext cx="5394960" cy="274320"/>
+            <a:off x="566928" y="2286000"/>
+            <a:ext cx="11064240" cy="274320"/>
           </a:xfrm>
           <a:prstGeom prst="rect">
             <a:avLst/>
@@ -3299,8 +3299,8 @@
         </p:nvSpPr>
         <p:spPr>
           <a:xfrm>
-            <a:off x="566928" y="2468880"/>
-            <a:ext cx="2606040" cy="841248"/>
+            <a:off x="566928" y="2596896"/>
+            <a:ext cx="5394960" cy="1005840"/>
           </a:xfrm>
           <a:prstGeom prst="roundRect">
             <a:avLst>
@@ -3337,7 +3337,7 @@
           <a:p>
             <a:pPr algn="ctr"/>
             <a:r>
-              <a:rPr sz="1250" b="1">
+              <a:rPr sz="1400" b="1">
                 <a:solidFill>
                   <a:srgbClr val="1A2332"/>
                 </a:solidFill>
@@ -3349,13 +3349,13 @@
           <a:p>
             <a:pPr algn="ctr"/>
             <a:r>
-              <a:rPr sz="950">
+              <a:rPr sz="1000">
                 <a:solidFill>
                   <a:srgbClr val="667085"/>
                 </a:solidFill>
                 <a:latin typeface="Calibri"/>
               </a:rPr>
-              <a:t>conformance, but rigid</a:t>
+              <a:t>structural conformance — but rigid at runtime</a:t>
             </a:r>
           </a:p>
         </p:txBody>
@@ -3368,8 +3368,8 @@
         </p:nvSpPr>
         <p:spPr>
           <a:xfrm>
-            <a:off x="3355848" y="2468880"/>
-            <a:ext cx="2606040" cy="841248"/>
+            <a:off x="6236208" y="2596896"/>
+            <a:ext cx="5394960" cy="1005840"/>
           </a:xfrm>
           <a:prstGeom prst="roundRect">
             <a:avLst>
@@ -3406,7 +3406,7 @@
           <a:p>
             <a:pPr algn="ctr"/>
             <a:r>
-              <a:rPr sz="1250" b="1">
+              <a:rPr sz="1400" b="1">
                 <a:solidFill>
                   <a:srgbClr val="1A2332"/>
                 </a:solidFill>
@@ -3418,13 +3418,13 @@
           <a:p>
             <a:pPr algn="ctr"/>
             <a:r>
-              <a:rPr sz="950">
+              <a:rPr sz="1000">
                 <a:solidFill>
                   <a:srgbClr val="667085"/>
                 </a:solidFill>
                 <a:latin typeface="Calibri"/>
               </a:rPr>
-              <a:t>adaptive, no guarantees</a:t>
+              <a:t>adaptive — but no conformance guarantees</a:t>
             </a:r>
           </a:p>
         </p:txBody>
@@ -3437,8 +3437,8 @@
         </p:nvSpPr>
         <p:spPr>
           <a:xfrm>
-            <a:off x="3072384" y="3456432"/>
-            <a:ext cx="365760" cy="310896"/>
+            <a:off x="5916168" y="3749039"/>
+            <a:ext cx="365760" cy="365760"/>
           </a:xfrm>
           <a:prstGeom prst="downArrow">
             <a:avLst/>
@@ -3481,8 +3481,8 @@
         </p:nvSpPr>
         <p:spPr>
           <a:xfrm>
-            <a:off x="566928" y="3913632"/>
-            <a:ext cx="5394960" cy="841248"/>
+            <a:off x="566928" y="4261104"/>
+            <a:ext cx="11064240" cy="1051560"/>
           </a:xfrm>
           <a:prstGeom prst="roundRect">
             <a:avLst>
@@ -3519,7 +3519,7 @@
           <a:p>
             <a:pPr algn="ctr"/>
             <a:r>
-              <a:rPr sz="1250" b="1">
+              <a:rPr sz="1600" b="1">
                 <a:solidFill>
                   <a:srgbClr val="1A2332"/>
                 </a:solidFill>
@@ -3531,13 +3531,13 @@
           <a:p>
             <a:pPr algn="ctr"/>
             <a:r>
-              <a:rPr sz="950">
+              <a:rPr sz="1000">
                 <a:solidFill>
                   <a:srgbClr val="667085"/>
                 </a:solidFill>
                 <a:latin typeface="Calibri"/>
               </a:rPr>
-              <a:t>structure enforced · adaptation policy-bounded · every deviation audited</a:t>
+              <a:t>structure enforced  ·  adaptation policy-bounded  ·  every deviation recorded</a:t>
             </a:r>
           </a:p>
         </p:txBody>
@@ -3550,8 +3550,8 @@
         </p:nvSpPr>
         <p:spPr>
           <a:xfrm>
-            <a:off x="6236208" y="2157984"/>
-            <a:ext cx="5394960" cy="274320"/>
+            <a:off x="566928" y="5614416"/>
+            <a:ext cx="11064240" cy="274320"/>
           </a:xfrm>
           <a:prstGeom prst="rect">
             <a:avLst/>
@@ -3576,485 +3576,20 @@
                 </a:solidFill>
                 <a:latin typeface="Calibri"/>
               </a:rPr>
-              <a:t>THREE REASONING LAYERS</a:t>
-            </a:r>
-          </a:p>
-        </p:txBody>
-      </p:sp>
-      <p:sp>
-        <p:nvSpPr>
-          <p:cNvPr id="12" name="Rounded Rectangle 11"/>
-          <p:cNvSpPr/>
-          <p:nvPr/>
-        </p:nvSpPr>
-        <p:spPr>
-          <a:xfrm>
-            <a:off x="6236208" y="2468880"/>
-            <a:ext cx="5394960" cy="731520"/>
-          </a:xfrm>
-          <a:prstGeom prst="roundRect">
-            <a:avLst>
-              <a:gd name="adj" fmla="val 5000"/>
-            </a:avLst>
-          </a:prstGeom>
-          <a:solidFill>
-            <a:srgbClr val="FFFFFF"/>
-          </a:solidFill>
-          <a:ln w="15875">
-            <a:solidFill>
-              <a:srgbClr val="D8DEE6"/>
-            </a:solidFill>
-          </a:ln>
-          <a:effectLst/>
-        </p:spPr>
-        <p:style>
-          <a:lnRef idx="1">
-            <a:schemeClr val="accent1"/>
-          </a:lnRef>
-          <a:fillRef idx="3">
-            <a:schemeClr val="accent1"/>
-          </a:fillRef>
-          <a:effectRef idx="2">
-            <a:schemeClr val="accent1"/>
-          </a:effectRef>
-          <a:fontRef idx="minor">
-            <a:schemeClr val="lt1"/>
-          </a:fontRef>
-        </p:style>
-        <p:txBody>
-          <a:bodyPr rtlCol="0" anchor="ctr"/>
-          <a:lstStyle/>
-          <a:p>
-            <a:pPr algn="ctr"/>
-          </a:p>
-        </p:txBody>
-      </p:sp>
-      <p:sp>
-        <p:nvSpPr>
-          <p:cNvPr id="13" name="TextBox 12"/>
+              <a:t>WHERE IT FITS</a:t>
+            </a:r>
+          </a:p>
+        </p:txBody>
+      </p:sp>
+      <p:sp>
+        <p:nvSpPr>
+          <p:cNvPr id="12" name="TextBox 11"/>
           <p:cNvSpPr txBox="1"/>
           <p:nvPr/>
         </p:nvSpPr>
         <p:spPr>
           <a:xfrm>
-            <a:off x="6455664" y="2587752"/>
-            <a:ext cx="1463040" cy="219456"/>
-          </a:xfrm>
-          <a:prstGeom prst="rect">
-            <a:avLst/>
-          </a:prstGeom>
-          <a:noFill/>
-        </p:spPr>
-        <p:txBody>
-          <a:bodyPr wrap="square" lIns="0" rIns="0" tIns="0" bIns="0">
-            <a:spAutoFit/>
-          </a:bodyPr>
-          <a:lstStyle/>
-          <a:p>
-            <a:pPr algn="l">
-              <a:spcAft>
-                <a:spcPts val="0"/>
-              </a:spcAft>
-            </a:pPr>
-            <a:r>
-              <a:rPr sz="1100" b="1">
-                <a:solidFill>
-                  <a:srgbClr val="3B7DD8"/>
-                </a:solidFill>
-                <a:latin typeface="Calibri"/>
-              </a:rPr>
-              <a:t>FlowAgent</a:t>
-            </a:r>
-          </a:p>
-        </p:txBody>
-      </p:sp>
-      <p:sp>
-        <p:nvSpPr>
-          <p:cNvPr id="14" name="TextBox 13"/>
-          <p:cNvSpPr txBox="1"/>
-          <p:nvPr/>
-        </p:nvSpPr>
-        <p:spPr>
-          <a:xfrm>
-            <a:off x="6455664" y="2816352"/>
-            <a:ext cx="4937760" cy="365760"/>
-          </a:xfrm>
-          <a:prstGeom prst="rect">
-            <a:avLst/>
-          </a:prstGeom>
-          <a:noFill/>
-        </p:spPr>
-        <p:txBody>
-          <a:bodyPr wrap="square" lIns="0" rIns="0" tIns="0" bIns="0">
-            <a:spAutoFit/>
-          </a:bodyPr>
-          <a:lstStyle/>
-          <a:p>
-            <a:pPr algn="l">
-              <a:spcAft>
-                <a:spcPts val="0"/>
-              </a:spcAft>
-            </a:pPr>
-            <a:r>
-              <a:rPr sz="900" b="0">
-                <a:solidFill>
-                  <a:srgbClr val="667085"/>
-                </a:solidFill>
-                <a:latin typeface="Calibri"/>
-              </a:rPr>
-              <a:t>the process as a whole — at hooks it may skip, jump,</a:t>
-            </a:r>
-          </a:p>
-          <a:p>
-            <a:pPr algn="l">
-              <a:spcAft>
-                <a:spcPts val="0"/>
-              </a:spcAft>
-            </a:pPr>
-            <a:r>
-              <a:rPr sz="900" b="0">
-                <a:solidFill>
-                  <a:srgbClr val="667085"/>
-                </a:solidFill>
-                <a:latin typeface="Calibri"/>
-              </a:rPr>
-              <a:t>terminate or reshape the flow, against a hook policy</a:t>
-            </a:r>
-          </a:p>
-        </p:txBody>
-      </p:sp>
-      <p:sp>
-        <p:nvSpPr>
-          <p:cNvPr id="15" name="Rounded Rectangle 14"/>
-          <p:cNvSpPr/>
-          <p:nvPr/>
-        </p:nvSpPr>
-        <p:spPr>
-          <a:xfrm>
-            <a:off x="6236208" y="3291840"/>
-            <a:ext cx="5394960" cy="731520"/>
-          </a:xfrm>
-          <a:prstGeom prst="roundRect">
-            <a:avLst>
-              <a:gd name="adj" fmla="val 5000"/>
-            </a:avLst>
-          </a:prstGeom>
-          <a:solidFill>
-            <a:srgbClr val="FFFFFF"/>
-          </a:solidFill>
-          <a:ln w="15875">
-            <a:solidFill>
-              <a:srgbClr val="D8DEE6"/>
-            </a:solidFill>
-          </a:ln>
-          <a:effectLst/>
-        </p:spPr>
-        <p:style>
-          <a:lnRef idx="1">
-            <a:schemeClr val="accent1"/>
-          </a:lnRef>
-          <a:fillRef idx="3">
-            <a:schemeClr val="accent1"/>
-          </a:fillRef>
-          <a:effectRef idx="2">
-            <a:schemeClr val="accent1"/>
-          </a:effectRef>
-          <a:fontRef idx="minor">
-            <a:schemeClr val="lt1"/>
-          </a:fontRef>
-        </p:style>
-        <p:txBody>
-          <a:bodyPr rtlCol="0" anchor="ctr"/>
-          <a:lstStyle/>
-          <a:p>
-            <a:pPr algn="ctr"/>
-          </a:p>
-        </p:txBody>
-      </p:sp>
-      <p:sp>
-        <p:nvSpPr>
-          <p:cNvPr id="16" name="TextBox 15"/>
-          <p:cNvSpPr txBox="1"/>
-          <p:nvPr/>
-        </p:nvSpPr>
-        <p:spPr>
-          <a:xfrm>
-            <a:off x="6455664" y="3410712"/>
-            <a:ext cx="1463040" cy="219456"/>
-          </a:xfrm>
-          <a:prstGeom prst="rect">
-            <a:avLst/>
-          </a:prstGeom>
-          <a:noFill/>
-        </p:spPr>
-        <p:txBody>
-          <a:bodyPr wrap="square" lIns="0" rIns="0" tIns="0" bIns="0">
-            <a:spAutoFit/>
-          </a:bodyPr>
-          <a:lstStyle/>
-          <a:p>
-            <a:pPr algn="l">
-              <a:spcAft>
-                <a:spcPts val="0"/>
-              </a:spcAft>
-            </a:pPr>
-            <a:r>
-              <a:rPr sz="1100" b="1">
-                <a:solidFill>
-                  <a:srgbClr val="3B7DD8"/>
-                </a:solidFill>
-                <a:latin typeface="Calibri"/>
-              </a:rPr>
-              <a:t>DecisionAgent</a:t>
-            </a:r>
-          </a:p>
-        </p:txBody>
-      </p:sp>
-      <p:sp>
-        <p:nvSpPr>
-          <p:cNvPr id="17" name="TextBox 16"/>
-          <p:cNvSpPr txBox="1"/>
-          <p:nvPr/>
-        </p:nvSpPr>
-        <p:spPr>
-          <a:xfrm>
-            <a:off x="6455664" y="3639312"/>
-            <a:ext cx="4937760" cy="365760"/>
-          </a:xfrm>
-          <a:prstGeom prst="rect">
-            <a:avLst/>
-          </a:prstGeom>
-          <a:noFill/>
-        </p:spPr>
-        <p:txBody>
-          <a:bodyPr wrap="square" lIns="0" rIns="0" tIns="0" bIns="0">
-            <a:spAutoFit/>
-          </a:bodyPr>
-          <a:lstStyle/>
-          <a:p>
-            <a:pPr algn="l">
-              <a:spcAft>
-                <a:spcPts val="0"/>
-              </a:spcAft>
-            </a:pPr>
-            <a:r>
-              <a:rPr sz="900" b="0">
-                <a:solidFill>
-                  <a:srgbClr val="667085"/>
-                </a:solidFill>
-                <a:latin typeface="Calibri"/>
-              </a:rPr>
-              <a:t>one gateway — condition evaluated first, LLM only when</a:t>
-            </a:r>
-          </a:p>
-          <a:p>
-            <a:pPr algn="l">
-              <a:spcAft>
-                <a:spcPts val="0"/>
-              </a:spcAft>
-            </a:pPr>
-            <a:r>
-              <a:rPr sz="900" b="0">
-                <a:solidFill>
-                  <a:srgbClr val="667085"/>
-                </a:solidFill>
-                <a:latin typeface="Calibri"/>
-              </a:rPr>
-              <a:t>the result is inconclusive; selects exactly one branch</a:t>
-            </a:r>
-          </a:p>
-        </p:txBody>
-      </p:sp>
-      <p:sp>
-        <p:nvSpPr>
-          <p:cNvPr id="18" name="Rounded Rectangle 17"/>
-          <p:cNvSpPr/>
-          <p:nvPr/>
-        </p:nvSpPr>
-        <p:spPr>
-          <a:xfrm>
-            <a:off x="6236208" y="4114800"/>
-            <a:ext cx="5394960" cy="731520"/>
-          </a:xfrm>
-          <a:prstGeom prst="roundRect">
-            <a:avLst>
-              <a:gd name="adj" fmla="val 5000"/>
-            </a:avLst>
-          </a:prstGeom>
-          <a:solidFill>
-            <a:srgbClr val="FFFFFF"/>
-          </a:solidFill>
-          <a:ln w="15875">
-            <a:solidFill>
-              <a:srgbClr val="D8DEE6"/>
-            </a:solidFill>
-          </a:ln>
-          <a:effectLst/>
-        </p:spPr>
-        <p:style>
-          <a:lnRef idx="1">
-            <a:schemeClr val="accent1"/>
-          </a:lnRef>
-          <a:fillRef idx="3">
-            <a:schemeClr val="accent1"/>
-          </a:fillRef>
-          <a:effectRef idx="2">
-            <a:schemeClr val="accent1"/>
-          </a:effectRef>
-          <a:fontRef idx="minor">
-            <a:schemeClr val="lt1"/>
-          </a:fontRef>
-        </p:style>
-        <p:txBody>
-          <a:bodyPr rtlCol="0" anchor="ctr"/>
-          <a:lstStyle/>
-          <a:p>
-            <a:pPr algn="ctr"/>
-          </a:p>
-        </p:txBody>
-      </p:sp>
-      <p:sp>
-        <p:nvSpPr>
-          <p:cNvPr id="19" name="TextBox 18"/>
-          <p:cNvSpPr txBox="1"/>
-          <p:nvPr/>
-        </p:nvSpPr>
-        <p:spPr>
-          <a:xfrm>
-            <a:off x="6455664" y="4233672"/>
-            <a:ext cx="1463040" cy="219456"/>
-          </a:xfrm>
-          <a:prstGeom prst="rect">
-            <a:avLst/>
-          </a:prstGeom>
-          <a:noFill/>
-        </p:spPr>
-        <p:txBody>
-          <a:bodyPr wrap="square" lIns="0" rIns="0" tIns="0" bIns="0">
-            <a:spAutoFit/>
-          </a:bodyPr>
-          <a:lstStyle/>
-          <a:p>
-            <a:pPr algn="l">
-              <a:spcAft>
-                <a:spcPts val="0"/>
-              </a:spcAft>
-            </a:pPr>
-            <a:r>
-              <a:rPr sz="1100" b="1">
-                <a:solidFill>
-                  <a:srgbClr val="3B7DD8"/>
-                </a:solidFill>
-                <a:latin typeface="Calibri"/>
-              </a:rPr>
-              <a:t>TaskAgent</a:t>
-            </a:r>
-          </a:p>
-        </p:txBody>
-      </p:sp>
-      <p:sp>
-        <p:nvSpPr>
-          <p:cNvPr id="20" name="TextBox 19"/>
-          <p:cNvSpPr txBox="1"/>
-          <p:nvPr/>
-        </p:nvSpPr>
-        <p:spPr>
-          <a:xfrm>
-            <a:off x="6455664" y="4462272"/>
-            <a:ext cx="4937760" cy="365760"/>
-          </a:xfrm>
-          <a:prstGeom prst="rect">
-            <a:avLst/>
-          </a:prstGeom>
-          <a:noFill/>
-        </p:spPr>
-        <p:txBody>
-          <a:bodyPr wrap="square" lIns="0" rIns="0" tIns="0" bIns="0">
-            <a:spAutoFit/>
-          </a:bodyPr>
-          <a:lstStyle/>
-          <a:p>
-            <a:pPr algn="l">
-              <a:spcAft>
-                <a:spcPts val="0"/>
-              </a:spcAft>
-            </a:pPr>
-            <a:r>
-              <a:rPr sz="900" b="0">
-                <a:solidFill>
-                  <a:srgbClr val="667085"/>
-                </a:solidFill>
-                <a:latin typeface="Calibri"/>
-              </a:rPr>
-              <a:t>one task — executes against the task policy and writes</a:t>
-            </a:r>
-          </a:p>
-          <a:p>
-            <a:pPr algn="l">
-              <a:spcAft>
-                <a:spcPts val="0"/>
-              </a:spcAft>
-            </a:pPr>
-            <a:r>
-              <a:rPr sz="900" b="0">
-                <a:solidFill>
-                  <a:srgbClr val="667085"/>
-                </a:solidFill>
-                <a:latin typeface="Calibri"/>
-              </a:rPr>
-              <a:t>results into the shared process variables</a:t>
-            </a:r>
-          </a:p>
-        </p:txBody>
-      </p:sp>
-      <p:sp>
-        <p:nvSpPr>
-          <p:cNvPr id="21" name="TextBox 20"/>
-          <p:cNvSpPr txBox="1"/>
-          <p:nvPr/>
-        </p:nvSpPr>
-        <p:spPr>
-          <a:xfrm>
-            <a:off x="566928" y="5029200"/>
-            <a:ext cx="11064240" cy="274320"/>
-          </a:xfrm>
-          <a:prstGeom prst="rect">
-            <a:avLst/>
-          </a:prstGeom>
-          <a:noFill/>
-        </p:spPr>
-        <p:txBody>
-          <a:bodyPr wrap="square" lIns="0" rIns="0" tIns="0" bIns="0">
-            <a:spAutoFit/>
-          </a:bodyPr>
-          <a:lstStyle/>
-          <a:p>
-            <a:pPr algn="l">
-              <a:spcAft>
-                <a:spcPts val="0"/>
-              </a:spcAft>
-            </a:pPr>
-            <a:r>
-              <a:rPr sz="1000" b="1">
-                <a:solidFill>
-                  <a:srgbClr val="667085"/>
-                </a:solidFill>
-                <a:latin typeface="Calibri"/>
-              </a:rPr>
-              <a:t>WHERE IT FITS</a:t>
-            </a:r>
-          </a:p>
-        </p:txBody>
-      </p:sp>
-      <p:sp>
-        <p:nvSpPr>
-          <p:cNvPr id="22" name="TextBox 21"/>
-          <p:cNvSpPr txBox="1"/>
-          <p:nvPr/>
-        </p:nvSpPr>
-        <p:spPr>
-          <a:xfrm>
-            <a:off x="566928" y="5340096"/>
+            <a:off x="566928" y="5925312"/>
             <a:ext cx="11064240" cy="640080"/>
           </a:xfrm>
           <a:prstGeom prst="rect">
@@ -4322,7 +3857,7 @@
           <a:p>
             <a:pPr algn="ctr"/>
             <a:r>
-              <a:rPr sz="950">
+              <a:rPr sz="1000">
                 <a:solidFill>
                   <a:srgbClr val="667085"/>
                 </a:solidFill>
@@ -4392,7 +3927,7 @@
           <a:p>
             <a:pPr algn="ctr"/>
             <a:r>
-              <a:rPr sz="950">
+              <a:rPr sz="1000">
                 <a:solidFill>
                   <a:srgbClr val="667085"/>
                 </a:solidFill>

--- a/docs/diagrams/cuga-flo-overview.pptx
+++ b/docs/diagrams/cuga-flo-overview.pptx
@@ -5,12 +5,12 @@
     <p:sldMasterId id="2147483648" r:id="rId1"/>
   </p:sldMasterIdLst>
   <p:sldIdLst>
-    <p:sldId id="256" r:id="rId7"/>
-    <p:sldId id="257" r:id="rId8"/>
-    <p:sldId id="258" r:id="rId9"/>
-    <p:sldId id="259" r:id="rId10"/>
+    <p:sldId id="256" r:id="rId2"/>
+    <p:sldId id="257" r:id="rId3"/>
+    <p:sldId id="258" r:id="rId4"/>
+    <p:sldId id="259" r:id="rId5"/>
   </p:sldIdLst>
-  <p:sldSz cx="12191695" cy="6858000" type="screen4x3"/>
+  <p:sldSz cx="12192000" cy="6858000"/>
   <p:notesSz cx="6858000" cy="9144000"/>
   <p:defaultTextStyle>
     <a:defPPr>
@@ -107,6 +107,22 @@
       </a:defRPr>
     </a:lvl9pPr>
   </p:defaultTextStyle>
+  <p:extLst>
+    <p:ext uri="{EFAFB233-063F-42B5-8137-9DF3F51BA10A}">
+      <p15:sldGuideLst xmlns:p15="http://schemas.microsoft.com/office/powerpoint/2012/main">
+        <p15:guide id="1" orient="horz" pos="2160">
+          <p15:clr>
+            <a:srgbClr val="A4A3A4"/>
+          </p15:clr>
+        </p15:guide>
+        <p15:guide id="2" pos="2880">
+          <p15:clr>
+            <a:srgbClr val="A4A3A4"/>
+          </p15:clr>
+        </p15:guide>
+      </p15:sldGuideLst>
+    </p:ext>
+  </p:extLst>
 </p:presentation>
 </file>
 
@@ -148,10 +164,9 @@
           <a:lstStyle/>
           <a:p>
             <a:r>
-              <a:rPr lang="en-US" smtClean="0"/>
+              <a:rPr lang="en-US"/>
               <a:t>Click to edit Master title style</a:t>
             </a:r>
-            <a:endParaRPr lang="en-US"/>
           </a:p>
         </p:txBody>
       </p:sp>
@@ -267,10 +282,9 @@
           </a:lstStyle>
           <a:p>
             <a:r>
-              <a:rPr lang="en-US" smtClean="0"/>
+              <a:rPr lang="en-US"/>
               <a:t>Click to edit Master subtitle style</a:t>
             </a:r>
-            <a:endParaRPr lang="en-US"/>
           </a:p>
         </p:txBody>
       </p:sp>
@@ -291,7 +305,7 @@
           <a:p>
             <a:fld id="{5BCAD085-E8A6-8845-BD4E-CB4CCA059FC4}" type="datetimeFigureOut">
               <a:rPr lang="en-US" smtClean="0"/>
-              <a:t>1/27/13</a:t>
+              <a:t>8/12/26</a:t>
             </a:fld>
             <a:endParaRPr lang="en-US"/>
           </a:p>
@@ -385,10 +399,9 @@
           <a:lstStyle/>
           <a:p>
             <a:r>
-              <a:rPr lang="en-US" smtClean="0"/>
+              <a:rPr lang="en-US"/>
               <a:t>Click to edit Master title style</a:t>
             </a:r>
-            <a:endParaRPr lang="en-US"/>
           </a:p>
         </p:txBody>
       </p:sp>
@@ -409,38 +422,37 @@
           <a:p>
             <a:pPr lvl="0"/>
             <a:r>
-              <a:rPr lang="en-US" smtClean="0"/>
+              <a:rPr lang="en-US"/>
               <a:t>Click to edit Master text styles</a:t>
             </a:r>
           </a:p>
           <a:p>
             <a:pPr lvl="1"/>
             <a:r>
-              <a:rPr lang="en-US" smtClean="0"/>
+              <a:rPr lang="en-US"/>
               <a:t>Second level</a:t>
             </a:r>
           </a:p>
           <a:p>
             <a:pPr lvl="2"/>
             <a:r>
-              <a:rPr lang="en-US" smtClean="0"/>
+              <a:rPr lang="en-US"/>
               <a:t>Third level</a:t>
             </a:r>
           </a:p>
           <a:p>
             <a:pPr lvl="3"/>
             <a:r>
-              <a:rPr lang="en-US" smtClean="0"/>
+              <a:rPr lang="en-US"/>
               <a:t>Fourth level</a:t>
             </a:r>
           </a:p>
           <a:p>
             <a:pPr lvl="4"/>
             <a:r>
-              <a:rPr lang="en-US" smtClean="0"/>
+              <a:rPr lang="en-US"/>
               <a:t>Fifth level</a:t>
             </a:r>
-            <a:endParaRPr lang="en-US"/>
           </a:p>
         </p:txBody>
       </p:sp>
@@ -461,7 +473,7 @@
           <a:p>
             <a:fld id="{5BCAD085-E8A6-8845-BD4E-CB4CCA059FC4}" type="datetimeFigureOut">
               <a:rPr lang="en-US" smtClean="0"/>
-              <a:t>1/27/13</a:t>
+              <a:t>8/12/26</a:t>
             </a:fld>
             <a:endParaRPr lang="en-US"/>
           </a:p>
@@ -560,10 +572,9 @@
           <a:lstStyle/>
           <a:p>
             <a:r>
-              <a:rPr lang="en-US" smtClean="0"/>
+              <a:rPr lang="en-US"/>
               <a:t>Click to edit Master title style</a:t>
             </a:r>
-            <a:endParaRPr lang="en-US"/>
           </a:p>
         </p:txBody>
       </p:sp>
@@ -589,38 +600,37 @@
           <a:p>
             <a:pPr lvl="0"/>
             <a:r>
-              <a:rPr lang="en-US" smtClean="0"/>
+              <a:rPr lang="en-US"/>
               <a:t>Click to edit Master text styles</a:t>
             </a:r>
           </a:p>
           <a:p>
             <a:pPr lvl="1"/>
             <a:r>
-              <a:rPr lang="en-US" smtClean="0"/>
+              <a:rPr lang="en-US"/>
               <a:t>Second level</a:t>
             </a:r>
           </a:p>
           <a:p>
             <a:pPr lvl="2"/>
             <a:r>
-              <a:rPr lang="en-US" smtClean="0"/>
+              <a:rPr lang="en-US"/>
               <a:t>Third level</a:t>
             </a:r>
           </a:p>
           <a:p>
             <a:pPr lvl="3"/>
             <a:r>
-              <a:rPr lang="en-US" smtClean="0"/>
+              <a:rPr lang="en-US"/>
               <a:t>Fourth level</a:t>
             </a:r>
           </a:p>
           <a:p>
             <a:pPr lvl="4"/>
             <a:r>
-              <a:rPr lang="en-US" smtClean="0"/>
+              <a:rPr lang="en-US"/>
               <a:t>Fifth level</a:t>
             </a:r>
-            <a:endParaRPr lang="en-US"/>
           </a:p>
         </p:txBody>
       </p:sp>
@@ -641,7 +651,7 @@
           <a:p>
             <a:fld id="{5BCAD085-E8A6-8845-BD4E-CB4CCA059FC4}" type="datetimeFigureOut">
               <a:rPr lang="en-US" smtClean="0"/>
-              <a:t>1/27/13</a:t>
+              <a:t>8/12/26</a:t>
             </a:fld>
             <a:endParaRPr lang="en-US"/>
           </a:p>
@@ -735,10 +745,9 @@
           <a:lstStyle/>
           <a:p>
             <a:r>
-              <a:rPr lang="en-US" smtClean="0"/>
+              <a:rPr lang="en-US"/>
               <a:t>Click to edit Master title style</a:t>
             </a:r>
-            <a:endParaRPr lang="en-US"/>
           </a:p>
         </p:txBody>
       </p:sp>
@@ -759,38 +768,37 @@
           <a:p>
             <a:pPr lvl="0"/>
             <a:r>
-              <a:rPr lang="en-US" smtClean="0"/>
+              <a:rPr lang="en-US"/>
               <a:t>Click to edit Master text styles</a:t>
             </a:r>
           </a:p>
           <a:p>
             <a:pPr lvl="1"/>
             <a:r>
-              <a:rPr lang="en-US" smtClean="0"/>
+              <a:rPr lang="en-US"/>
               <a:t>Second level</a:t>
             </a:r>
           </a:p>
           <a:p>
             <a:pPr lvl="2"/>
             <a:r>
-              <a:rPr lang="en-US" smtClean="0"/>
+              <a:rPr lang="en-US"/>
               <a:t>Third level</a:t>
             </a:r>
           </a:p>
           <a:p>
             <a:pPr lvl="3"/>
             <a:r>
-              <a:rPr lang="en-US" smtClean="0"/>
+              <a:rPr lang="en-US"/>
               <a:t>Fourth level</a:t>
             </a:r>
           </a:p>
           <a:p>
             <a:pPr lvl="4"/>
             <a:r>
-              <a:rPr lang="en-US" smtClean="0"/>
+              <a:rPr lang="en-US"/>
               <a:t>Fifth level</a:t>
             </a:r>
-            <a:endParaRPr lang="en-US"/>
           </a:p>
         </p:txBody>
       </p:sp>
@@ -811,7 +819,7 @@
           <a:p>
             <a:fld id="{5BCAD085-E8A6-8845-BD4E-CB4CCA059FC4}" type="datetimeFigureOut">
               <a:rPr lang="en-US" smtClean="0"/>
-              <a:t>1/27/13</a:t>
+              <a:t>8/12/26</a:t>
             </a:fld>
             <a:endParaRPr lang="en-US"/>
           </a:p>
@@ -914,10 +922,9 @@
           </a:lstStyle>
           <a:p>
             <a:r>
-              <a:rPr lang="en-US" smtClean="0"/>
+              <a:rPr lang="en-US"/>
               <a:t>Click to edit Master title style</a:t>
             </a:r>
-            <a:endParaRPr lang="en-US"/>
           </a:p>
         </p:txBody>
       </p:sp>
@@ -1034,7 +1041,7 @@
           <a:p>
             <a:pPr lvl="0"/>
             <a:r>
-              <a:rPr lang="en-US" smtClean="0"/>
+              <a:rPr lang="en-US"/>
               <a:t>Click to edit Master text styles</a:t>
             </a:r>
           </a:p>
@@ -1057,7 +1064,7 @@
           <a:p>
             <a:fld id="{5BCAD085-E8A6-8845-BD4E-CB4CCA059FC4}" type="datetimeFigureOut">
               <a:rPr lang="en-US" smtClean="0"/>
-              <a:t>1/27/13</a:t>
+              <a:t>8/12/26</a:t>
             </a:fld>
             <a:endParaRPr lang="en-US"/>
           </a:p>
@@ -1151,10 +1158,9 @@
           <a:lstStyle/>
           <a:p>
             <a:r>
-              <a:rPr lang="en-US" smtClean="0"/>
+              <a:rPr lang="en-US"/>
               <a:t>Click to edit Master title style</a:t>
             </a:r>
-            <a:endParaRPr lang="en-US"/>
           </a:p>
         </p:txBody>
       </p:sp>
@@ -1208,38 +1214,37 @@
           <a:p>
             <a:pPr lvl="0"/>
             <a:r>
-              <a:rPr lang="en-US" smtClean="0"/>
+              <a:rPr lang="en-US"/>
               <a:t>Click to edit Master text styles</a:t>
             </a:r>
           </a:p>
           <a:p>
             <a:pPr lvl="1"/>
             <a:r>
-              <a:rPr lang="en-US" smtClean="0"/>
+              <a:rPr lang="en-US"/>
               <a:t>Second level</a:t>
             </a:r>
           </a:p>
           <a:p>
             <a:pPr lvl="2"/>
             <a:r>
-              <a:rPr lang="en-US" smtClean="0"/>
+              <a:rPr lang="en-US"/>
               <a:t>Third level</a:t>
             </a:r>
           </a:p>
           <a:p>
             <a:pPr lvl="3"/>
             <a:r>
-              <a:rPr lang="en-US" smtClean="0"/>
+              <a:rPr lang="en-US"/>
               <a:t>Fourth level</a:t>
             </a:r>
           </a:p>
           <a:p>
             <a:pPr lvl="4"/>
             <a:r>
-              <a:rPr lang="en-US" smtClean="0"/>
+              <a:rPr lang="en-US"/>
               <a:t>Fifth level</a:t>
             </a:r>
-            <a:endParaRPr lang="en-US"/>
           </a:p>
         </p:txBody>
       </p:sp>
@@ -1293,38 +1298,37 @@
           <a:p>
             <a:pPr lvl="0"/>
             <a:r>
-              <a:rPr lang="en-US" smtClean="0"/>
+              <a:rPr lang="en-US"/>
               <a:t>Click to edit Master text styles</a:t>
             </a:r>
           </a:p>
           <a:p>
             <a:pPr lvl="1"/>
             <a:r>
-              <a:rPr lang="en-US" smtClean="0"/>
+              <a:rPr lang="en-US"/>
               <a:t>Second level</a:t>
             </a:r>
           </a:p>
           <a:p>
             <a:pPr lvl="2"/>
             <a:r>
-              <a:rPr lang="en-US" smtClean="0"/>
+              <a:rPr lang="en-US"/>
               <a:t>Third level</a:t>
             </a:r>
           </a:p>
           <a:p>
             <a:pPr lvl="3"/>
             <a:r>
-              <a:rPr lang="en-US" smtClean="0"/>
+              <a:rPr lang="en-US"/>
               <a:t>Fourth level</a:t>
             </a:r>
           </a:p>
           <a:p>
             <a:pPr lvl="4"/>
             <a:r>
-              <a:rPr lang="en-US" smtClean="0"/>
+              <a:rPr lang="en-US"/>
               <a:t>Fifth level</a:t>
             </a:r>
-            <a:endParaRPr lang="en-US"/>
           </a:p>
         </p:txBody>
       </p:sp>
@@ -1345,7 +1349,7 @@
           <a:p>
             <a:fld id="{5BCAD085-E8A6-8845-BD4E-CB4CCA059FC4}" type="datetimeFigureOut">
               <a:rPr lang="en-US" smtClean="0"/>
-              <a:t>1/27/13</a:t>
+              <a:t>8/12/26</a:t>
             </a:fld>
             <a:endParaRPr lang="en-US"/>
           </a:p>
@@ -1443,10 +1447,9 @@
           </a:lstStyle>
           <a:p>
             <a:r>
-              <a:rPr lang="en-US" smtClean="0"/>
+              <a:rPr lang="en-US"/>
               <a:t>Click to edit Master title style</a:t>
             </a:r>
-            <a:endParaRPr lang="en-US"/>
           </a:p>
         </p:txBody>
       </p:sp>
@@ -1509,7 +1512,7 @@
           <a:p>
             <a:pPr lvl="0"/>
             <a:r>
-              <a:rPr lang="en-US" smtClean="0"/>
+              <a:rPr lang="en-US"/>
               <a:t>Click to edit Master text styles</a:t>
             </a:r>
           </a:p>
@@ -1565,38 +1568,37 @@
           <a:p>
             <a:pPr lvl="0"/>
             <a:r>
-              <a:rPr lang="en-US" smtClean="0"/>
+              <a:rPr lang="en-US"/>
               <a:t>Click to edit Master text styles</a:t>
             </a:r>
           </a:p>
           <a:p>
             <a:pPr lvl="1"/>
             <a:r>
-              <a:rPr lang="en-US" smtClean="0"/>
+              <a:rPr lang="en-US"/>
               <a:t>Second level</a:t>
             </a:r>
           </a:p>
           <a:p>
             <a:pPr lvl="2"/>
             <a:r>
-              <a:rPr lang="en-US" smtClean="0"/>
+              <a:rPr lang="en-US"/>
               <a:t>Third level</a:t>
             </a:r>
           </a:p>
           <a:p>
             <a:pPr lvl="3"/>
             <a:r>
-              <a:rPr lang="en-US" smtClean="0"/>
+              <a:rPr lang="en-US"/>
               <a:t>Fourth level</a:t>
             </a:r>
           </a:p>
           <a:p>
             <a:pPr lvl="4"/>
             <a:r>
-              <a:rPr lang="en-US" smtClean="0"/>
+              <a:rPr lang="en-US"/>
               <a:t>Fifth level</a:t>
             </a:r>
-            <a:endParaRPr lang="en-US"/>
           </a:p>
         </p:txBody>
       </p:sp>
@@ -1659,7 +1661,7 @@
           <a:p>
             <a:pPr lvl="0"/>
             <a:r>
-              <a:rPr lang="en-US" smtClean="0"/>
+              <a:rPr lang="en-US"/>
               <a:t>Click to edit Master text styles</a:t>
             </a:r>
           </a:p>
@@ -1715,38 +1717,37 @@
           <a:p>
             <a:pPr lvl="0"/>
             <a:r>
-              <a:rPr lang="en-US" smtClean="0"/>
+              <a:rPr lang="en-US"/>
               <a:t>Click to edit Master text styles</a:t>
             </a:r>
           </a:p>
           <a:p>
             <a:pPr lvl="1"/>
             <a:r>
-              <a:rPr lang="en-US" smtClean="0"/>
+              <a:rPr lang="en-US"/>
               <a:t>Second level</a:t>
             </a:r>
           </a:p>
           <a:p>
             <a:pPr lvl="2"/>
             <a:r>
-              <a:rPr lang="en-US" smtClean="0"/>
+              <a:rPr lang="en-US"/>
               <a:t>Third level</a:t>
             </a:r>
           </a:p>
           <a:p>
             <a:pPr lvl="3"/>
             <a:r>
-              <a:rPr lang="en-US" smtClean="0"/>
+              <a:rPr lang="en-US"/>
               <a:t>Fourth level</a:t>
             </a:r>
           </a:p>
           <a:p>
             <a:pPr lvl="4"/>
             <a:r>
-              <a:rPr lang="en-US" smtClean="0"/>
+              <a:rPr lang="en-US"/>
               <a:t>Fifth level</a:t>
             </a:r>
-            <a:endParaRPr lang="en-US"/>
           </a:p>
         </p:txBody>
       </p:sp>
@@ -1767,7 +1768,7 @@
           <a:p>
             <a:fld id="{5BCAD085-E8A6-8845-BD4E-CB4CCA059FC4}" type="datetimeFigureOut">
               <a:rPr lang="en-US" smtClean="0"/>
-              <a:t>1/27/13</a:t>
+              <a:t>8/12/26</a:t>
             </a:fld>
             <a:endParaRPr lang="en-US"/>
           </a:p>
@@ -1861,10 +1862,9 @@
           <a:lstStyle/>
           <a:p>
             <a:r>
-              <a:rPr lang="en-US" smtClean="0"/>
+              <a:rPr lang="en-US"/>
               <a:t>Click to edit Master title style</a:t>
             </a:r>
-            <a:endParaRPr lang="en-US"/>
           </a:p>
         </p:txBody>
       </p:sp>
@@ -1885,7 +1885,7 @@
           <a:p>
             <a:fld id="{5BCAD085-E8A6-8845-BD4E-CB4CCA059FC4}" type="datetimeFigureOut">
               <a:rPr lang="en-US" smtClean="0"/>
-              <a:t>1/27/13</a:t>
+              <a:t>8/12/26</a:t>
             </a:fld>
             <a:endParaRPr lang="en-US"/>
           </a:p>
@@ -1980,7 +1980,7 @@
           <a:p>
             <a:fld id="{5BCAD085-E8A6-8845-BD4E-CB4CCA059FC4}" type="datetimeFigureOut">
               <a:rPr lang="en-US" smtClean="0"/>
-              <a:t>1/27/13</a:t>
+              <a:t>8/12/26</a:t>
             </a:fld>
             <a:endParaRPr lang="en-US"/>
           </a:p>
@@ -2083,10 +2083,9 @@
           </a:lstStyle>
           <a:p>
             <a:r>
-              <a:rPr lang="en-US" smtClean="0"/>
+              <a:rPr lang="en-US"/>
               <a:t>Click to edit Master title style</a:t>
             </a:r>
-            <a:endParaRPr lang="en-US"/>
           </a:p>
         </p:txBody>
       </p:sp>
@@ -2140,38 +2139,37 @@
           <a:p>
             <a:pPr lvl="0"/>
             <a:r>
-              <a:rPr lang="en-US" smtClean="0"/>
+              <a:rPr lang="en-US"/>
               <a:t>Click to edit Master text styles</a:t>
             </a:r>
           </a:p>
           <a:p>
             <a:pPr lvl="1"/>
             <a:r>
-              <a:rPr lang="en-US" smtClean="0"/>
+              <a:rPr lang="en-US"/>
               <a:t>Second level</a:t>
             </a:r>
           </a:p>
           <a:p>
             <a:pPr lvl="2"/>
             <a:r>
-              <a:rPr lang="en-US" smtClean="0"/>
+              <a:rPr lang="en-US"/>
               <a:t>Third level</a:t>
             </a:r>
           </a:p>
           <a:p>
             <a:pPr lvl="3"/>
             <a:r>
-              <a:rPr lang="en-US" smtClean="0"/>
+              <a:rPr lang="en-US"/>
               <a:t>Fourth level</a:t>
             </a:r>
           </a:p>
           <a:p>
             <a:pPr lvl="4"/>
             <a:r>
-              <a:rPr lang="en-US" smtClean="0"/>
+              <a:rPr lang="en-US"/>
               <a:t>Fifth level</a:t>
             </a:r>
-            <a:endParaRPr lang="en-US"/>
           </a:p>
         </p:txBody>
       </p:sp>
@@ -2234,7 +2232,7 @@
           <a:p>
             <a:pPr lvl="0"/>
             <a:r>
-              <a:rPr lang="en-US" smtClean="0"/>
+              <a:rPr lang="en-US"/>
               <a:t>Click to edit Master text styles</a:t>
             </a:r>
           </a:p>
@@ -2257,7 +2255,7 @@
           <a:p>
             <a:fld id="{5BCAD085-E8A6-8845-BD4E-CB4CCA059FC4}" type="datetimeFigureOut">
               <a:rPr lang="en-US" smtClean="0"/>
-              <a:t>1/27/13</a:t>
+              <a:t>8/12/26</a:t>
             </a:fld>
             <a:endParaRPr lang="en-US"/>
           </a:p>
@@ -2360,10 +2358,9 @@
           </a:lstStyle>
           <a:p>
             <a:r>
-              <a:rPr lang="en-US" smtClean="0"/>
+              <a:rPr lang="en-US"/>
               <a:t>Click to edit Master title style</a:t>
             </a:r>
-            <a:endParaRPr lang="en-US"/>
           </a:p>
         </p:txBody>
       </p:sp>
@@ -2487,7 +2484,7 @@
           <a:p>
             <a:pPr lvl="0"/>
             <a:r>
-              <a:rPr lang="en-US" smtClean="0"/>
+              <a:rPr lang="en-US"/>
               <a:t>Click to edit Master text styles</a:t>
             </a:r>
           </a:p>
@@ -2510,7 +2507,7 @@
           <a:p>
             <a:fld id="{5BCAD085-E8A6-8845-BD4E-CB4CCA059FC4}" type="datetimeFigureOut">
               <a:rPr lang="en-US" smtClean="0"/>
-              <a:t>1/27/13</a:t>
+              <a:t>8/12/26</a:t>
             </a:fld>
             <a:endParaRPr lang="en-US"/>
           </a:p>
@@ -2619,10 +2616,9 @@
           <a:lstStyle/>
           <a:p>
             <a:r>
-              <a:rPr lang="en-US" smtClean="0"/>
+              <a:rPr lang="en-US"/>
               <a:t>Click to edit Master title style</a:t>
             </a:r>
-            <a:endParaRPr lang="en-US"/>
           </a:p>
         </p:txBody>
       </p:sp>
@@ -2653,38 +2649,37 @@
           <a:p>
             <a:pPr lvl="0"/>
             <a:r>
-              <a:rPr lang="en-US" smtClean="0"/>
+              <a:rPr lang="en-US"/>
               <a:t>Click to edit Master text styles</a:t>
             </a:r>
           </a:p>
           <a:p>
             <a:pPr lvl="1"/>
             <a:r>
-              <a:rPr lang="en-US" smtClean="0"/>
+              <a:rPr lang="en-US"/>
               <a:t>Second level</a:t>
             </a:r>
           </a:p>
           <a:p>
             <a:pPr lvl="2"/>
             <a:r>
-              <a:rPr lang="en-US" smtClean="0"/>
+              <a:rPr lang="en-US"/>
               <a:t>Third level</a:t>
             </a:r>
           </a:p>
           <a:p>
             <a:pPr lvl="3"/>
             <a:r>
-              <a:rPr lang="en-US" smtClean="0"/>
+              <a:rPr lang="en-US"/>
               <a:t>Fourth level</a:t>
             </a:r>
           </a:p>
           <a:p>
             <a:pPr lvl="4"/>
             <a:r>
-              <a:rPr lang="en-US" smtClean="0"/>
+              <a:rPr lang="en-US"/>
               <a:t>Fifth level</a:t>
             </a:r>
-            <a:endParaRPr lang="en-US"/>
           </a:p>
         </p:txBody>
       </p:sp>
@@ -2723,7 +2718,7 @@
           <a:p>
             <a:fld id="{5BCAD085-E8A6-8845-BD4E-CB4CCA059FC4}" type="datetimeFigureOut">
               <a:rPr lang="en-US" smtClean="0"/>
-              <a:t>1/27/13</a:t>
+              <a:t>8/12/26</a:t>
             </a:fld>
             <a:endParaRPr lang="en-US"/>
           </a:p>
@@ -3082,7 +3077,7 @@
 </file>
 
 <file path=ppt/slides/slide1.xml><?xml version="1.0" encoding="utf-8"?>
-<p:sld xmlns:a="http://schemas.openxmlformats.org/drawingml/2006/main" xmlns:p="http://schemas.openxmlformats.org/presentationml/2006/main" xmlns:r="http://schemas.openxmlformats.org/officeDocument/2006/relationships">
+<p:sld xmlns:a="http://schemas.openxmlformats.org/drawingml/2006/main" xmlns:r="http://schemas.openxmlformats.org/officeDocument/2006/relationships" xmlns:p="http://schemas.openxmlformats.org/presentationml/2006/main">
   <p:cSld>
     <p:spTree>
       <p:nvGrpSpPr>
@@ -3090,7 +3085,14 @@
         <p:cNvGrpSpPr/>
         <p:nvPr/>
       </p:nvGrpSpPr>
-      <p:grpSpPr/>
+      <p:grpSpPr>
+        <a:xfrm>
+          <a:off x="0" y="0"/>
+          <a:ext cx="0" cy="0"/>
+          <a:chOff x="0" y="0"/>
+          <a:chExt cx="0" cy="0"/>
+        </a:xfrm>
+      </p:grpSpPr>
       <p:sp>
         <p:nvSpPr>
           <p:cNvPr id="2" name="TextBox 1"/>
@@ -3108,7 +3110,7 @@
           <a:noFill/>
         </p:spPr>
         <p:txBody>
-          <a:bodyPr wrap="square" lIns="0" rIns="0" tIns="0" bIns="0">
+          <a:bodyPr wrap="square" lIns="0" tIns="0" rIns="0" bIns="0">
             <a:spAutoFit/>
           </a:bodyPr>
           <a:lstStyle/>
@@ -3147,7 +3149,7 @@
           <a:noFill/>
         </p:spPr>
         <p:txBody>
-          <a:bodyPr wrap="square" lIns="0" rIns="0" tIns="0" bIns="0">
+          <a:bodyPr wrap="square" lIns="0" tIns="0" rIns="0" bIns="0">
             <a:spAutoFit/>
           </a:bodyPr>
           <a:lstStyle/>
@@ -3210,6 +3212,7 @@
           <a:lstStyle/>
           <a:p>
             <a:pPr algn="ctr"/>
+            <a:endParaRPr/>
           </a:p>
         </p:txBody>
       </p:sp>
@@ -3230,7 +3233,7 @@
           <a:noFill/>
         </p:spPr>
         <p:txBody>
-          <a:bodyPr wrap="square" lIns="0" rIns="0" tIns="0" bIns="0">
+          <a:bodyPr wrap="square" lIns="0" tIns="0" rIns="0" bIns="0">
             <a:spAutoFit/>
           </a:bodyPr>
           <a:lstStyle/>
@@ -3269,7 +3272,7 @@
           <a:noFill/>
         </p:spPr>
         <p:txBody>
-          <a:bodyPr wrap="square" lIns="0" rIns="0" tIns="0" bIns="0">
+          <a:bodyPr wrap="square" lIns="0" tIns="0" rIns="0" bIns="0">
             <a:spAutoFit/>
           </a:bodyPr>
           <a:lstStyle/>
@@ -3332,7 +3335,7 @@
           </a:fontRef>
         </p:style>
         <p:txBody>
-          <a:bodyPr rtlCol="0" anchor="ctr" wrap="square" lIns="73152" rIns="73152"/>
+          <a:bodyPr wrap="square" lIns="73152" rIns="73152" rtlCol="0" anchor="ctr"/>
           <a:lstStyle/>
           <a:p>
             <a:pPr algn="ctr"/>
@@ -3401,7 +3404,7 @@
           </a:fontRef>
         </p:style>
         <p:txBody>
-          <a:bodyPr rtlCol="0" anchor="ctr" wrap="square" lIns="73152" rIns="73152"/>
+          <a:bodyPr wrap="square" lIns="73152" rIns="73152" rtlCol="0" anchor="ctr"/>
           <a:lstStyle/>
           <a:p>
             <a:pPr algn="ctr"/>
@@ -3470,6 +3473,7 @@
           <a:lstStyle/>
           <a:p>
             <a:pPr algn="ctr"/>
+            <a:endParaRPr/>
           </a:p>
         </p:txBody>
       </p:sp>
@@ -3514,7 +3518,7 @@
           </a:fontRef>
         </p:style>
         <p:txBody>
-          <a:bodyPr rtlCol="0" anchor="ctr" wrap="square" lIns="73152" rIns="73152"/>
+          <a:bodyPr wrap="square" lIns="73152" rIns="73152" rtlCol="0" anchor="ctr"/>
           <a:lstStyle/>
           <a:p>
             <a:pPr algn="ctr"/>
@@ -3559,7 +3563,7 @@
           <a:noFill/>
         </p:spPr>
         <p:txBody>
-          <a:bodyPr wrap="square" lIns="0" rIns="0" tIns="0" bIns="0">
+          <a:bodyPr wrap="square" lIns="0" tIns="0" rIns="0" bIns="0">
             <a:spAutoFit/>
           </a:bodyPr>
           <a:lstStyle/>
@@ -3590,7 +3594,7 @@
         <p:spPr>
           <a:xfrm>
             <a:off x="566928" y="5925312"/>
-            <a:ext cx="11064240" cy="640080"/>
+            <a:ext cx="11064240" cy="176972"/>
           </a:xfrm>
           <a:prstGeom prst="rect">
             <a:avLst/>
@@ -3598,7 +3602,7 @@
           <a:noFill/>
         </p:spPr>
         <p:txBody>
-          <a:bodyPr wrap="square" lIns="0" rIns="0" tIns="0" bIns="0">
+          <a:bodyPr wrap="square" lIns="0" tIns="0" rIns="0" bIns="0">
             <a:spAutoFit/>
           </a:bodyPr>
           <a:lstStyle/>
@@ -3609,13 +3613,31 @@
               </a:spcAft>
             </a:pPr>
             <a:r>
-              <a:rPr sz="1150" b="0">
+              <a:rPr sz="1150" b="0" dirty="0">
                 <a:solidFill>
                   <a:srgbClr val="1A2332"/>
                 </a:solidFill>
                 <a:latin typeface="Calibri"/>
               </a:rPr>
-              <a:t>Regulated, repeatable, auditable processes — loan approvals, compliance workflows, onboarding pipelines — where the sequence of steps must hold, but each step and each permitted intervention is still decided by policy rather than hard-coded.</a:t>
+              <a:t>Repeatable</a:t>
+            </a:r>
+            <a:r>
+              <a:rPr lang="en-US" sz="1150" b="0" dirty="0">
+                <a:solidFill>
+                  <a:srgbClr val="1A2332"/>
+                </a:solidFill>
+                <a:latin typeface="Calibri"/>
+              </a:rPr>
+              <a:t> </a:t>
+            </a:r>
+            <a:r>
+              <a:rPr sz="1150" b="0" dirty="0">
+                <a:solidFill>
+                  <a:srgbClr val="1A2332"/>
+                </a:solidFill>
+                <a:latin typeface="Calibri"/>
+              </a:rPr>
+              <a:t>processes where the sequence of steps must hold, but each step and each permitted intervention is still decided by policy rather than hard-coded.</a:t>
             </a:r>
           </a:p>
         </p:txBody>
@@ -3629,7 +3651,7 @@
 </file>
 
 <file path=ppt/slides/slide2.xml><?xml version="1.0" encoding="utf-8"?>
-<p:sld xmlns:a="http://schemas.openxmlformats.org/drawingml/2006/main" xmlns:p="http://schemas.openxmlformats.org/presentationml/2006/main" xmlns:r="http://schemas.openxmlformats.org/officeDocument/2006/relationships">
+<p:sld xmlns:a="http://schemas.openxmlformats.org/drawingml/2006/main" xmlns:r="http://schemas.openxmlformats.org/officeDocument/2006/relationships" xmlns:p="http://schemas.openxmlformats.org/presentationml/2006/main">
   <p:cSld>
     <p:spTree>
       <p:nvGrpSpPr>
@@ -3637,7 +3659,14 @@
         <p:cNvGrpSpPr/>
         <p:nvPr/>
       </p:nvGrpSpPr>
-      <p:grpSpPr/>
+      <p:grpSpPr>
+        <a:xfrm>
+          <a:off x="0" y="0"/>
+          <a:ext cx="0" cy="0"/>
+          <a:chOff x="0" y="0"/>
+          <a:chExt cx="0" cy="0"/>
+        </a:xfrm>
+      </p:grpSpPr>
       <p:sp>
         <p:nvSpPr>
           <p:cNvPr id="2" name="TextBox 1"/>
@@ -3655,7 +3684,7 @@
           <a:noFill/>
         </p:spPr>
         <p:txBody>
-          <a:bodyPr wrap="square" lIns="0" rIns="0" tIns="0" bIns="0">
+          <a:bodyPr wrap="square" lIns="0" tIns="0" rIns="0" bIns="0">
             <a:spAutoFit/>
           </a:bodyPr>
           <a:lstStyle/>
@@ -3694,7 +3723,7 @@
           <a:noFill/>
         </p:spPr>
         <p:txBody>
-          <a:bodyPr wrap="square" lIns="0" rIns="0" tIns="0" bIns="0">
+          <a:bodyPr wrap="square" lIns="0" tIns="0" rIns="0" bIns="0">
             <a:spAutoFit/>
           </a:bodyPr>
           <a:lstStyle/>
@@ -3757,6 +3786,7 @@
           <a:lstStyle/>
           <a:p>
             <a:pPr algn="ctr"/>
+            <a:endParaRPr/>
           </a:p>
         </p:txBody>
       </p:sp>
@@ -3777,7 +3807,7 @@
           <a:noFill/>
         </p:spPr>
         <p:txBody>
-          <a:bodyPr wrap="square" lIns="0" rIns="0" tIns="0" bIns="0">
+          <a:bodyPr wrap="square" lIns="0" tIns="0" rIns="0" bIns="0">
             <a:spAutoFit/>
           </a:bodyPr>
           <a:lstStyle/>
@@ -3840,7 +3870,7 @@
           </a:fontRef>
         </p:style>
         <p:txBody>
-          <a:bodyPr rtlCol="0" anchor="ctr" wrap="square" lIns="73152" rIns="73152"/>
+          <a:bodyPr wrap="square" lIns="73152" rIns="73152" rtlCol="0" anchor="ctr"/>
           <a:lstStyle/>
           <a:p>
             <a:pPr algn="ctr"/>
@@ -3910,7 +3940,7 @@
           </a:fontRef>
         </p:style>
         <p:txBody>
-          <a:bodyPr rtlCol="0" anchor="ctr" wrap="square" lIns="73152" rIns="73152"/>
+          <a:bodyPr wrap="square" lIns="73152" rIns="73152" rtlCol="0" anchor="ctr"/>
           <a:lstStyle/>
           <a:p>
             <a:pPr algn="ctr"/>
@@ -3984,6 +4014,7 @@
           <a:lstStyle/>
           <a:p>
             <a:pPr algn="ctr"/>
+            <a:endParaRPr/>
           </a:p>
         </p:txBody>
       </p:sp>
@@ -4004,7 +4035,7 @@
           <a:noFill/>
         </p:spPr>
         <p:txBody>
-          <a:bodyPr wrap="square" lIns="0" rIns="0" tIns="0" bIns="0">
+          <a:bodyPr wrap="square" lIns="0" tIns="0" rIns="0" bIns="0">
             <a:spAutoFit/>
           </a:bodyPr>
           <a:lstStyle/>
@@ -4043,7 +4074,7 @@
           <a:noFill/>
         </p:spPr>
         <p:txBody>
-          <a:bodyPr wrap="square" lIns="0" rIns="0" tIns="0" bIns="0">
+          <a:bodyPr wrap="square" lIns="0" tIns="0" rIns="0" bIns="0">
             <a:spAutoFit/>
           </a:bodyPr>
           <a:lstStyle/>
@@ -4122,6 +4153,7 @@
           <a:lstStyle/>
           <a:p>
             <a:pPr algn="ctr"/>
+            <a:endParaRPr/>
           </a:p>
         </p:txBody>
       </p:sp>
@@ -4166,6 +4198,7 @@
           <a:lstStyle/>
           <a:p>
             <a:pPr algn="ctr"/>
+            <a:endParaRPr/>
           </a:p>
         </p:txBody>
       </p:sp>
@@ -4186,7 +4219,7 @@
           <a:noFill/>
         </p:spPr>
         <p:txBody>
-          <a:bodyPr wrap="square" lIns="0" rIns="0" tIns="0" bIns="0">
+          <a:bodyPr wrap="square" lIns="0" tIns="0" rIns="0" bIns="0">
             <a:spAutoFit/>
           </a:bodyPr>
           <a:lstStyle/>
@@ -4227,9 +4260,27 @@
                 <a:tableStyleId>{5C22544A-7EE6-4342-B048-85BDC9FD1C3A}</a:tableStyleId>
               </a:tblPr>
               <a:tblGrid>
-                <a:gridCol w="1600200"/>
-                <a:gridCol w="1691640"/>
-                <a:gridCol w="2194560"/>
+                <a:gridCol w="1600200">
+                  <a:extLst>
+                    <a:ext uri="{9D8B030D-6E8A-4147-A177-3AD203B41FA5}">
+                      <a16:colId xmlns:a16="http://schemas.microsoft.com/office/drawing/2014/main" val="20000"/>
+                    </a:ext>
+                  </a:extLst>
+                </a:gridCol>
+                <a:gridCol w="1691640">
+                  <a:extLst>
+                    <a:ext uri="{9D8B030D-6E8A-4147-A177-3AD203B41FA5}">
+                      <a16:colId xmlns:a16="http://schemas.microsoft.com/office/drawing/2014/main" val="20001"/>
+                    </a:ext>
+                  </a:extLst>
+                </a:gridCol>
+                <a:gridCol w="2194560">
+                  <a:extLst>
+                    <a:ext uri="{9D8B030D-6E8A-4147-A177-3AD203B41FA5}">
+                      <a16:colId xmlns:a16="http://schemas.microsoft.com/office/drawing/2014/main" val="20002"/>
+                    </a:ext>
+                  </a:extLst>
+                </a:gridCol>
               </a:tblGrid>
               <a:tr h="289560">
                 <a:tc>
@@ -4298,6 +4349,11 @@
                     </a:solidFill>
                   </a:tcPr>
                 </a:tc>
+                <a:extLst>
+                  <a:ext uri="{0D108BD9-81ED-4DB2-BD59-A6C34878D82A}">
+                    <a16:rowId xmlns:a16="http://schemas.microsoft.com/office/drawing/2014/main" val="10000"/>
+                  </a:ext>
+                </a:extLst>
               </a:tr>
               <a:tr h="289560">
                 <a:tc>
@@ -4366,6 +4422,11 @@
                     </a:solidFill>
                   </a:tcPr>
                 </a:tc>
+                <a:extLst>
+                  <a:ext uri="{0D108BD9-81ED-4DB2-BD59-A6C34878D82A}">
+                    <a16:rowId xmlns:a16="http://schemas.microsoft.com/office/drawing/2014/main" val="10001"/>
+                  </a:ext>
+                </a:extLst>
               </a:tr>
               <a:tr h="289560">
                 <a:tc>
@@ -4434,6 +4495,11 @@
                     </a:solidFill>
                   </a:tcPr>
                 </a:tc>
+                <a:extLst>
+                  <a:ext uri="{0D108BD9-81ED-4DB2-BD59-A6C34878D82A}">
+                    <a16:rowId xmlns:a16="http://schemas.microsoft.com/office/drawing/2014/main" val="10002"/>
+                  </a:ext>
+                </a:extLst>
               </a:tr>
               <a:tr h="289560">
                 <a:tc>
@@ -4502,6 +4568,11 @@
                     </a:solidFill>
                   </a:tcPr>
                 </a:tc>
+                <a:extLst>
+                  <a:ext uri="{0D108BD9-81ED-4DB2-BD59-A6C34878D82A}">
+                    <a16:rowId xmlns:a16="http://schemas.microsoft.com/office/drawing/2014/main" val="10003"/>
+                  </a:ext>
+                </a:extLst>
               </a:tr>
               <a:tr h="289560">
                 <a:tc>
@@ -4570,6 +4641,11 @@
                     </a:solidFill>
                   </a:tcPr>
                 </a:tc>
+                <a:extLst>
+                  <a:ext uri="{0D108BD9-81ED-4DB2-BD59-A6C34878D82A}">
+                    <a16:rowId xmlns:a16="http://schemas.microsoft.com/office/drawing/2014/main" val="10004"/>
+                  </a:ext>
+                </a:extLst>
               </a:tr>
               <a:tr h="289560">
                 <a:tc>
@@ -4638,6 +4714,11 @@
                     </a:solidFill>
                   </a:tcPr>
                 </a:tc>
+                <a:extLst>
+                  <a:ext uri="{0D108BD9-81ED-4DB2-BD59-A6C34878D82A}">
+                    <a16:rowId xmlns:a16="http://schemas.microsoft.com/office/drawing/2014/main" val="10005"/>
+                  </a:ext>
+                </a:extLst>
               </a:tr>
             </a:tbl>
           </a:graphicData>
@@ -4660,7 +4741,7 @@
           <a:noFill/>
         </p:spPr>
         <p:txBody>
-          <a:bodyPr wrap="square" lIns="0" rIns="0" tIns="0" bIns="0">
+          <a:bodyPr wrap="square" lIns="0" tIns="0" rIns="0" bIns="0">
             <a:spAutoFit/>
           </a:bodyPr>
           <a:lstStyle/>
@@ -4727,6 +4808,7 @@
           <a:lstStyle/>
           <a:p>
             <a:pPr algn="ctr"/>
+            <a:endParaRPr/>
           </a:p>
         </p:txBody>
       </p:sp>
@@ -4747,7 +4829,7 @@
           <a:noFill/>
         </p:spPr>
         <p:txBody>
-          <a:bodyPr wrap="square" lIns="0" rIns="0" tIns="0" bIns="0">
+          <a:bodyPr wrap="square" lIns="0" tIns="0" rIns="0" bIns="0">
             <a:spAutoFit/>
           </a:bodyPr>
           <a:lstStyle/>
@@ -4786,7 +4868,7 @@
           <a:noFill/>
         </p:spPr>
         <p:txBody>
-          <a:bodyPr wrap="square" lIns="0" rIns="0" tIns="0" bIns="0">
+          <a:bodyPr wrap="square" lIns="0" tIns="0" rIns="0" bIns="0">
             <a:spAutoFit/>
           </a:bodyPr>
           <a:lstStyle/>
@@ -4825,7 +4907,7 @@
           <a:noFill/>
         </p:spPr>
         <p:txBody>
-          <a:bodyPr wrap="square" lIns="0" rIns="0" tIns="0" bIns="0">
+          <a:bodyPr wrap="square" lIns="0" tIns="0" rIns="0" bIns="0">
             <a:spAutoFit/>
           </a:bodyPr>
           <a:lstStyle/>
@@ -4864,7 +4946,7 @@
           <a:noFill/>
         </p:spPr>
         <p:txBody>
-          <a:bodyPr wrap="square" lIns="0" rIns="0" tIns="0" bIns="0">
+          <a:bodyPr wrap="square" lIns="0" tIns="0" rIns="0" bIns="0">
             <a:spAutoFit/>
           </a:bodyPr>
           <a:lstStyle/>
@@ -4903,7 +4985,7 @@
           <a:noFill/>
         </p:spPr>
         <p:txBody>
-          <a:bodyPr wrap="square" lIns="0" rIns="0" tIns="0" bIns="0">
+          <a:bodyPr wrap="square" lIns="0" tIns="0" rIns="0" bIns="0">
             <a:spAutoFit/>
           </a:bodyPr>
           <a:lstStyle/>
@@ -4942,7 +5024,7 @@
           <a:noFill/>
         </p:spPr>
         <p:txBody>
-          <a:bodyPr wrap="square" lIns="0" rIns="0" tIns="0" bIns="0">
+          <a:bodyPr wrap="square" lIns="0" tIns="0" rIns="0" bIns="0">
             <a:spAutoFit/>
           </a:bodyPr>
           <a:lstStyle/>
@@ -4981,7 +5063,7 @@
           <a:noFill/>
         </p:spPr>
         <p:txBody>
-          <a:bodyPr wrap="square" lIns="0" rIns="0" tIns="0" bIns="0">
+          <a:bodyPr wrap="square" lIns="0" tIns="0" rIns="0" bIns="0">
             <a:spAutoFit/>
           </a:bodyPr>
           <a:lstStyle/>
@@ -5020,7 +5102,7 @@
           <a:noFill/>
         </p:spPr>
         <p:txBody>
-          <a:bodyPr wrap="square" lIns="0" rIns="0" tIns="0" bIns="0">
+          <a:bodyPr wrap="square" lIns="0" tIns="0" rIns="0" bIns="0">
             <a:spAutoFit/>
           </a:bodyPr>
           <a:lstStyle/>
@@ -5059,7 +5141,7 @@
           <a:noFill/>
         </p:spPr>
         <p:txBody>
-          <a:bodyPr wrap="square" lIns="0" rIns="0" tIns="0" bIns="0">
+          <a:bodyPr wrap="square" lIns="0" tIns="0" rIns="0" bIns="0">
             <a:spAutoFit/>
           </a:bodyPr>
           <a:lstStyle/>
@@ -5098,7 +5180,7 @@
           <a:noFill/>
         </p:spPr>
         <p:txBody>
-          <a:bodyPr wrap="square" lIns="0" rIns="0" tIns="0" bIns="0">
+          <a:bodyPr wrap="square" lIns="0" tIns="0" rIns="0" bIns="0">
             <a:spAutoFit/>
           </a:bodyPr>
           <a:lstStyle/>
@@ -5137,7 +5219,7 @@
           <a:noFill/>
         </p:spPr>
         <p:txBody>
-          <a:bodyPr wrap="square" lIns="0" rIns="0" tIns="0" bIns="0">
+          <a:bodyPr wrap="square" lIns="0" tIns="0" rIns="0" bIns="0">
             <a:spAutoFit/>
           </a:bodyPr>
           <a:lstStyle/>
@@ -5176,7 +5258,7 @@
           <a:noFill/>
         </p:spPr>
         <p:txBody>
-          <a:bodyPr wrap="square" lIns="0" rIns="0" tIns="0" bIns="0">
+          <a:bodyPr wrap="square" lIns="0" tIns="0" rIns="0" bIns="0">
             <a:spAutoFit/>
           </a:bodyPr>
           <a:lstStyle/>
@@ -5215,7 +5297,7 @@
           <a:noFill/>
         </p:spPr>
         <p:txBody>
-          <a:bodyPr wrap="square" lIns="0" rIns="0" tIns="0" bIns="0">
+          <a:bodyPr wrap="square" lIns="0" tIns="0" rIns="0" bIns="0">
             <a:spAutoFit/>
           </a:bodyPr>
           <a:lstStyle/>
@@ -5246,7 +5328,7 @@
 </file>
 
 <file path=ppt/slides/slide3.xml><?xml version="1.0" encoding="utf-8"?>
-<p:sld xmlns:a="http://schemas.openxmlformats.org/drawingml/2006/main" xmlns:p="http://schemas.openxmlformats.org/presentationml/2006/main" xmlns:r="http://schemas.openxmlformats.org/officeDocument/2006/relationships">
+<p:sld xmlns:a="http://schemas.openxmlformats.org/drawingml/2006/main" xmlns:r="http://schemas.openxmlformats.org/officeDocument/2006/relationships" xmlns:p="http://schemas.openxmlformats.org/presentationml/2006/main">
   <p:cSld>
     <p:spTree>
       <p:nvGrpSpPr>
@@ -5254,7 +5336,14 @@
         <p:cNvGrpSpPr/>
         <p:nvPr/>
       </p:nvGrpSpPr>
-      <p:grpSpPr/>
+      <p:grpSpPr>
+        <a:xfrm>
+          <a:off x="0" y="0"/>
+          <a:ext cx="0" cy="0"/>
+          <a:chOff x="0" y="0"/>
+          <a:chExt cx="0" cy="0"/>
+        </a:xfrm>
+      </p:grpSpPr>
       <p:sp>
         <p:nvSpPr>
           <p:cNvPr id="2" name="TextBox 1"/>
@@ -5272,7 +5361,7 @@
           <a:noFill/>
         </p:spPr>
         <p:txBody>
-          <a:bodyPr wrap="square" lIns="0" rIns="0" tIns="0" bIns="0">
+          <a:bodyPr wrap="square" lIns="0" tIns="0" rIns="0" bIns="0">
             <a:spAutoFit/>
           </a:bodyPr>
           <a:lstStyle/>
@@ -5311,7 +5400,7 @@
           <a:noFill/>
         </p:spPr>
         <p:txBody>
-          <a:bodyPr wrap="square" lIns="0" rIns="0" tIns="0" bIns="0">
+          <a:bodyPr wrap="square" lIns="0" tIns="0" rIns="0" bIns="0">
             <a:spAutoFit/>
           </a:bodyPr>
           <a:lstStyle/>
@@ -5374,6 +5463,7 @@
           <a:lstStyle/>
           <a:p>
             <a:pPr algn="ctr"/>
+            <a:endParaRPr/>
           </a:p>
         </p:txBody>
       </p:sp>
@@ -5394,7 +5484,7 @@
           <a:noFill/>
         </p:spPr>
         <p:txBody>
-          <a:bodyPr wrap="square" lIns="0" rIns="0" tIns="0" bIns="0">
+          <a:bodyPr wrap="square" lIns="0" tIns="0" rIns="0" bIns="0">
             <a:spAutoFit/>
           </a:bodyPr>
           <a:lstStyle/>
@@ -5461,6 +5551,7 @@
           <a:lstStyle/>
           <a:p>
             <a:pPr algn="ctr"/>
+            <a:endParaRPr/>
           </a:p>
         </p:txBody>
       </p:sp>
@@ -5534,7 +5625,7 @@
           <a:noFill/>
         </p:spPr>
         <p:txBody>
-          <a:bodyPr wrap="square" lIns="0" rIns="0" tIns="0" bIns="0">
+          <a:bodyPr wrap="square" lIns="0" tIns="0" rIns="0" bIns="0">
             <a:spAutoFit/>
           </a:bodyPr>
           <a:lstStyle/>
@@ -5573,7 +5664,7 @@
           <a:noFill/>
         </p:spPr>
         <p:txBody>
-          <a:bodyPr wrap="square" lIns="0" rIns="0" tIns="0" bIns="0">
+          <a:bodyPr wrap="square" lIns="0" tIns="0" rIns="0" bIns="0">
             <a:spAutoFit/>
           </a:bodyPr>
           <a:lstStyle/>
@@ -5612,7 +5703,7 @@
           <a:noFill/>
         </p:spPr>
         <p:txBody>
-          <a:bodyPr wrap="square" lIns="0" rIns="0" tIns="0" bIns="0">
+          <a:bodyPr wrap="square" lIns="0" tIns="0" rIns="0" bIns="0">
             <a:spAutoFit/>
           </a:bodyPr>
           <a:lstStyle/>
@@ -5651,7 +5742,7 @@
           <a:noFill/>
         </p:spPr>
         <p:txBody>
-          <a:bodyPr wrap="square" lIns="0" rIns="0" tIns="0" bIns="0">
+          <a:bodyPr wrap="square" lIns="0" tIns="0" rIns="0" bIns="0">
             <a:spAutoFit/>
           </a:bodyPr>
           <a:lstStyle/>
@@ -5690,7 +5781,7 @@
           <a:noFill/>
         </p:spPr>
         <p:txBody>
-          <a:bodyPr wrap="square" lIns="0" rIns="0" tIns="0" bIns="0">
+          <a:bodyPr wrap="square" lIns="0" tIns="0" rIns="0" bIns="0">
             <a:spAutoFit/>
           </a:bodyPr>
           <a:lstStyle/>
@@ -5729,7 +5820,7 @@
           <a:noFill/>
         </p:spPr>
         <p:txBody>
-          <a:bodyPr wrap="square" lIns="0" rIns="0" tIns="0" bIns="0">
+          <a:bodyPr wrap="square" lIns="0" tIns="0" rIns="0" bIns="0">
             <a:spAutoFit/>
           </a:bodyPr>
           <a:lstStyle/>
@@ -5768,7 +5859,7 @@
           <a:noFill/>
         </p:spPr>
         <p:txBody>
-          <a:bodyPr wrap="square" lIns="0" rIns="0" tIns="0" bIns="0">
+          <a:bodyPr wrap="square" lIns="0" tIns="0" rIns="0" bIns="0">
             <a:spAutoFit/>
           </a:bodyPr>
           <a:lstStyle/>
@@ -5835,6 +5926,7 @@
           <a:lstStyle/>
           <a:p>
             <a:pPr algn="ctr"/>
+            <a:endParaRPr/>
           </a:p>
         </p:txBody>
       </p:sp>
@@ -5908,7 +6000,7 @@
           <a:noFill/>
         </p:spPr>
         <p:txBody>
-          <a:bodyPr wrap="square" lIns="0" rIns="0" tIns="0" bIns="0">
+          <a:bodyPr wrap="square" lIns="0" tIns="0" rIns="0" bIns="0">
             <a:spAutoFit/>
           </a:bodyPr>
           <a:lstStyle/>
@@ -5947,7 +6039,7 @@
           <a:noFill/>
         </p:spPr>
         <p:txBody>
-          <a:bodyPr wrap="square" lIns="0" rIns="0" tIns="0" bIns="0">
+          <a:bodyPr wrap="square" lIns="0" tIns="0" rIns="0" bIns="0">
             <a:spAutoFit/>
           </a:bodyPr>
           <a:lstStyle/>
@@ -5986,7 +6078,7 @@
           <a:noFill/>
         </p:spPr>
         <p:txBody>
-          <a:bodyPr wrap="square" lIns="0" rIns="0" tIns="0" bIns="0">
+          <a:bodyPr wrap="square" lIns="0" tIns="0" rIns="0" bIns="0">
             <a:spAutoFit/>
           </a:bodyPr>
           <a:lstStyle/>
@@ -6025,7 +6117,7 @@
           <a:noFill/>
         </p:spPr>
         <p:txBody>
-          <a:bodyPr wrap="square" lIns="0" rIns="0" tIns="0" bIns="0">
+          <a:bodyPr wrap="square" lIns="0" tIns="0" rIns="0" bIns="0">
             <a:spAutoFit/>
           </a:bodyPr>
           <a:lstStyle/>
@@ -6064,7 +6156,7 @@
           <a:noFill/>
         </p:spPr>
         <p:txBody>
-          <a:bodyPr wrap="square" lIns="0" rIns="0" tIns="0" bIns="0">
+          <a:bodyPr wrap="square" lIns="0" tIns="0" rIns="0" bIns="0">
             <a:spAutoFit/>
           </a:bodyPr>
           <a:lstStyle/>
@@ -6103,7 +6195,7 @@
           <a:noFill/>
         </p:spPr>
         <p:txBody>
-          <a:bodyPr wrap="square" lIns="0" rIns="0" tIns="0" bIns="0">
+          <a:bodyPr wrap="square" lIns="0" tIns="0" rIns="0" bIns="0">
             <a:spAutoFit/>
           </a:bodyPr>
           <a:lstStyle/>
@@ -6142,7 +6234,7 @@
           <a:noFill/>
         </p:spPr>
         <p:txBody>
-          <a:bodyPr wrap="square" lIns="0" rIns="0" tIns="0" bIns="0">
+          <a:bodyPr wrap="square" lIns="0" tIns="0" rIns="0" bIns="0">
             <a:spAutoFit/>
           </a:bodyPr>
           <a:lstStyle/>
@@ -6209,6 +6301,7 @@
           <a:lstStyle/>
           <a:p>
             <a:pPr algn="ctr"/>
+            <a:endParaRPr/>
           </a:p>
         </p:txBody>
       </p:sp>
@@ -6282,7 +6375,7 @@
           <a:noFill/>
         </p:spPr>
         <p:txBody>
-          <a:bodyPr wrap="square" lIns="0" rIns="0" tIns="0" bIns="0">
+          <a:bodyPr wrap="square" lIns="0" tIns="0" rIns="0" bIns="0">
             <a:spAutoFit/>
           </a:bodyPr>
           <a:lstStyle/>
@@ -6321,7 +6414,7 @@
           <a:noFill/>
         </p:spPr>
         <p:txBody>
-          <a:bodyPr wrap="square" lIns="0" rIns="0" tIns="0" bIns="0">
+          <a:bodyPr wrap="square" lIns="0" tIns="0" rIns="0" bIns="0">
             <a:spAutoFit/>
           </a:bodyPr>
           <a:lstStyle/>
@@ -6360,7 +6453,7 @@
           <a:noFill/>
         </p:spPr>
         <p:txBody>
-          <a:bodyPr wrap="square" lIns="0" rIns="0" tIns="0" bIns="0">
+          <a:bodyPr wrap="square" lIns="0" tIns="0" rIns="0" bIns="0">
             <a:spAutoFit/>
           </a:bodyPr>
           <a:lstStyle/>
@@ -6399,7 +6492,7 @@
           <a:noFill/>
         </p:spPr>
         <p:txBody>
-          <a:bodyPr wrap="square" lIns="0" rIns="0" tIns="0" bIns="0">
+          <a:bodyPr wrap="square" lIns="0" tIns="0" rIns="0" bIns="0">
             <a:spAutoFit/>
           </a:bodyPr>
           <a:lstStyle/>
@@ -6438,7 +6531,7 @@
           <a:noFill/>
         </p:spPr>
         <p:txBody>
-          <a:bodyPr wrap="square" lIns="0" rIns="0" tIns="0" bIns="0">
+          <a:bodyPr wrap="square" lIns="0" tIns="0" rIns="0" bIns="0">
             <a:spAutoFit/>
           </a:bodyPr>
           <a:lstStyle/>
@@ -6477,7 +6570,7 @@
           <a:noFill/>
         </p:spPr>
         <p:txBody>
-          <a:bodyPr wrap="square" lIns="0" rIns="0" tIns="0" bIns="0">
+          <a:bodyPr wrap="square" lIns="0" tIns="0" rIns="0" bIns="0">
             <a:spAutoFit/>
           </a:bodyPr>
           <a:lstStyle/>
@@ -6516,7 +6609,7 @@
           <a:noFill/>
         </p:spPr>
         <p:txBody>
-          <a:bodyPr wrap="square" lIns="0" rIns="0" tIns="0" bIns="0">
+          <a:bodyPr wrap="square" lIns="0" tIns="0" rIns="0" bIns="0">
             <a:spAutoFit/>
           </a:bodyPr>
           <a:lstStyle/>
@@ -6555,7 +6648,7 @@
           <a:noFill/>
         </p:spPr>
         <p:txBody>
-          <a:bodyPr wrap="square" lIns="0" rIns="0" tIns="0" bIns="0">
+          <a:bodyPr wrap="square" lIns="0" tIns="0" rIns="0" bIns="0">
             <a:spAutoFit/>
           </a:bodyPr>
           <a:lstStyle/>
@@ -6618,7 +6711,7 @@
           </a:fontRef>
         </p:style>
         <p:txBody>
-          <a:bodyPr rtlCol="0" anchor="ctr" wrap="square" lIns="164592"/>
+          <a:bodyPr wrap="square" lIns="164592" rtlCol="0" anchor="ctr"/>
           <a:lstStyle/>
           <a:p>
             <a:pPr algn="l"/>
@@ -6663,7 +6756,7 @@
           <a:noFill/>
         </p:spPr>
         <p:txBody>
-          <a:bodyPr wrap="square" lIns="0" rIns="0" tIns="0" bIns="0">
+          <a:bodyPr wrap="square" lIns="0" tIns="0" rIns="0" bIns="0">
             <a:spAutoFit/>
           </a:bodyPr>
           <a:lstStyle/>
@@ -6730,6 +6823,7 @@
           <a:lstStyle/>
           <a:p>
             <a:pPr algn="ctr"/>
+            <a:endParaRPr/>
           </a:p>
         </p:txBody>
       </p:sp>
@@ -6750,7 +6844,7 @@
           <a:noFill/>
         </p:spPr>
         <p:txBody>
-          <a:bodyPr wrap="square" lIns="0" rIns="0" tIns="0" bIns="0">
+          <a:bodyPr wrap="square" lIns="0" tIns="0" rIns="0" bIns="0">
             <a:spAutoFit/>
           </a:bodyPr>
           <a:lstStyle/>
@@ -6789,7 +6883,7 @@
           <a:noFill/>
         </p:spPr>
         <p:txBody>
-          <a:bodyPr wrap="square" lIns="0" rIns="0" tIns="0" bIns="0">
+          <a:bodyPr wrap="square" lIns="0" tIns="0" rIns="0" bIns="0">
             <a:spAutoFit/>
           </a:bodyPr>
           <a:lstStyle/>
@@ -6820,7 +6914,7 @@
 </file>
 
 <file path=ppt/slides/slide4.xml><?xml version="1.0" encoding="utf-8"?>
-<p:sld xmlns:a="http://schemas.openxmlformats.org/drawingml/2006/main" xmlns:p="http://schemas.openxmlformats.org/presentationml/2006/main" xmlns:r="http://schemas.openxmlformats.org/officeDocument/2006/relationships">
+<p:sld xmlns:a="http://schemas.openxmlformats.org/drawingml/2006/main" xmlns:r="http://schemas.openxmlformats.org/officeDocument/2006/relationships" xmlns:p="http://schemas.openxmlformats.org/presentationml/2006/main">
   <p:cSld>
     <p:spTree>
       <p:nvGrpSpPr>
@@ -6828,7 +6922,14 @@
         <p:cNvGrpSpPr/>
         <p:nvPr/>
       </p:nvGrpSpPr>
-      <p:grpSpPr/>
+      <p:grpSpPr>
+        <a:xfrm>
+          <a:off x="0" y="0"/>
+          <a:ext cx="0" cy="0"/>
+          <a:chOff x="0" y="0"/>
+          <a:chExt cx="0" cy="0"/>
+        </a:xfrm>
+      </p:grpSpPr>
       <p:sp>
         <p:nvSpPr>
           <p:cNvPr id="2" name="TextBox 1"/>
@@ -6846,7 +6947,7 @@
           <a:noFill/>
         </p:spPr>
         <p:txBody>
-          <a:bodyPr wrap="square" lIns="0" rIns="0" tIns="0" bIns="0">
+          <a:bodyPr wrap="square" lIns="0" tIns="0" rIns="0" bIns="0">
             <a:spAutoFit/>
           </a:bodyPr>
           <a:lstStyle/>
@@ -6885,7 +6986,7 @@
           <a:noFill/>
         </p:spPr>
         <p:txBody>
-          <a:bodyPr wrap="square" lIns="0" rIns="0" tIns="0" bIns="0">
+          <a:bodyPr wrap="square" lIns="0" tIns="0" rIns="0" bIns="0">
             <a:spAutoFit/>
           </a:bodyPr>
           <a:lstStyle/>
@@ -6948,6 +7049,7 @@
           <a:lstStyle/>
           <a:p>
             <a:pPr algn="ctr"/>
+            <a:endParaRPr/>
           </a:p>
         </p:txBody>
       </p:sp>
@@ -6968,7 +7070,7 @@
           <a:noFill/>
         </p:spPr>
         <p:txBody>
-          <a:bodyPr wrap="square" lIns="0" rIns="0" tIns="0" bIns="0">
+          <a:bodyPr wrap="square" lIns="0" tIns="0" rIns="0" bIns="0">
             <a:spAutoFit/>
           </a:bodyPr>
           <a:lstStyle/>
@@ -7031,6 +7133,7 @@
           <a:lstStyle/>
           <a:p>
             <a:pPr algn="ctr"/>
+            <a:endParaRPr/>
           </a:p>
         </p:txBody>
       </p:sp>
@@ -7079,6 +7182,7 @@
           <a:lstStyle/>
           <a:p>
             <a:pPr algn="ctr"/>
+            <a:endParaRPr/>
           </a:p>
         </p:txBody>
       </p:sp>
@@ -7164,7 +7268,7 @@
           <a:noFill/>
         </p:spPr>
         <p:txBody>
-          <a:bodyPr wrap="square" lIns="0" rIns="0" tIns="0" bIns="0">
+          <a:bodyPr wrap="square" lIns="0" tIns="0" rIns="0" bIns="0">
             <a:spAutoFit/>
           </a:bodyPr>
           <a:lstStyle/>
@@ -7203,7 +7307,7 @@
           <a:noFill/>
         </p:spPr>
         <p:txBody>
-          <a:bodyPr wrap="square" lIns="0" rIns="0" tIns="0" bIns="0">
+          <a:bodyPr wrap="square" lIns="0" tIns="0" rIns="0" bIns="0">
             <a:spAutoFit/>
           </a:bodyPr>
           <a:lstStyle/>
@@ -7242,7 +7346,7 @@
           <a:noFill/>
         </p:spPr>
         <p:txBody>
-          <a:bodyPr wrap="square" lIns="0" rIns="0" tIns="0" bIns="0">
+          <a:bodyPr wrap="square" lIns="0" tIns="0" rIns="0" bIns="0">
             <a:spAutoFit/>
           </a:bodyPr>
           <a:lstStyle/>
@@ -7281,7 +7385,7 @@
           <a:noFill/>
         </p:spPr>
         <p:txBody>
-          <a:bodyPr wrap="square" lIns="0" rIns="0" tIns="0" bIns="0">
+          <a:bodyPr wrap="square" lIns="0" tIns="0" rIns="0" bIns="0">
             <a:spAutoFit/>
           </a:bodyPr>
           <a:lstStyle/>
@@ -7320,7 +7424,7 @@
           <a:noFill/>
         </p:spPr>
         <p:txBody>
-          <a:bodyPr wrap="square" lIns="0" rIns="0" tIns="0" bIns="0">
+          <a:bodyPr wrap="square" lIns="0" tIns="0" rIns="0" bIns="0">
             <a:spAutoFit/>
           </a:bodyPr>
           <a:lstStyle/>
@@ -7359,7 +7463,7 @@
           <a:noFill/>
         </p:spPr>
         <p:txBody>
-          <a:bodyPr wrap="square" lIns="0" rIns="0" tIns="0" bIns="0">
+          <a:bodyPr wrap="square" lIns="0" tIns="0" rIns="0" bIns="0">
             <a:spAutoFit/>
           </a:bodyPr>
           <a:lstStyle/>
@@ -7426,6 +7530,7 @@
           <a:lstStyle/>
           <a:p>
             <a:pPr algn="ctr"/>
+            <a:endParaRPr/>
           </a:p>
         </p:txBody>
       </p:sp>
@@ -7511,7 +7616,7 @@
           <a:noFill/>
         </p:spPr>
         <p:txBody>
-          <a:bodyPr wrap="square" lIns="0" rIns="0" tIns="0" bIns="0">
+          <a:bodyPr wrap="square" lIns="0" tIns="0" rIns="0" bIns="0">
             <a:spAutoFit/>
           </a:bodyPr>
           <a:lstStyle/>
@@ -7550,7 +7655,7 @@
           <a:noFill/>
         </p:spPr>
         <p:txBody>
-          <a:bodyPr wrap="square" lIns="0" rIns="0" tIns="0" bIns="0">
+          <a:bodyPr wrap="square" lIns="0" tIns="0" rIns="0" bIns="0">
             <a:spAutoFit/>
           </a:bodyPr>
           <a:lstStyle/>
@@ -7589,7 +7694,7 @@
           <a:noFill/>
         </p:spPr>
         <p:txBody>
-          <a:bodyPr wrap="square" lIns="0" rIns="0" tIns="0" bIns="0">
+          <a:bodyPr wrap="square" lIns="0" tIns="0" rIns="0" bIns="0">
             <a:spAutoFit/>
           </a:bodyPr>
           <a:lstStyle/>
@@ -7628,7 +7733,7 @@
           <a:noFill/>
         </p:spPr>
         <p:txBody>
-          <a:bodyPr wrap="square" lIns="0" rIns="0" tIns="0" bIns="0">
+          <a:bodyPr wrap="square" lIns="0" tIns="0" rIns="0" bIns="0">
             <a:spAutoFit/>
           </a:bodyPr>
           <a:lstStyle/>
@@ -7667,7 +7772,7 @@
           <a:noFill/>
         </p:spPr>
         <p:txBody>
-          <a:bodyPr wrap="square" lIns="0" rIns="0" tIns="0" bIns="0">
+          <a:bodyPr wrap="square" lIns="0" tIns="0" rIns="0" bIns="0">
             <a:spAutoFit/>
           </a:bodyPr>
           <a:lstStyle/>
@@ -7706,7 +7811,7 @@
           <a:noFill/>
         </p:spPr>
         <p:txBody>
-          <a:bodyPr wrap="square" lIns="0" rIns="0" tIns="0" bIns="0">
+          <a:bodyPr wrap="square" lIns="0" tIns="0" rIns="0" bIns="0">
             <a:spAutoFit/>
           </a:bodyPr>
           <a:lstStyle/>
@@ -7773,6 +7878,7 @@
           <a:lstStyle/>
           <a:p>
             <a:pPr algn="ctr"/>
+            <a:endParaRPr/>
           </a:p>
         </p:txBody>
       </p:sp>
@@ -7858,7 +7964,7 @@
           <a:noFill/>
         </p:spPr>
         <p:txBody>
-          <a:bodyPr wrap="square" lIns="0" rIns="0" tIns="0" bIns="0">
+          <a:bodyPr wrap="square" lIns="0" tIns="0" rIns="0" bIns="0">
             <a:spAutoFit/>
           </a:bodyPr>
           <a:lstStyle/>
@@ -7897,7 +8003,7 @@
           <a:noFill/>
         </p:spPr>
         <p:txBody>
-          <a:bodyPr wrap="square" lIns="0" rIns="0" tIns="0" bIns="0">
+          <a:bodyPr wrap="square" lIns="0" tIns="0" rIns="0" bIns="0">
             <a:spAutoFit/>
           </a:bodyPr>
           <a:lstStyle/>
@@ -7936,7 +8042,7 @@
           <a:noFill/>
         </p:spPr>
         <p:txBody>
-          <a:bodyPr wrap="square" lIns="0" rIns="0" tIns="0" bIns="0">
+          <a:bodyPr wrap="square" lIns="0" tIns="0" rIns="0" bIns="0">
             <a:spAutoFit/>
           </a:bodyPr>
           <a:lstStyle/>
@@ -7975,7 +8081,7 @@
           <a:noFill/>
         </p:spPr>
         <p:txBody>
-          <a:bodyPr wrap="square" lIns="0" rIns="0" tIns="0" bIns="0">
+          <a:bodyPr wrap="square" lIns="0" tIns="0" rIns="0" bIns="0">
             <a:spAutoFit/>
           </a:bodyPr>
           <a:lstStyle/>
@@ -8014,7 +8120,7 @@
           <a:noFill/>
         </p:spPr>
         <p:txBody>
-          <a:bodyPr wrap="square" lIns="0" rIns="0" tIns="0" bIns="0">
+          <a:bodyPr wrap="square" lIns="0" tIns="0" rIns="0" bIns="0">
             <a:spAutoFit/>
           </a:bodyPr>
           <a:lstStyle/>
@@ -8053,7 +8159,7 @@
           <a:noFill/>
         </p:spPr>
         <p:txBody>
-          <a:bodyPr wrap="square" lIns="0" rIns="0" tIns="0" bIns="0">
+          <a:bodyPr wrap="square" lIns="0" tIns="0" rIns="0" bIns="0">
             <a:spAutoFit/>
           </a:bodyPr>
           <a:lstStyle/>
@@ -8092,7 +8198,7 @@
           <a:noFill/>
         </p:spPr>
         <p:txBody>
-          <a:bodyPr wrap="square" lIns="0" rIns="0" tIns="0" bIns="0">
+          <a:bodyPr wrap="square" lIns="0" tIns="0" rIns="0" bIns="0">
             <a:spAutoFit/>
           </a:bodyPr>
           <a:lstStyle/>
